--- a/Akvorado-lab-slides.pptx
+++ b/Akvorado-lab-slides.pptx
@@ -5,7 +5,7 @@
     <p:sldMasterId id="2147483648" r:id="rId1"/>
   </p:sldMasterIdLst>
   <p:notesMasterIdLst>
-    <p:notesMasterId r:id="rId58"/>
+    <p:notesMasterId r:id="rId59"/>
   </p:notesMasterIdLst>
   <p:sldIdLst>
     <p:sldId id="256" r:id="rId2"/>
@@ -28,42 +28,43 @@
     <p:sldId id="273" r:id="rId19"/>
     <p:sldId id="274" r:id="rId20"/>
     <p:sldId id="275" r:id="rId21"/>
-    <p:sldId id="276" r:id="rId22"/>
-    <p:sldId id="277" r:id="rId23"/>
-    <p:sldId id="278" r:id="rId24"/>
-    <p:sldId id="279" r:id="rId25"/>
-    <p:sldId id="280" r:id="rId26"/>
-    <p:sldId id="281" r:id="rId27"/>
-    <p:sldId id="282" r:id="rId28"/>
-    <p:sldId id="284" r:id="rId29"/>
-    <p:sldId id="285" r:id="rId30"/>
-    <p:sldId id="286" r:id="rId31"/>
-    <p:sldId id="287" r:id="rId32"/>
-    <p:sldId id="288" r:id="rId33"/>
-    <p:sldId id="289" r:id="rId34"/>
-    <p:sldId id="290" r:id="rId35"/>
-    <p:sldId id="291" r:id="rId36"/>
-    <p:sldId id="292" r:id="rId37"/>
-    <p:sldId id="295" r:id="rId38"/>
-    <p:sldId id="296" r:id="rId39"/>
-    <p:sldId id="297" r:id="rId40"/>
-    <p:sldId id="298" r:id="rId41"/>
-    <p:sldId id="299" r:id="rId42"/>
-    <p:sldId id="300" r:id="rId43"/>
-    <p:sldId id="301" r:id="rId44"/>
-    <p:sldId id="302" r:id="rId45"/>
-    <p:sldId id="303" r:id="rId46"/>
-    <p:sldId id="304" r:id="rId47"/>
-    <p:sldId id="305" r:id="rId48"/>
-    <p:sldId id="306" r:id="rId49"/>
-    <p:sldId id="307" r:id="rId50"/>
-    <p:sldId id="308" r:id="rId51"/>
-    <p:sldId id="309" r:id="rId52"/>
-    <p:sldId id="314" r:id="rId53"/>
-    <p:sldId id="310" r:id="rId54"/>
-    <p:sldId id="311" r:id="rId55"/>
-    <p:sldId id="312" r:id="rId56"/>
-    <p:sldId id="313" r:id="rId57"/>
+    <p:sldId id="315" r:id="rId22"/>
+    <p:sldId id="276" r:id="rId23"/>
+    <p:sldId id="277" r:id="rId24"/>
+    <p:sldId id="278" r:id="rId25"/>
+    <p:sldId id="279" r:id="rId26"/>
+    <p:sldId id="280" r:id="rId27"/>
+    <p:sldId id="281" r:id="rId28"/>
+    <p:sldId id="282" r:id="rId29"/>
+    <p:sldId id="284" r:id="rId30"/>
+    <p:sldId id="285" r:id="rId31"/>
+    <p:sldId id="286" r:id="rId32"/>
+    <p:sldId id="287" r:id="rId33"/>
+    <p:sldId id="288" r:id="rId34"/>
+    <p:sldId id="289" r:id="rId35"/>
+    <p:sldId id="290" r:id="rId36"/>
+    <p:sldId id="291" r:id="rId37"/>
+    <p:sldId id="292" r:id="rId38"/>
+    <p:sldId id="295" r:id="rId39"/>
+    <p:sldId id="296" r:id="rId40"/>
+    <p:sldId id="297" r:id="rId41"/>
+    <p:sldId id="298" r:id="rId42"/>
+    <p:sldId id="299" r:id="rId43"/>
+    <p:sldId id="300" r:id="rId44"/>
+    <p:sldId id="301" r:id="rId45"/>
+    <p:sldId id="302" r:id="rId46"/>
+    <p:sldId id="303" r:id="rId47"/>
+    <p:sldId id="304" r:id="rId48"/>
+    <p:sldId id="305" r:id="rId49"/>
+    <p:sldId id="306" r:id="rId50"/>
+    <p:sldId id="307" r:id="rId51"/>
+    <p:sldId id="308" r:id="rId52"/>
+    <p:sldId id="309" r:id="rId53"/>
+    <p:sldId id="314" r:id="rId54"/>
+    <p:sldId id="310" r:id="rId55"/>
+    <p:sldId id="311" r:id="rId56"/>
+    <p:sldId id="312" r:id="rId57"/>
+    <p:sldId id="313" r:id="rId58"/>
   </p:sldIdLst>
   <p:sldSz cx="18288000" cy="10287000"/>
   <p:notesSz cx="10287000" cy="18288000"/>
@@ -1389,7 +1390,13 @@
   <p:cSld>
     <p:spTree>
       <p:nvGrpSpPr>
-        <p:cNvPr id="1" name=""/>
+        <p:cNvPr id="1" name="">
+          <a:extLst>
+            <a:ext uri="{FF2B5EF4-FFF2-40B4-BE49-F238E27FC236}">
+              <a16:creationId xmlns:a16="http://schemas.microsoft.com/office/drawing/2014/main" id="{A489DBFE-9B01-B246-756B-22AAF84245D0}"/>
+            </a:ext>
+          </a:extLst>
+        </p:cNvPr>
         <p:cNvGrpSpPr/>
         <p:nvPr/>
       </p:nvGrpSpPr>
@@ -1403,7 +1410,13 @@
       </p:grpSpPr>
       <p:sp>
         <p:nvSpPr>
-          <p:cNvPr id="2" name="Slide Image Placeholder 1"/>
+          <p:cNvPr id="2" name="Slide Image Placeholder 1">
+            <a:extLst>
+              <a:ext uri="{FF2B5EF4-FFF2-40B4-BE49-F238E27FC236}">
+                <a16:creationId xmlns:a16="http://schemas.microsoft.com/office/drawing/2014/main" id="{0CF4FD0B-6CF7-90C4-9841-E5E1A7A1EEC8}"/>
+              </a:ext>
+            </a:extLst>
+          </p:cNvPr>
           <p:cNvSpPr>
             <a:spLocks noGrp="1" noRot="1" noChangeAspect="1"/>
           </p:cNvSpPr>
@@ -1415,7 +1428,13 @@
       </p:sp>
       <p:sp>
         <p:nvSpPr>
-          <p:cNvPr id="3" name="Notes Placeholder 2"/>
+          <p:cNvPr id="3" name="Notes Placeholder 2">
+            <a:extLst>
+              <a:ext uri="{FF2B5EF4-FFF2-40B4-BE49-F238E27FC236}">
+                <a16:creationId xmlns:a16="http://schemas.microsoft.com/office/drawing/2014/main" id="{681321FE-C7F5-607F-E6EB-27DF7D73A483}"/>
+              </a:ext>
+            </a:extLst>
+          </p:cNvPr>
           <p:cNvSpPr>
             <a:spLocks noGrp="1"/>
           </p:cNvSpPr>
@@ -1434,7 +1453,13 @@
       </p:sp>
       <p:sp>
         <p:nvSpPr>
-          <p:cNvPr id="4" name="Slide Number Placeholder 3"/>
+          <p:cNvPr id="4" name="Slide Number Placeholder 3">
+            <a:extLst>
+              <a:ext uri="{FF2B5EF4-FFF2-40B4-BE49-F238E27FC236}">
+                <a16:creationId xmlns:a16="http://schemas.microsoft.com/office/drawing/2014/main" id="{0737D6AF-1930-B894-102A-2578EF58831D}"/>
+              </a:ext>
+            </a:extLst>
+          </p:cNvPr>
           <p:cNvSpPr>
             <a:spLocks noGrp="1"/>
           </p:cNvSpPr>
@@ -1458,7 +1483,7 @@
     </p:spTree>
     <p:extLst>
       <p:ext uri="{BB962C8B-B14F-4D97-AF65-F5344CB8AC3E}">
-        <p14:creationId xmlns:p14="http://schemas.microsoft.com/office/powerpoint/2010/main" val="1024086991"/>
+        <p14:creationId xmlns:p14="http://schemas.microsoft.com/office/powerpoint/2010/main" val="2473052668"/>
       </p:ext>
     </p:extLst>
   </p:cSld>
@@ -4245,6 +4270,90 @@
   <p:cSld>
     <p:spTree>
       <p:nvGrpSpPr>
+        <p:cNvPr id="1" name=""/>
+        <p:cNvGrpSpPr/>
+        <p:nvPr/>
+      </p:nvGrpSpPr>
+      <p:grpSpPr>
+        <a:xfrm>
+          <a:off x="0" y="0"/>
+          <a:ext cx="0" cy="0"/>
+          <a:chOff x="0" y="0"/>
+          <a:chExt cx="0" cy="0"/>
+        </a:xfrm>
+      </p:grpSpPr>
+      <p:sp>
+        <p:nvSpPr>
+          <p:cNvPr id="2" name="Slide Image Placeholder 1"/>
+          <p:cNvSpPr>
+            <a:spLocks noGrp="1" noRot="1" noChangeAspect="1"/>
+          </p:cNvSpPr>
+          <p:nvPr>
+            <p:ph type="sldImg"/>
+          </p:nvPr>
+        </p:nvSpPr>
+        <p:spPr/>
+      </p:sp>
+      <p:sp>
+        <p:nvSpPr>
+          <p:cNvPr id="3" name="Notes Placeholder 2"/>
+          <p:cNvSpPr>
+            <a:spLocks noGrp="1"/>
+          </p:cNvSpPr>
+          <p:nvPr>
+            <p:ph type="body" idx="1"/>
+          </p:nvPr>
+        </p:nvSpPr>
+        <p:spPr/>
+        <p:txBody>
+          <a:bodyPr/>
+          <a:lstStyle/>
+          <a:p>
+            <a:endParaRPr lang="en-US" dirty="0"/>
+          </a:p>
+        </p:txBody>
+      </p:sp>
+      <p:sp>
+        <p:nvSpPr>
+          <p:cNvPr id="4" name="Slide Number Placeholder 3"/>
+          <p:cNvSpPr>
+            <a:spLocks noGrp="1"/>
+          </p:cNvSpPr>
+          <p:nvPr>
+            <p:ph type="sldNum" sz="quarter" idx="10"/>
+          </p:nvPr>
+        </p:nvSpPr>
+        <p:spPr/>
+        <p:txBody>
+          <a:bodyPr/>
+          <a:lstStyle/>
+          <a:p>
+            <a:fld id="{F7021451-1387-4CA6-816F-3879F97B5CBC}" type="slidenum">
+              <a:rPr lang="en-US"/>
+              <a:t>52</a:t>
+            </a:fld>
+            <a:endParaRPr lang="en-US"/>
+          </a:p>
+        </p:txBody>
+      </p:sp>
+    </p:spTree>
+    <p:extLst>
+      <p:ext uri="{BB962C8B-B14F-4D97-AF65-F5344CB8AC3E}">
+        <p14:creationId xmlns:p14="http://schemas.microsoft.com/office/powerpoint/2010/main" val="1024086991"/>
+      </p:ext>
+    </p:extLst>
+  </p:cSld>
+  <p:clrMapOvr>
+    <a:masterClrMapping/>
+  </p:clrMapOvr>
+</p:notes>
+</file>
+
+<file path=ppt/notesSlides/notesSlide53.xml><?xml version="1.0" encoding="utf-8"?>
+<p:notes xmlns:a="http://schemas.openxmlformats.org/drawingml/2006/main" xmlns:r="http://schemas.openxmlformats.org/officeDocument/2006/relationships" xmlns:p="http://schemas.openxmlformats.org/presentationml/2006/main">
+  <p:cSld>
+    <p:spTree>
+      <p:nvGrpSpPr>
         <p:cNvPr id="1" name="">
           <a:extLst>
             <a:ext uri="{FF2B5EF4-FFF2-40B4-BE49-F238E27FC236}">
@@ -4329,7 +4438,7 @@
           <a:p>
             <a:fld id="{F7021451-1387-4CA6-816F-3879F97B5CBC}" type="slidenum">
               <a:rPr lang="en-US"/>
-              <a:t>52</a:t>
+              <a:t>53</a:t>
             </a:fld>
             <a:endParaRPr lang="en-US"/>
           </a:p>
@@ -4339,90 +4448,6 @@
     <p:extLst>
       <p:ext uri="{BB962C8B-B14F-4D97-AF65-F5344CB8AC3E}">
         <p14:creationId xmlns:p14="http://schemas.microsoft.com/office/powerpoint/2010/main" val="2216107708"/>
-      </p:ext>
-    </p:extLst>
-  </p:cSld>
-  <p:clrMapOvr>
-    <a:masterClrMapping/>
-  </p:clrMapOvr>
-</p:notes>
-</file>
-
-<file path=ppt/notesSlides/notesSlide53.xml><?xml version="1.0" encoding="utf-8"?>
-<p:notes xmlns:a="http://schemas.openxmlformats.org/drawingml/2006/main" xmlns:r="http://schemas.openxmlformats.org/officeDocument/2006/relationships" xmlns:p="http://schemas.openxmlformats.org/presentationml/2006/main">
-  <p:cSld>
-    <p:spTree>
-      <p:nvGrpSpPr>
-        <p:cNvPr id="1" name=""/>
-        <p:cNvGrpSpPr/>
-        <p:nvPr/>
-      </p:nvGrpSpPr>
-      <p:grpSpPr>
-        <a:xfrm>
-          <a:off x="0" y="0"/>
-          <a:ext cx="0" cy="0"/>
-          <a:chOff x="0" y="0"/>
-          <a:chExt cx="0" cy="0"/>
-        </a:xfrm>
-      </p:grpSpPr>
-      <p:sp>
-        <p:nvSpPr>
-          <p:cNvPr id="2" name="Slide Image Placeholder 1"/>
-          <p:cNvSpPr>
-            <a:spLocks noGrp="1" noRot="1" noChangeAspect="1"/>
-          </p:cNvSpPr>
-          <p:nvPr>
-            <p:ph type="sldImg"/>
-          </p:nvPr>
-        </p:nvSpPr>
-        <p:spPr/>
-      </p:sp>
-      <p:sp>
-        <p:nvSpPr>
-          <p:cNvPr id="3" name="Notes Placeholder 2"/>
-          <p:cNvSpPr>
-            <a:spLocks noGrp="1"/>
-          </p:cNvSpPr>
-          <p:nvPr>
-            <p:ph type="body" idx="1"/>
-          </p:nvPr>
-        </p:nvSpPr>
-        <p:spPr/>
-        <p:txBody>
-          <a:bodyPr/>
-          <a:lstStyle/>
-          <a:p>
-            <a:endParaRPr lang="en-US" dirty="0"/>
-          </a:p>
-        </p:txBody>
-      </p:sp>
-      <p:sp>
-        <p:nvSpPr>
-          <p:cNvPr id="4" name="Slide Number Placeholder 3"/>
-          <p:cNvSpPr>
-            <a:spLocks noGrp="1"/>
-          </p:cNvSpPr>
-          <p:nvPr>
-            <p:ph type="sldNum" sz="quarter" idx="10"/>
-          </p:nvPr>
-        </p:nvSpPr>
-        <p:spPr/>
-        <p:txBody>
-          <a:bodyPr/>
-          <a:lstStyle/>
-          <a:p>
-            <a:fld id="{F7021451-1387-4CA6-816F-3879F97B5CBC}" type="slidenum">
-              <a:rPr lang="en-US"/>
-              <a:t>53</a:t>
-            </a:fld>
-            <a:endParaRPr lang="en-US"/>
-          </a:p>
-        </p:txBody>
-      </p:sp>
-    </p:spTree>
-    <p:extLst>
-      <p:ext uri="{BB962C8B-B14F-4D97-AF65-F5344CB8AC3E}">
-        <p14:creationId xmlns:p14="http://schemas.microsoft.com/office/powerpoint/2010/main" val="1024086991"/>
       </p:ext>
     </p:extLst>
   </p:cSld>
@@ -4666,6 +4691,90 @@
             <a:fld id="{F7021451-1387-4CA6-816F-3879F97B5CBC}" type="slidenum">
               <a:rPr lang="en-US"/>
               <a:t>56</a:t>
+            </a:fld>
+            <a:endParaRPr lang="en-US"/>
+          </a:p>
+        </p:txBody>
+      </p:sp>
+    </p:spTree>
+    <p:extLst>
+      <p:ext uri="{BB962C8B-B14F-4D97-AF65-F5344CB8AC3E}">
+        <p14:creationId xmlns:p14="http://schemas.microsoft.com/office/powerpoint/2010/main" val="1024086991"/>
+      </p:ext>
+    </p:extLst>
+  </p:cSld>
+  <p:clrMapOvr>
+    <a:masterClrMapping/>
+  </p:clrMapOvr>
+</p:notes>
+</file>
+
+<file path=ppt/notesSlides/notesSlide57.xml><?xml version="1.0" encoding="utf-8"?>
+<p:notes xmlns:a="http://schemas.openxmlformats.org/drawingml/2006/main" xmlns:r="http://schemas.openxmlformats.org/officeDocument/2006/relationships" xmlns:p="http://schemas.openxmlformats.org/presentationml/2006/main">
+  <p:cSld>
+    <p:spTree>
+      <p:nvGrpSpPr>
+        <p:cNvPr id="1" name=""/>
+        <p:cNvGrpSpPr/>
+        <p:nvPr/>
+      </p:nvGrpSpPr>
+      <p:grpSpPr>
+        <a:xfrm>
+          <a:off x="0" y="0"/>
+          <a:ext cx="0" cy="0"/>
+          <a:chOff x="0" y="0"/>
+          <a:chExt cx="0" cy="0"/>
+        </a:xfrm>
+      </p:grpSpPr>
+      <p:sp>
+        <p:nvSpPr>
+          <p:cNvPr id="2" name="Slide Image Placeholder 1"/>
+          <p:cNvSpPr>
+            <a:spLocks noGrp="1" noRot="1" noChangeAspect="1"/>
+          </p:cNvSpPr>
+          <p:nvPr>
+            <p:ph type="sldImg"/>
+          </p:nvPr>
+        </p:nvSpPr>
+        <p:spPr/>
+      </p:sp>
+      <p:sp>
+        <p:nvSpPr>
+          <p:cNvPr id="3" name="Notes Placeholder 2"/>
+          <p:cNvSpPr>
+            <a:spLocks noGrp="1"/>
+          </p:cNvSpPr>
+          <p:nvPr>
+            <p:ph type="body" idx="1"/>
+          </p:nvPr>
+        </p:nvSpPr>
+        <p:spPr/>
+        <p:txBody>
+          <a:bodyPr/>
+          <a:lstStyle/>
+          <a:p>
+            <a:endParaRPr lang="en-US" dirty="0"/>
+          </a:p>
+        </p:txBody>
+      </p:sp>
+      <p:sp>
+        <p:nvSpPr>
+          <p:cNvPr id="4" name="Slide Number Placeholder 3"/>
+          <p:cNvSpPr>
+            <a:spLocks noGrp="1"/>
+          </p:cNvSpPr>
+          <p:nvPr>
+            <p:ph type="sldNum" sz="quarter" idx="10"/>
+          </p:nvPr>
+        </p:nvSpPr>
+        <p:spPr/>
+        <p:txBody>
+          <a:bodyPr/>
+          <a:lstStyle/>
+          <a:p>
+            <a:fld id="{F7021451-1387-4CA6-816F-3879F97B5CBC}" type="slidenum">
+              <a:rPr lang="en-US"/>
+              <a:t>57</a:t>
             </a:fld>
             <a:endParaRPr lang="en-US"/>
           </a:p>
@@ -14554,7 +14663,7 @@
               <a:buNone/>
             </a:pPr>
             <a:r>
-              <a:rPr lang="en-US" sz="1800" kern="0" spc="72" dirty="0">
+              <a:rPr lang="en-US" kern="0" spc="72" dirty="0">
                 <a:solidFill>
                   <a:srgbClr val="4ADE80"/>
                 </a:solidFill>
@@ -14564,7 +14673,7 @@
               </a:rPr>
               <a:t>akvorado lab</a:t>
             </a:r>
-            <a:endParaRPr lang="en-US" sz="1800" dirty="0"/>
+            <a:endParaRPr lang="en-US" dirty="0"/>
           </a:p>
         </p:txBody>
       </p:sp>
@@ -14598,7 +14707,7 @@
               <a:buNone/>
             </a:pPr>
             <a:r>
-              <a:rPr lang="en-US" sz="1800" kern="0" spc="72" dirty="0">
+              <a:rPr lang="en-US" kern="0" spc="72" dirty="0">
                 <a:solidFill>
                   <a:srgbClr val="56688A"/>
                 </a:solidFill>
@@ -14608,7 +14717,7 @@
               </a:rPr>
               <a:t>01 · intro</a:t>
             </a:r>
-            <a:endParaRPr lang="en-US" sz="1800" dirty="0"/>
+            <a:endParaRPr lang="en-US" dirty="0"/>
           </a:p>
         </p:txBody>
       </p:sp>
@@ -14642,7 +14751,7 @@
               <a:buNone/>
             </a:pPr>
             <a:r>
-              <a:rPr lang="en-US" sz="1800" kern="0" spc="324" dirty="0">
+              <a:rPr lang="en-US" kern="0" spc="324" dirty="0">
                 <a:solidFill>
                   <a:srgbClr val="4ADE80"/>
                 </a:solidFill>
@@ -14652,7 +14761,7 @@
               </a:rPr>
               <a:t>BY THE END OF THIS SESSION</a:t>
             </a:r>
-            <a:endParaRPr lang="en-US" sz="1800" dirty="0"/>
+            <a:endParaRPr lang="en-US" dirty="0"/>
           </a:p>
         </p:txBody>
       </p:sp>
@@ -15163,7 +15272,7 @@
               <a:buNone/>
             </a:pPr>
             <a:r>
-              <a:rPr lang="en-US" sz="1800" kern="0" spc="72" dirty="0">
+              <a:rPr lang="en-US" kern="0" spc="72" dirty="0">
                 <a:solidFill>
                   <a:srgbClr val="56688A"/>
                 </a:solidFill>
@@ -15173,7 +15282,7 @@
               </a:rPr>
               <a:t>akvorado-lab · don jolley</a:t>
             </a:r>
-            <a:endParaRPr lang="en-US" sz="1800" dirty="0"/>
+            <a:endParaRPr lang="en-US" dirty="0"/>
           </a:p>
         </p:txBody>
       </p:sp>
@@ -15207,7 +15316,7 @@
               <a:buNone/>
             </a:pPr>
             <a:r>
-              <a:rPr lang="en-US" sz="1800" kern="0" spc="72" dirty="0">
+              <a:rPr lang="en-US" kern="0" spc="72" dirty="0">
                 <a:solidFill>
                   <a:srgbClr val="56688A"/>
                 </a:solidFill>
@@ -15217,7 +15326,7 @@
               </a:rPr>
               <a:t>slide 02</a:t>
             </a:r>
-            <a:endParaRPr lang="en-US" sz="1800" dirty="0"/>
+            <a:endParaRPr lang="en-US" dirty="0"/>
           </a:p>
         </p:txBody>
       </p:sp>
@@ -15423,6 +15532,897 @@
 
 <file path=ppt/slides/slide21.xml><?xml version="1.0" encoding="utf-8"?>
 <p:sld xmlns:a="http://schemas.openxmlformats.org/drawingml/2006/main" xmlns:r="http://schemas.openxmlformats.org/officeDocument/2006/relationships" xmlns:p="http://schemas.openxmlformats.org/presentationml/2006/main">
+  <p:cSld>
+    <p:bg>
+      <p:bgPr>
+        <a:solidFill>
+          <a:schemeClr val="bg1"/>
+        </a:solidFill>
+        <a:effectLst/>
+      </p:bgPr>
+    </p:bg>
+    <p:spTree>
+      <p:nvGrpSpPr>
+        <p:cNvPr id="1" name="">
+          <a:extLst>
+            <a:ext uri="{FF2B5EF4-FFF2-40B4-BE49-F238E27FC236}">
+              <a16:creationId xmlns:a16="http://schemas.microsoft.com/office/drawing/2014/main" id="{4F1B2A9B-B66C-8A4E-3637-AE4834145BA0}"/>
+            </a:ext>
+          </a:extLst>
+        </p:cNvPr>
+        <p:cNvGrpSpPr/>
+        <p:nvPr/>
+      </p:nvGrpSpPr>
+      <p:grpSpPr>
+        <a:xfrm>
+          <a:off x="0" y="0"/>
+          <a:ext cx="0" cy="0"/>
+          <a:chOff x="0" y="0"/>
+          <a:chExt cx="0" cy="0"/>
+        </a:xfrm>
+      </p:grpSpPr>
+      <p:sp useBgFill="1">
+        <p:nvSpPr>
+          <p:cNvPr id="11" name="Rectangle 10">
+            <a:extLst>
+              <a:ext uri="{FF2B5EF4-FFF2-40B4-BE49-F238E27FC236}">
+                <a16:creationId xmlns:a16="http://schemas.microsoft.com/office/drawing/2014/main" id="{09588DA8-065E-4F6F-8EFD-43104AB2E0CF}"/>
+              </a:ext>
+              <a:ext uri="{C183D7F6-B498-43B3-948B-1728B52AA6E4}">
+                <adec:decorative xmlns:adec="http://schemas.microsoft.com/office/drawing/2017/decorative" val="1"/>
+              </a:ext>
+            </a:extLst>
+          </p:cNvPr>
+          <p:cNvSpPr>
+            <a:spLocks noGrp="1" noRot="1" noChangeAspect="1" noMove="1" noResize="1" noEditPoints="1" noAdjustHandles="1" noChangeArrowheads="1" noChangeShapeType="1" noTextEdit="1"/>
+          </p:cNvSpPr>
+          <p:nvPr>
+            <p:extLst>
+              <p:ext uri="{386F3935-93C4-4BCD-93E2-E3B085C9AB24}">
+                <p16:designElem xmlns:p16="http://schemas.microsoft.com/office/powerpoint/2015/main" val="1"/>
+              </p:ext>
+            </p:extLst>
+          </p:nvPr>
+        </p:nvSpPr>
+        <p:spPr>
+          <a:xfrm>
+            <a:off x="0" y="0"/>
+            <a:ext cx="18288000" cy="10287000"/>
+          </a:xfrm>
+          <a:prstGeom prst="rect">
+            <a:avLst/>
+          </a:prstGeom>
+          <a:ln w="12700" cap="flat" cmpd="sng" algn="ctr">
+            <a:noFill/>
+            <a:prstDash val="solid"/>
+            <a:miter lim="800000"/>
+          </a:ln>
+          <a:effectLst/>
+          <a:extLst>
+            <a:ext uri="{91240B29-F687-4F45-9708-019B960494DF}">
+              <a14:hiddenLine xmlns:a14="http://schemas.microsoft.com/office/drawing/2010/main" w="12700" cap="flat" cmpd="sng" algn="ctr">
+                <a:solidFill>
+                  <a:schemeClr val="accent1">
+                    <a:shade val="50000"/>
+                  </a:schemeClr>
+                </a:solidFill>
+                <a:prstDash val="solid"/>
+                <a:miter lim="800000"/>
+              </a14:hiddenLine>
+            </a:ext>
+          </a:extLst>
+        </p:spPr>
+        <p:style>
+          <a:lnRef idx="2">
+            <a:schemeClr val="accent1">
+              <a:shade val="50000"/>
+            </a:schemeClr>
+          </a:lnRef>
+          <a:fillRef idx="1">
+            <a:schemeClr val="accent1"/>
+          </a:fillRef>
+          <a:effectRef idx="0">
+            <a:schemeClr val="accent1"/>
+          </a:effectRef>
+          <a:fontRef idx="minor">
+            <a:schemeClr val="lt1"/>
+          </a:fontRef>
+        </p:style>
+        <p:txBody>
+          <a:bodyPr rtlCol="0" anchor="ctr"/>
+          <a:lstStyle/>
+          <a:p>
+            <a:pPr algn="ctr"/>
+            <a:endParaRPr lang="en-US"/>
+          </a:p>
+        </p:txBody>
+      </p:sp>
+      <p:sp useBgFill="1">
+        <p:nvSpPr>
+          <p:cNvPr id="13" name="Rectangle 12">
+            <a:extLst>
+              <a:ext uri="{FF2B5EF4-FFF2-40B4-BE49-F238E27FC236}">
+                <a16:creationId xmlns:a16="http://schemas.microsoft.com/office/drawing/2014/main" id="{C4285719-470E-454C-AF62-8323075F1F5B}"/>
+              </a:ext>
+              <a:ext uri="{C183D7F6-B498-43B3-948B-1728B52AA6E4}">
+                <adec:decorative xmlns:adec="http://schemas.microsoft.com/office/drawing/2017/decorative" val="1"/>
+              </a:ext>
+            </a:extLst>
+          </p:cNvPr>
+          <p:cNvSpPr>
+            <a:spLocks noGrp="1" noRot="1" noChangeAspect="1" noMove="1" noResize="1" noEditPoints="1" noAdjustHandles="1" noChangeArrowheads="1" noChangeShapeType="1" noTextEdit="1"/>
+          </p:cNvSpPr>
+          <p:nvPr>
+            <p:extLst>
+              <p:ext uri="{386F3935-93C4-4BCD-93E2-E3B085C9AB24}">
+                <p16:designElem xmlns:p16="http://schemas.microsoft.com/office/powerpoint/2015/main" val="1"/>
+              </p:ext>
+            </p:extLst>
+          </p:nvPr>
+        </p:nvSpPr>
+        <p:spPr>
+          <a:xfrm>
+            <a:off x="0" y="0"/>
+            <a:ext cx="18283428" cy="10287000"/>
+          </a:xfrm>
+          <a:prstGeom prst="rect">
+            <a:avLst/>
+          </a:prstGeom>
+          <a:ln w="12700" cap="flat" cmpd="sng" algn="ctr">
+            <a:noFill/>
+            <a:prstDash val="solid"/>
+            <a:miter lim="800000"/>
+          </a:ln>
+          <a:effectLst/>
+          <a:extLst>
+            <a:ext uri="{91240B29-F687-4F45-9708-019B960494DF}">
+              <a14:hiddenLine xmlns:a14="http://schemas.microsoft.com/office/drawing/2010/main" w="12700" cap="flat" cmpd="sng" algn="ctr">
+                <a:solidFill>
+                  <a:schemeClr val="accent1">
+                    <a:shade val="50000"/>
+                  </a:schemeClr>
+                </a:solidFill>
+                <a:prstDash val="solid"/>
+                <a:miter lim="800000"/>
+              </a14:hiddenLine>
+            </a:ext>
+          </a:extLst>
+        </p:spPr>
+        <p:style>
+          <a:lnRef idx="2">
+            <a:schemeClr val="accent1">
+              <a:shade val="50000"/>
+            </a:schemeClr>
+          </a:lnRef>
+          <a:fillRef idx="1">
+            <a:schemeClr val="accent1"/>
+          </a:fillRef>
+          <a:effectRef idx="0">
+            <a:schemeClr val="accent1"/>
+          </a:effectRef>
+          <a:fontRef idx="minor">
+            <a:schemeClr val="lt1"/>
+          </a:fontRef>
+        </p:style>
+        <p:txBody>
+          <a:bodyPr rtlCol="0" anchor="ctr"/>
+          <a:lstStyle/>
+          <a:p>
+            <a:pPr algn="ctr"/>
+            <a:endParaRPr lang="en-US"/>
+          </a:p>
+        </p:txBody>
+      </p:sp>
+      <p:sp>
+        <p:nvSpPr>
+          <p:cNvPr id="15" name="Rectangle 14">
+            <a:extLst>
+              <a:ext uri="{FF2B5EF4-FFF2-40B4-BE49-F238E27FC236}">
+                <a16:creationId xmlns:a16="http://schemas.microsoft.com/office/drawing/2014/main" id="{CD9FE4EF-C4D8-49A0-B2FF-81D8DB7D8A24}"/>
+              </a:ext>
+              <a:ext uri="{C183D7F6-B498-43B3-948B-1728B52AA6E4}">
+                <adec:decorative xmlns:adec="http://schemas.microsoft.com/office/drawing/2017/decorative" val="1"/>
+              </a:ext>
+            </a:extLst>
+          </p:cNvPr>
+          <p:cNvSpPr>
+            <a:spLocks noGrp="1" noRot="1" noChangeAspect="1" noMove="1" noResize="1" noEditPoints="1" noAdjustHandles="1" noChangeArrowheads="1" noChangeShapeType="1" noTextEdit="1"/>
+          </p:cNvSpPr>
+          <p:nvPr>
+            <p:extLst>
+              <p:ext uri="{386F3935-93C4-4BCD-93E2-E3B085C9AB24}">
+                <p16:designElem xmlns:p16="http://schemas.microsoft.com/office/powerpoint/2015/main" val="1"/>
+              </p:ext>
+            </p:extLst>
+          </p:nvPr>
+        </p:nvSpPr>
+        <p:spPr>
+          <a:xfrm rot="5400000" flipH="1">
+            <a:off x="-2115126" y="2115123"/>
+            <a:ext cx="10287000" cy="6056754"/>
+          </a:xfrm>
+          <a:prstGeom prst="rect">
+            <a:avLst/>
+          </a:prstGeom>
+          <a:gradFill>
+            <a:gsLst>
+              <a:gs pos="8000">
+                <a:srgbClr val="000000"/>
+              </a:gs>
+              <a:gs pos="100000">
+                <a:schemeClr val="accent1">
+                  <a:lumMod val="75000"/>
+                </a:schemeClr>
+              </a:gs>
+            </a:gsLst>
+            <a:lin ang="3000000" scaled="0"/>
+          </a:gradFill>
+          <a:ln>
+            <a:noFill/>
+          </a:ln>
+        </p:spPr>
+        <p:style>
+          <a:lnRef idx="2">
+            <a:schemeClr val="accent1">
+              <a:shade val="50000"/>
+            </a:schemeClr>
+          </a:lnRef>
+          <a:fillRef idx="1">
+            <a:schemeClr val="accent1"/>
+          </a:fillRef>
+          <a:effectRef idx="0">
+            <a:schemeClr val="accent1"/>
+          </a:effectRef>
+          <a:fontRef idx="minor">
+            <a:schemeClr val="lt1"/>
+          </a:fontRef>
+        </p:style>
+        <p:txBody>
+          <a:bodyPr rtlCol="0" anchor="ctr"/>
+          <a:lstStyle/>
+          <a:p>
+            <a:pPr algn="ctr"/>
+            <a:endParaRPr lang="en-US"/>
+          </a:p>
+        </p:txBody>
+      </p:sp>
+      <p:sp>
+        <p:nvSpPr>
+          <p:cNvPr id="17" name="Rectangle 16">
+            <a:extLst>
+              <a:ext uri="{FF2B5EF4-FFF2-40B4-BE49-F238E27FC236}">
+                <a16:creationId xmlns:a16="http://schemas.microsoft.com/office/drawing/2014/main" id="{4300840D-0A0B-4512-BACA-B439D5B9C57C}"/>
+              </a:ext>
+              <a:ext uri="{C183D7F6-B498-43B3-948B-1728B52AA6E4}">
+                <adec:decorative xmlns:adec="http://schemas.microsoft.com/office/drawing/2017/decorative" val="1"/>
+              </a:ext>
+            </a:extLst>
+          </p:cNvPr>
+          <p:cNvSpPr>
+            <a:spLocks noGrp="1" noRot="1" noChangeAspect="1" noMove="1" noResize="1" noEditPoints="1" noAdjustHandles="1" noChangeArrowheads="1" noChangeShapeType="1" noTextEdit="1"/>
+          </p:cNvSpPr>
+          <p:nvPr>
+            <p:extLst>
+              <p:ext uri="{386F3935-93C4-4BCD-93E2-E3B085C9AB24}">
+                <p16:designElem xmlns:p16="http://schemas.microsoft.com/office/powerpoint/2015/main" val="1"/>
+              </p:ext>
+            </p:extLst>
+          </p:nvPr>
+        </p:nvSpPr>
+        <p:spPr>
+          <a:xfrm rot="5400000" flipH="1">
+            <a:off x="-2115128" y="2130329"/>
+            <a:ext cx="10286999" cy="6056759"/>
+          </a:xfrm>
+          <a:prstGeom prst="rect">
+            <a:avLst/>
+          </a:prstGeom>
+          <a:gradFill>
+            <a:gsLst>
+              <a:gs pos="0">
+                <a:srgbClr val="000000">
+                  <a:alpha val="0"/>
+                </a:srgbClr>
+              </a:gs>
+              <a:gs pos="99000">
+                <a:schemeClr val="accent1">
+                  <a:alpha val="46000"/>
+                </a:schemeClr>
+              </a:gs>
+            </a:gsLst>
+            <a:lin ang="1800000" scaled="0"/>
+          </a:gradFill>
+          <a:ln>
+            <a:noFill/>
+          </a:ln>
+        </p:spPr>
+        <p:style>
+          <a:lnRef idx="2">
+            <a:schemeClr val="accent1">
+              <a:shade val="50000"/>
+            </a:schemeClr>
+          </a:lnRef>
+          <a:fillRef idx="1">
+            <a:schemeClr val="accent1"/>
+          </a:fillRef>
+          <a:effectRef idx="0">
+            <a:schemeClr val="accent1"/>
+          </a:effectRef>
+          <a:fontRef idx="minor">
+            <a:schemeClr val="lt1"/>
+          </a:fontRef>
+        </p:style>
+        <p:txBody>
+          <a:bodyPr rtlCol="0" anchor="ctr"/>
+          <a:lstStyle/>
+          <a:p>
+            <a:pPr algn="ctr"/>
+            <a:endParaRPr lang="en-US"/>
+          </a:p>
+        </p:txBody>
+      </p:sp>
+      <p:sp>
+        <p:nvSpPr>
+          <p:cNvPr id="19" name="Rectangle 18">
+            <a:extLst>
+              <a:ext uri="{FF2B5EF4-FFF2-40B4-BE49-F238E27FC236}">
+                <a16:creationId xmlns:a16="http://schemas.microsoft.com/office/drawing/2014/main" id="{D2B78728-A580-49A7-84F9-6EF6F583ADE0}"/>
+              </a:ext>
+              <a:ext uri="{C183D7F6-B498-43B3-948B-1728B52AA6E4}">
+                <adec:decorative xmlns:adec="http://schemas.microsoft.com/office/drawing/2017/decorative" val="1"/>
+              </a:ext>
+            </a:extLst>
+          </p:cNvPr>
+          <p:cNvSpPr>
+            <a:spLocks noGrp="1" noRot="1" noChangeAspect="1" noMove="1" noResize="1" noEditPoints="1" noAdjustHandles="1" noChangeArrowheads="1" noChangeShapeType="1" noTextEdit="1"/>
+          </p:cNvSpPr>
+          <p:nvPr>
+            <p:extLst>
+              <p:ext uri="{386F3935-93C4-4BCD-93E2-E3B085C9AB24}">
+                <p16:designElem xmlns:p16="http://schemas.microsoft.com/office/powerpoint/2015/main" val="1"/>
+              </p:ext>
+            </p:extLst>
+          </p:nvPr>
+        </p:nvSpPr>
+        <p:spPr>
+          <a:xfrm rot="5400000" flipH="1">
+            <a:off x="1151885" y="5382128"/>
+            <a:ext cx="3752969" cy="6056762"/>
+          </a:xfrm>
+          <a:prstGeom prst="rect">
+            <a:avLst/>
+          </a:prstGeom>
+          <a:gradFill>
+            <a:gsLst>
+              <a:gs pos="2000">
+                <a:schemeClr val="accent1">
+                  <a:alpha val="29000"/>
+                </a:schemeClr>
+              </a:gs>
+              <a:gs pos="100000">
+                <a:srgbClr val="000000">
+                  <a:alpha val="30000"/>
+                </a:srgbClr>
+              </a:gs>
+            </a:gsLst>
+            <a:lin ang="7800000" scaled="0"/>
+          </a:gradFill>
+          <a:ln>
+            <a:noFill/>
+          </a:ln>
+        </p:spPr>
+        <p:style>
+          <a:lnRef idx="2">
+            <a:schemeClr val="accent1">
+              <a:shade val="50000"/>
+            </a:schemeClr>
+          </a:lnRef>
+          <a:fillRef idx="1">
+            <a:schemeClr val="accent1"/>
+          </a:fillRef>
+          <a:effectRef idx="0">
+            <a:schemeClr val="accent1"/>
+          </a:effectRef>
+          <a:fontRef idx="minor">
+            <a:schemeClr val="lt1"/>
+          </a:fontRef>
+        </p:style>
+        <p:txBody>
+          <a:bodyPr rtlCol="0" anchor="ctr"/>
+          <a:lstStyle/>
+          <a:p>
+            <a:pPr algn="ctr"/>
+            <a:endParaRPr lang="en-US" dirty="0"/>
+          </a:p>
+        </p:txBody>
+      </p:sp>
+      <p:sp>
+        <p:nvSpPr>
+          <p:cNvPr id="21" name="Freeform: Shape 20">
+            <a:extLst>
+              <a:ext uri="{FF2B5EF4-FFF2-40B4-BE49-F238E27FC236}">
+                <a16:creationId xmlns:a16="http://schemas.microsoft.com/office/drawing/2014/main" id="{38FAA1A1-D861-433F-88FA-1E9D6FD31D11}"/>
+              </a:ext>
+              <a:ext uri="{C183D7F6-B498-43B3-948B-1728B52AA6E4}">
+                <adec:decorative xmlns:adec="http://schemas.microsoft.com/office/drawing/2017/decorative" val="1"/>
+              </a:ext>
+            </a:extLst>
+          </p:cNvPr>
+          <p:cNvSpPr>
+            <a:spLocks noGrp="1" noRot="1" noChangeAspect="1" noMove="1" noResize="1" noEditPoints="1" noAdjustHandles="1" noChangeArrowheads="1" noChangeShapeType="1" noTextEdit="1"/>
+          </p:cNvSpPr>
+          <p:nvPr>
+            <p:extLst>
+              <p:ext uri="{386F3935-93C4-4BCD-93E2-E3B085C9AB24}">
+                <p16:designElem xmlns:p16="http://schemas.microsoft.com/office/powerpoint/2015/main" val="1"/>
+              </p:ext>
+            </p:extLst>
+          </p:nvPr>
+        </p:nvSpPr>
+        <p:spPr>
+          <a:xfrm rot="20635413">
+            <a:off x="-752605" y="1454577"/>
+            <a:ext cx="5850535" cy="6268437"/>
+          </a:xfrm>
+          <a:custGeom>
+            <a:avLst/>
+            <a:gdLst>
+              <a:gd name="connsiteX0" fmla="*/ 2432225 w 3900357"/>
+              <a:gd name="connsiteY0" fmla="*/ 93939 h 4178958"/>
+              <a:gd name="connsiteX1" fmla="*/ 3900357 w 3900357"/>
+              <a:gd name="connsiteY1" fmla="*/ 2089479 h 4178958"/>
+              <a:gd name="connsiteX2" fmla="*/ 1810878 w 3900357"/>
+              <a:gd name="connsiteY2" fmla="*/ 4178958 h 4178958"/>
+              <a:gd name="connsiteX3" fmla="*/ 78249 w 3900357"/>
+              <a:gd name="connsiteY3" fmla="*/ 3257727 h 4178958"/>
+              <a:gd name="connsiteX4" fmla="*/ 0 w 3900357"/>
+              <a:gd name="connsiteY4" fmla="*/ 3128923 h 4178958"/>
+              <a:gd name="connsiteX5" fmla="*/ 831324 w 3900357"/>
+              <a:gd name="connsiteY5" fmla="*/ 244281 h 4178958"/>
+              <a:gd name="connsiteX6" fmla="*/ 997559 w 3900357"/>
+              <a:gd name="connsiteY6" fmla="*/ 164202 h 4178958"/>
+              <a:gd name="connsiteX7" fmla="*/ 1810878 w 3900357"/>
+              <a:gd name="connsiteY7" fmla="*/ 0 h 4178958"/>
+              <a:gd name="connsiteX8" fmla="*/ 2432225 w 3900357"/>
+              <a:gd name="connsiteY8" fmla="*/ 93939 h 4178958"/>
+            </a:gdLst>
+            <a:ahLst/>
+            <a:cxnLst>
+              <a:cxn ang="0">
+                <a:pos x="connsiteX0" y="connsiteY0"/>
+              </a:cxn>
+              <a:cxn ang="0">
+                <a:pos x="connsiteX1" y="connsiteY1"/>
+              </a:cxn>
+              <a:cxn ang="0">
+                <a:pos x="connsiteX2" y="connsiteY2"/>
+              </a:cxn>
+              <a:cxn ang="0">
+                <a:pos x="connsiteX3" y="connsiteY3"/>
+              </a:cxn>
+              <a:cxn ang="0">
+                <a:pos x="connsiteX4" y="connsiteY4"/>
+              </a:cxn>
+              <a:cxn ang="0">
+                <a:pos x="connsiteX5" y="connsiteY5"/>
+              </a:cxn>
+              <a:cxn ang="0">
+                <a:pos x="connsiteX6" y="connsiteY6"/>
+              </a:cxn>
+              <a:cxn ang="0">
+                <a:pos x="connsiteX7" y="connsiteY7"/>
+              </a:cxn>
+              <a:cxn ang="0">
+                <a:pos x="connsiteX8" y="connsiteY8"/>
+              </a:cxn>
+            </a:cxnLst>
+            <a:rect l="l" t="t" r="r" b="b"/>
+            <a:pathLst>
+              <a:path w="3900357" h="4178958">
+                <a:moveTo>
+                  <a:pt x="2432225" y="93939"/>
+                </a:moveTo>
+                <a:cubicBezTo>
+                  <a:pt x="3282786" y="358491"/>
+                  <a:pt x="3900357" y="1151865"/>
+                  <a:pt x="3900357" y="2089479"/>
+                </a:cubicBezTo>
+                <a:cubicBezTo>
+                  <a:pt x="3900357" y="3243466"/>
+                  <a:pt x="2964865" y="4178958"/>
+                  <a:pt x="1810878" y="4178958"/>
+                </a:cubicBezTo>
+                <a:cubicBezTo>
+                  <a:pt x="1089636" y="4178958"/>
+                  <a:pt x="453744" y="3813531"/>
+                  <a:pt x="78249" y="3257727"/>
+                </a:cubicBezTo>
+                <a:lnTo>
+                  <a:pt x="0" y="3128923"/>
+                </a:lnTo>
+                <a:lnTo>
+                  <a:pt x="831324" y="244281"/>
+                </a:lnTo>
+                <a:lnTo>
+                  <a:pt x="997559" y="164202"/>
+                </a:lnTo>
+                <a:cubicBezTo>
+                  <a:pt x="1247540" y="58468"/>
+                  <a:pt x="1522381" y="0"/>
+                  <a:pt x="1810878" y="0"/>
+                </a:cubicBezTo>
+                <a:cubicBezTo>
+                  <a:pt x="2027251" y="0"/>
+                  <a:pt x="2235942" y="32888"/>
+                  <a:pt x="2432225" y="93939"/>
+                </a:cubicBezTo>
+                <a:close/>
+              </a:path>
+            </a:pathLst>
+          </a:custGeom>
+          <a:gradFill>
+            <a:gsLst>
+              <a:gs pos="29000">
+                <a:srgbClr val="000000">
+                  <a:alpha val="0"/>
+                </a:srgbClr>
+              </a:gs>
+              <a:gs pos="100000">
+                <a:schemeClr val="accent1">
+                  <a:alpha val="43000"/>
+                </a:schemeClr>
+              </a:gs>
+            </a:gsLst>
+            <a:lin ang="1800000" scaled="0"/>
+          </a:gradFill>
+          <a:ln>
+            <a:noFill/>
+          </a:ln>
+        </p:spPr>
+        <p:style>
+          <a:lnRef idx="2">
+            <a:schemeClr val="accent1">
+              <a:shade val="50000"/>
+            </a:schemeClr>
+          </a:lnRef>
+          <a:fillRef idx="1">
+            <a:schemeClr val="accent1"/>
+          </a:fillRef>
+          <a:effectRef idx="0">
+            <a:schemeClr val="accent1"/>
+          </a:effectRef>
+          <a:fontRef idx="minor">
+            <a:schemeClr val="lt1"/>
+          </a:fontRef>
+        </p:style>
+        <p:txBody>
+          <a:bodyPr wrap="square" rtlCol="0" anchor="ctr">
+            <a:noAutofit/>
+          </a:bodyPr>
+          <a:lstStyle/>
+          <a:p>
+            <a:pPr algn="ctr"/>
+            <a:endParaRPr lang="en-US" dirty="0"/>
+          </a:p>
+        </p:txBody>
+      </p:sp>
+      <p:sp>
+        <p:nvSpPr>
+          <p:cNvPr id="23" name="Rectangle 22">
+            <a:extLst>
+              <a:ext uri="{FF2B5EF4-FFF2-40B4-BE49-F238E27FC236}">
+                <a16:creationId xmlns:a16="http://schemas.microsoft.com/office/drawing/2014/main" id="{8D71EDA1-87BF-4D5D-AB79-F346FD19278A}"/>
+              </a:ext>
+              <a:ext uri="{C183D7F6-B498-43B3-948B-1728B52AA6E4}">
+                <adec:decorative xmlns:adec="http://schemas.microsoft.com/office/drawing/2017/decorative" val="1"/>
+              </a:ext>
+            </a:extLst>
+          </p:cNvPr>
+          <p:cNvSpPr>
+            <a:spLocks noGrp="1" noRot="1" noChangeAspect="1" noMove="1" noResize="1" noEditPoints="1" noAdjustHandles="1" noChangeArrowheads="1" noChangeShapeType="1" noTextEdit="1"/>
+          </p:cNvSpPr>
+          <p:nvPr>
+            <p:extLst>
+              <p:ext uri="{386F3935-93C4-4BCD-93E2-E3B085C9AB24}">
+                <p16:designElem xmlns:p16="http://schemas.microsoft.com/office/powerpoint/2015/main" val="1"/>
+              </p:ext>
+            </p:extLst>
+          </p:nvPr>
+        </p:nvSpPr>
+        <p:spPr>
+          <a:xfrm rot="5400000" flipH="1">
+            <a:off x="-2115140" y="2099915"/>
+            <a:ext cx="10287005" cy="6056753"/>
+          </a:xfrm>
+          <a:prstGeom prst="rect">
+            <a:avLst/>
+          </a:prstGeom>
+          <a:gradFill>
+            <a:gsLst>
+              <a:gs pos="0">
+                <a:srgbClr val="000000">
+                  <a:alpha val="0"/>
+                </a:srgbClr>
+              </a:gs>
+              <a:gs pos="99000">
+                <a:schemeClr val="accent1">
+                  <a:lumMod val="60000"/>
+                  <a:lumOff val="40000"/>
+                  <a:alpha val="11000"/>
+                </a:schemeClr>
+              </a:gs>
+            </a:gsLst>
+            <a:lin ang="7200000" scaled="0"/>
+          </a:gradFill>
+          <a:ln>
+            <a:noFill/>
+          </a:ln>
+        </p:spPr>
+        <p:style>
+          <a:lnRef idx="2">
+            <a:schemeClr val="accent1">
+              <a:shade val="50000"/>
+            </a:schemeClr>
+          </a:lnRef>
+          <a:fillRef idx="1">
+            <a:schemeClr val="accent1"/>
+          </a:fillRef>
+          <a:effectRef idx="0">
+            <a:schemeClr val="accent1"/>
+          </a:effectRef>
+          <a:fontRef idx="minor">
+            <a:schemeClr val="lt1"/>
+          </a:fontRef>
+        </p:style>
+        <p:txBody>
+          <a:bodyPr rtlCol="0" anchor="ctr"/>
+          <a:lstStyle/>
+          <a:p>
+            <a:pPr algn="ctr"/>
+            <a:endParaRPr lang="en-US"/>
+          </a:p>
+        </p:txBody>
+      </p:sp>
+      <p:sp>
+        <p:nvSpPr>
+          <p:cNvPr id="4" name="Text 2">
+            <a:extLst>
+              <a:ext uri="{FF2B5EF4-FFF2-40B4-BE49-F238E27FC236}">
+                <a16:creationId xmlns:a16="http://schemas.microsoft.com/office/drawing/2014/main" id="{59B92DED-A159-29A6-BFF5-9E0123F9E976}"/>
+              </a:ext>
+            </a:extLst>
+          </p:cNvPr>
+          <p:cNvSpPr/>
+          <p:nvPr/>
+        </p:nvSpPr>
+        <p:spPr>
+          <a:xfrm>
+            <a:off x="700083" y="880282"/>
+            <a:ext cx="4802049" cy="5081246"/>
+          </a:xfrm>
+          <a:prstGeom prst="rect">
+            <a:avLst/>
+          </a:prstGeom>
+        </p:spPr>
+        <p:txBody>
+          <a:bodyPr vert="horz" lIns="91440" tIns="45720" rIns="91440" bIns="45720" rtlCol="0" anchor="b">
+            <a:normAutofit/>
+          </a:bodyPr>
+          <a:lstStyle/>
+          <a:p>
+            <a:pPr marL="0" indent="0" algn="r">
+              <a:lnSpc>
+                <a:spcPct val="90000"/>
+              </a:lnSpc>
+              <a:spcBef>
+                <a:spcPct val="0"/>
+              </a:spcBef>
+              <a:spcAft>
+                <a:spcPts val="600"/>
+              </a:spcAft>
+            </a:pPr>
+            <a:r>
+              <a:rPr lang="en-US" sz="6000" b="1" kern="1200" spc="-144">
+                <a:solidFill>
+                  <a:srgbClr val="FFFFFF"/>
+                </a:solidFill>
+                <a:latin typeface="+mj-lt"/>
+                <a:ea typeface="+mj-ea"/>
+                <a:cs typeface="+mj-cs"/>
+              </a:rPr>
+              <a:t>Summary</a:t>
+            </a:r>
+            <a:endParaRPr lang="en-US" sz="6000" kern="1200">
+              <a:solidFill>
+                <a:srgbClr val="FFFFFF"/>
+              </a:solidFill>
+              <a:latin typeface="+mj-lt"/>
+              <a:ea typeface="+mj-ea"/>
+              <a:cs typeface="+mj-cs"/>
+            </a:endParaRPr>
+          </a:p>
+        </p:txBody>
+      </p:sp>
+      <p:sp>
+        <p:nvSpPr>
+          <p:cNvPr id="6" name="TextBox 5">
+            <a:extLst>
+              <a:ext uri="{FF2B5EF4-FFF2-40B4-BE49-F238E27FC236}">
+                <a16:creationId xmlns:a16="http://schemas.microsoft.com/office/drawing/2014/main" id="{50007A10-571A-E95E-042C-87230A4D7574}"/>
+              </a:ext>
+            </a:extLst>
+          </p:cNvPr>
+          <p:cNvSpPr txBox="1"/>
+          <p:nvPr/>
+        </p:nvSpPr>
+        <p:spPr>
+          <a:xfrm>
+            <a:off x="7215388" y="974220"/>
+            <a:ext cx="9833021" cy="8319070"/>
+          </a:xfrm>
+          <a:prstGeom prst="rect">
+            <a:avLst/>
+          </a:prstGeom>
+        </p:spPr>
+        <p:txBody>
+          <a:bodyPr vert="horz" lIns="91440" tIns="45720" rIns="91440" bIns="45720" rtlCol="0" anchor="ctr">
+            <a:normAutofit/>
+          </a:bodyPr>
+          <a:lstStyle/>
+          <a:p>
+            <a:pPr indent="-228600">
+              <a:lnSpc>
+                <a:spcPct val="90000"/>
+              </a:lnSpc>
+              <a:spcAft>
+                <a:spcPts val="600"/>
+              </a:spcAft>
+              <a:buFont typeface="Arial" panose="020B0604020202020204" pitchFamily="34" charset="0"/>
+              <a:buChar char="•"/>
+            </a:pPr>
+            <a:r>
+              <a:rPr lang="en-US" sz="3000" dirty="0"/>
+              <a:t>Update system</a:t>
+            </a:r>
+          </a:p>
+          <a:p>
+            <a:pPr indent="-228600">
+              <a:lnSpc>
+                <a:spcPct val="90000"/>
+              </a:lnSpc>
+              <a:spcAft>
+                <a:spcPts val="600"/>
+              </a:spcAft>
+              <a:buFont typeface="Arial" panose="020B0604020202020204" pitchFamily="34" charset="0"/>
+              <a:buChar char="•"/>
+            </a:pPr>
+            <a:r>
+              <a:rPr lang="en-US" sz="3000" dirty="0"/>
+              <a:t>Install Docker</a:t>
+            </a:r>
+          </a:p>
+          <a:p>
+            <a:pPr indent="-228600">
+              <a:lnSpc>
+                <a:spcPct val="90000"/>
+              </a:lnSpc>
+              <a:spcAft>
+                <a:spcPts val="600"/>
+              </a:spcAft>
+              <a:buFont typeface="Arial" panose="020B0604020202020204" pitchFamily="34" charset="0"/>
+              <a:buChar char="•"/>
+            </a:pPr>
+            <a:r>
+              <a:rPr lang="en-US" sz="3000" dirty="0"/>
+              <a:t>Add user to docker group</a:t>
+            </a:r>
+          </a:p>
+          <a:p>
+            <a:pPr indent="-228600">
+              <a:lnSpc>
+                <a:spcPct val="90000"/>
+              </a:lnSpc>
+              <a:spcAft>
+                <a:spcPts val="600"/>
+              </a:spcAft>
+              <a:buFont typeface="Arial" panose="020B0604020202020204" pitchFamily="34" charset="0"/>
+              <a:buChar char="•"/>
+            </a:pPr>
+            <a:r>
+              <a:rPr lang="en-US" sz="3000" dirty="0" err="1"/>
+              <a:t>Mkdir</a:t>
+            </a:r>
+            <a:r>
+              <a:rPr lang="en-US" sz="3000" dirty="0"/>
+              <a:t> and pull quick start script</a:t>
+            </a:r>
+          </a:p>
+          <a:p>
+            <a:pPr indent="-228600">
+              <a:lnSpc>
+                <a:spcPct val="90000"/>
+              </a:lnSpc>
+              <a:spcAft>
+                <a:spcPts val="600"/>
+              </a:spcAft>
+              <a:buFont typeface="Arial" panose="020B0604020202020204" pitchFamily="34" charset="0"/>
+              <a:buChar char="•"/>
+            </a:pPr>
+            <a:r>
+              <a:rPr lang="en-US" sz="3000" dirty="0"/>
+              <a:t>Edit Config/</a:t>
+            </a:r>
+            <a:r>
+              <a:rPr lang="en-US" sz="3000" dirty="0" err="1"/>
+              <a:t>outlet.yml</a:t>
+            </a:r>
+            <a:r>
+              <a:rPr lang="en-US" sz="3000" dirty="0"/>
+              <a:t> file with correct SNMP string</a:t>
+            </a:r>
+          </a:p>
+          <a:p>
+            <a:pPr indent="-228600">
+              <a:lnSpc>
+                <a:spcPct val="90000"/>
+              </a:lnSpc>
+              <a:spcAft>
+                <a:spcPts val="600"/>
+              </a:spcAft>
+              <a:buFont typeface="Arial" panose="020B0604020202020204" pitchFamily="34" charset="0"/>
+              <a:buChar char="•"/>
+            </a:pPr>
+            <a:r>
+              <a:rPr lang="en-US" sz="3000" dirty="0"/>
+              <a:t>Start stack.</a:t>
+            </a:r>
+          </a:p>
+          <a:p>
+            <a:pPr indent="-228600">
+              <a:lnSpc>
+                <a:spcPct val="90000"/>
+              </a:lnSpc>
+              <a:spcAft>
+                <a:spcPts val="600"/>
+              </a:spcAft>
+              <a:buFont typeface="Arial" panose="020B0604020202020204" pitchFamily="34" charset="0"/>
+              <a:buChar char="•"/>
+            </a:pPr>
+            <a:r>
+              <a:rPr lang="en-US" sz="3000" dirty="0"/>
+              <a:t>Make sure interfaces on routers match correct description</a:t>
+            </a:r>
+          </a:p>
+          <a:p>
+            <a:pPr indent="-228600">
+              <a:lnSpc>
+                <a:spcPct val="90000"/>
+              </a:lnSpc>
+              <a:spcAft>
+                <a:spcPts val="600"/>
+              </a:spcAft>
+              <a:buFont typeface="Arial" panose="020B0604020202020204" pitchFamily="34" charset="0"/>
+              <a:buChar char="•"/>
+            </a:pPr>
+            <a:endParaRPr lang="en-US" sz="3000" dirty="0"/>
+          </a:p>
+        </p:txBody>
+      </p:sp>
+    </p:spTree>
+    <p:extLst>
+      <p:ext uri="{BB962C8B-B14F-4D97-AF65-F5344CB8AC3E}">
+        <p14:creationId xmlns:p14="http://schemas.microsoft.com/office/powerpoint/2010/main" val="1095718762"/>
+      </p:ext>
+    </p:extLst>
+  </p:cSld>
+  <p:clrMapOvr>
+    <a:masterClrMapping/>
+  </p:clrMapOvr>
+</p:sld>
+</file>
+
+<file path=ppt/slides/slide22.xml><?xml version="1.0" encoding="utf-8"?>
+<p:sld xmlns:a="http://schemas.openxmlformats.org/drawingml/2006/main" xmlns:r="http://schemas.openxmlformats.org/officeDocument/2006/relationships" xmlns:p="http://schemas.openxmlformats.org/presentationml/2006/main">
   <p:cSld name="Slide 21">
     <p:bg>
       <p:bgPr>
@@ -15631,7 +16631,7 @@
         <p:spPr>
           <a:xfrm>
             <a:off x="914330" y="3654518"/>
-            <a:ext cx="5586482" cy="1492483"/>
+            <a:ext cx="5586482" cy="1720978"/>
           </a:xfrm>
           <a:prstGeom prst="roundRect">
             <a:avLst>
@@ -15652,7 +16652,7 @@
           <a:bodyPr/>
           <a:lstStyle/>
           <a:p>
-            <a:endParaRPr lang="en-US"/>
+            <a:endParaRPr lang="en-US" sz="2400"/>
           </a:p>
         </p:txBody>
       </p:sp>
@@ -15675,7 +16675,7 @@
         </p:spPr>
         <p:txBody>
           <a:bodyPr wrap="square" lIns="25400" tIns="25400" rIns="25400" bIns="25400" rtlCol="0" anchor="t">
-            <a:normAutofit fontScale="92500" lnSpcReduction="20000"/>
+            <a:noAutofit/>
           </a:bodyPr>
           <a:lstStyle/>
           <a:p>
@@ -15686,7 +16686,7 @@
               <a:buNone/>
             </a:pPr>
             <a:r>
-              <a:rPr lang="en-US" sz="1800" kern="0" spc="108" dirty="0">
+              <a:rPr lang="en-US" sz="2000" kern="0" spc="108" dirty="0">
                 <a:solidFill>
                   <a:srgbClr val="4ADE80"/>
                 </a:solidFill>
@@ -15696,7 +16696,7 @@
               </a:rPr>
               <a:t>NETWORK DEVICES</a:t>
             </a:r>
-            <a:endParaRPr lang="en-US" sz="1800" dirty="0"/>
+            <a:endParaRPr lang="en-US" sz="2000" dirty="0"/>
           </a:p>
         </p:txBody>
       </p:sp>
@@ -15708,8 +16708,8 @@
         </p:nvSpPr>
         <p:spPr>
           <a:xfrm>
-            <a:off x="1154031" y="4328972"/>
-            <a:ext cx="2408300" cy="295835"/>
+            <a:off x="1154030" y="4328972"/>
+            <a:ext cx="2843811" cy="427925"/>
           </a:xfrm>
           <a:prstGeom prst="rect">
             <a:avLst/>
@@ -15719,7 +16719,7 @@
         </p:spPr>
         <p:txBody>
           <a:bodyPr wrap="square" lIns="0" tIns="0" rIns="0" bIns="0" rtlCol="0" anchor="t">
-            <a:normAutofit fontScale="85000" lnSpcReduction="10000"/>
+            <a:normAutofit/>
           </a:bodyPr>
           <a:lstStyle/>
           <a:p>
@@ -15730,7 +16730,7 @@
               <a:buNone/>
             </a:pPr>
             <a:r>
-              <a:rPr lang="en-US" sz="1800" dirty="0">
+              <a:rPr lang="en-US" sz="1600" dirty="0">
                 <a:solidFill>
                   <a:srgbClr val="CBD5E1"/>
                 </a:solidFill>
@@ -15740,7 +16740,7 @@
               </a:rPr>
               <a:t>— MikroTik router</a:t>
             </a:r>
-            <a:endParaRPr lang="en-US" sz="1800" dirty="0"/>
+            <a:endParaRPr lang="en-US" sz="1600" dirty="0"/>
           </a:p>
         </p:txBody>
       </p:sp>
@@ -15753,7 +16753,7 @@
         <p:spPr>
           <a:xfrm>
             <a:off x="1154031" y="4653943"/>
-            <a:ext cx="2133935" cy="295835"/>
+            <a:ext cx="2423358" cy="427925"/>
           </a:xfrm>
           <a:prstGeom prst="rect">
             <a:avLst/>
@@ -15763,7 +16763,7 @@
         </p:spPr>
         <p:txBody>
           <a:bodyPr wrap="square" lIns="0" tIns="0" rIns="0" bIns="0" rtlCol="0" anchor="t">
-            <a:normAutofit fontScale="85000" lnSpcReduction="10000"/>
+            <a:noAutofit/>
           </a:bodyPr>
           <a:lstStyle/>
           <a:p>
@@ -15774,7 +16774,7 @@
               <a:buNone/>
             </a:pPr>
             <a:r>
-              <a:rPr lang="en-US" sz="1800" dirty="0">
+              <a:rPr lang="en-US" dirty="0">
                 <a:solidFill>
                   <a:srgbClr val="CBD5E1"/>
                 </a:solidFill>
@@ -15784,7 +16784,7 @@
               </a:rPr>
               <a:t>— Arista switch</a:t>
             </a:r>
-            <a:endParaRPr lang="en-US" sz="1800" dirty="0"/>
+            <a:endParaRPr lang="en-US" dirty="0"/>
           </a:p>
         </p:txBody>
       </p:sp>
@@ -15818,7 +16818,7 @@
               <a:buNone/>
             </a:pPr>
             <a:r>
-              <a:rPr lang="en-US" sz="1800" dirty="0">
+              <a:rPr lang="en-US" dirty="0">
                 <a:solidFill>
                   <a:srgbClr val="8A9BB4"/>
                 </a:solidFill>
@@ -15828,7 +16828,7 @@
               </a:rPr>
               <a:t>flow export · UDP</a:t>
             </a:r>
-            <a:endParaRPr lang="en-US" sz="1800" dirty="0"/>
+            <a:endParaRPr lang="en-US" dirty="0"/>
           </a:p>
         </p:txBody>
       </p:sp>
@@ -15984,7 +16984,7 @@
           <a:bodyPr/>
           <a:lstStyle/>
           <a:p>
-            <a:endParaRPr lang="en-US"/>
+            <a:endParaRPr lang="en-US" dirty="0"/>
           </a:p>
         </p:txBody>
       </p:sp>
@@ -16051,7 +17051,7 @@
         </p:spPr>
         <p:txBody>
           <a:bodyPr wrap="square" lIns="0" tIns="0" rIns="0" bIns="0" rtlCol="0" anchor="t">
-            <a:normAutofit fontScale="85000" lnSpcReduction="10000"/>
+            <a:noAutofit/>
           </a:bodyPr>
           <a:lstStyle/>
           <a:p>
@@ -16062,7 +17062,7 @@
               <a:buNone/>
             </a:pPr>
             <a:r>
-              <a:rPr lang="en-US" sz="1800" dirty="0">
+              <a:rPr lang="en-US" dirty="0">
                 <a:solidFill>
                   <a:srgbClr val="CBD5E1"/>
                 </a:solidFill>
@@ -16072,7 +17072,7 @@
               </a:rPr>
               <a:t>akvorado · inlet</a:t>
             </a:r>
-            <a:endParaRPr lang="en-US" sz="1800" dirty="0"/>
+            <a:endParaRPr lang="en-US" dirty="0"/>
           </a:p>
         </p:txBody>
       </p:sp>
@@ -16095,7 +17095,7 @@
         </p:spPr>
         <p:txBody>
           <a:bodyPr wrap="square" lIns="0" tIns="0" rIns="0" bIns="0" rtlCol="0" anchor="t">
-            <a:normAutofit fontScale="85000" lnSpcReduction="10000"/>
+            <a:noAutofit/>
           </a:bodyPr>
           <a:lstStyle/>
           <a:p>
@@ -16106,7 +17106,7 @@
               <a:buNone/>
             </a:pPr>
             <a:r>
-              <a:rPr lang="en-US" sz="1800" dirty="0">
+              <a:rPr lang="en-US" dirty="0">
                 <a:solidFill>
                   <a:srgbClr val="CBD5E1"/>
                 </a:solidFill>
@@ -16116,7 +17116,7 @@
               </a:rPr>
               <a:t>akvorado · console</a:t>
             </a:r>
-            <a:endParaRPr lang="en-US" sz="1800" dirty="0"/>
+            <a:endParaRPr lang="en-US" dirty="0"/>
           </a:p>
         </p:txBody>
       </p:sp>
@@ -16139,7 +17139,7 @@
         </p:spPr>
         <p:txBody>
           <a:bodyPr wrap="square" lIns="0" tIns="0" rIns="0" bIns="0" rtlCol="0" anchor="t">
-            <a:normAutofit fontScale="85000" lnSpcReduction="10000"/>
+            <a:noAutofit/>
           </a:bodyPr>
           <a:lstStyle/>
           <a:p>
@@ -16150,7 +17150,7 @@
               <a:buNone/>
             </a:pPr>
             <a:r>
-              <a:rPr lang="en-US" sz="1800" dirty="0">
+              <a:rPr lang="en-US" dirty="0" err="1">
                 <a:solidFill>
                   <a:srgbClr val="CBD5E1"/>
                 </a:solidFill>
@@ -16158,9 +17158,20 @@
                 <a:ea typeface="Courier New" pitchFamily="34" charset="-122"/>
                 <a:cs typeface="Courier New" pitchFamily="34" charset="-120"/>
               </a:rPr>
-              <a:t>kafka / redpanda</a:t>
-            </a:r>
-            <a:endParaRPr lang="en-US" sz="1800" dirty="0"/>
+              <a:t>kafka</a:t>
+            </a:r>
+            <a:r>
+              <a:rPr lang="en-US" dirty="0">
+                <a:solidFill>
+                  <a:srgbClr val="CBD5E1"/>
+                </a:solidFill>
+                <a:latin typeface="Courier New" pitchFamily="34" charset="0"/>
+                <a:ea typeface="Courier New" pitchFamily="34" charset="-122"/>
+                <a:cs typeface="Courier New" pitchFamily="34" charset="-120"/>
+              </a:rPr>
+              <a:t> </a:t>
+            </a:r>
+            <a:endParaRPr lang="en-US" dirty="0"/>
           </a:p>
         </p:txBody>
       </p:sp>
@@ -16183,7 +17194,7 @@
         </p:spPr>
         <p:txBody>
           <a:bodyPr wrap="square" lIns="0" tIns="0" rIns="0" bIns="0" rtlCol="0" anchor="t">
-            <a:normAutofit fontScale="85000" lnSpcReduction="10000"/>
+            <a:normAutofit fontScale="92500" lnSpcReduction="10000"/>
           </a:bodyPr>
           <a:lstStyle/>
           <a:p>
@@ -16194,7 +17205,7 @@
               <a:buNone/>
             </a:pPr>
             <a:r>
-              <a:rPr lang="en-US" sz="1800" dirty="0">
+              <a:rPr lang="en-US" sz="1600" dirty="0">
                 <a:solidFill>
                   <a:srgbClr val="CBD5E1"/>
                 </a:solidFill>
@@ -16204,7 +17215,7 @@
               </a:rPr>
               <a:t>clickhouse</a:t>
             </a:r>
-            <a:endParaRPr lang="en-US" sz="1800" dirty="0"/>
+            <a:endParaRPr lang="en-US" sz="1600" dirty="0"/>
           </a:p>
         </p:txBody>
       </p:sp>
@@ -16348,7 +17359,7 @@
 </p:sld>
 </file>
 
-<file path=ppt/slides/slide22.xml><?xml version="1.0" encoding="utf-8"?>
+<file path=ppt/slides/slide23.xml><?xml version="1.0" encoding="utf-8"?>
 <p:sld xmlns:a="http://schemas.openxmlformats.org/drawingml/2006/main" xmlns:r="http://schemas.openxmlformats.org/officeDocument/2006/relationships" xmlns:p="http://schemas.openxmlformats.org/presentationml/2006/main">
   <p:cSld name="Slide 22">
     <p:bg>
@@ -17936,7 +18947,7 @@
 </p:sld>
 </file>
 
-<file path=ppt/slides/slide23.xml><?xml version="1.0" encoding="utf-8"?>
+<file path=ppt/slides/slide24.xml><?xml version="1.0" encoding="utf-8"?>
 <p:sld xmlns:a="http://schemas.openxmlformats.org/drawingml/2006/main" xmlns:r="http://schemas.openxmlformats.org/officeDocument/2006/relationships" xmlns:p="http://schemas.openxmlformats.org/presentationml/2006/main">
   <p:cSld name="Slide 23">
     <p:bg>
@@ -19290,7 +20301,7 @@
 </p:sld>
 </file>
 
-<file path=ppt/slides/slide24.xml><?xml version="1.0" encoding="utf-8"?>
+<file path=ppt/slides/slide25.xml><?xml version="1.0" encoding="utf-8"?>
 <p:sld xmlns:a="http://schemas.openxmlformats.org/drawingml/2006/main" xmlns:r="http://schemas.openxmlformats.org/officeDocument/2006/relationships" xmlns:p="http://schemas.openxmlformats.org/presentationml/2006/main">
   <p:cSld name="Slide 24">
     <p:bg>
@@ -20344,7 +21355,7 @@
 </p:sld>
 </file>
 
-<file path=ppt/slides/slide25.xml><?xml version="1.0" encoding="utf-8"?>
+<file path=ppt/slides/slide26.xml><?xml version="1.0" encoding="utf-8"?>
 <p:sld xmlns:a="http://schemas.openxmlformats.org/drawingml/2006/main" xmlns:r="http://schemas.openxmlformats.org/officeDocument/2006/relationships" xmlns:p="http://schemas.openxmlformats.org/presentationml/2006/main">
   <p:cSld name="Slide 25">
     <p:bg>
@@ -21008,7 +22019,7 @@
 </p:sld>
 </file>
 
-<file path=ppt/slides/slide26.xml><?xml version="1.0" encoding="utf-8"?>
+<file path=ppt/slides/slide27.xml><?xml version="1.0" encoding="utf-8"?>
 <p:sld xmlns:a="http://schemas.openxmlformats.org/drawingml/2006/main" xmlns:r="http://schemas.openxmlformats.org/officeDocument/2006/relationships" xmlns:p="http://schemas.openxmlformats.org/presentationml/2006/main">
   <p:cSld name="Slide 26">
     <p:bg>
@@ -21447,7 +22458,7 @@
         </p:nvSpPr>
         <p:spPr>
           <a:xfrm>
-            <a:off x="914330" y="5588759"/>
+            <a:off x="914330" y="4986870"/>
             <a:ext cx="16192499" cy="11206"/>
           </a:xfrm>
           <a:prstGeom prst="rect">
@@ -21475,17 +22486,17 @@
         <p:spPr>
           <a:xfrm>
             <a:off x="914330" y="4178043"/>
-            <a:ext cx="1448045" cy="1315571"/>
-          </a:xfrm>
-          <a:prstGeom prst="rect">
-            <a:avLst/>
-          </a:prstGeom>
-          <a:noFill/>
-          <a:ln/>
-        </p:spPr>
-        <p:txBody>
-          <a:bodyPr wrap="square" lIns="25400" tIns="25400" rIns="25400" bIns="25400" rtlCol="0" anchor="t">
-            <a:normAutofit fontScale="92500" lnSpcReduction="20000"/>
+            <a:ext cx="1448045" cy="707197"/>
+          </a:xfrm>
+          <a:prstGeom prst="rect">
+            <a:avLst/>
+          </a:prstGeom>
+          <a:noFill/>
+          <a:ln/>
+        </p:spPr>
+        <p:txBody>
+          <a:bodyPr wrap="square" lIns="25400" tIns="25400" rIns="25400" bIns="25400" rtlCol="0" anchor="t">
+            <a:normAutofit/>
           </a:bodyPr>
           <a:lstStyle/>
           <a:p>
@@ -21496,6 +22507,17 @@
               <a:buNone/>
             </a:pPr>
             <a:r>
+              <a:rPr lang="en-US" sz="2250" dirty="0" err="1">
+                <a:solidFill>
+                  <a:srgbClr val="4ADE80"/>
+                </a:solidFill>
+                <a:latin typeface="Courier New" pitchFamily="34" charset="0"/>
+                <a:ea typeface="Courier New" pitchFamily="34" charset="-122"/>
+                <a:cs typeface="Courier New" pitchFamily="34" charset="-120"/>
+              </a:rPr>
+              <a:t>kafka</a:t>
+            </a:r>
+            <a:r>
               <a:rPr lang="en-US" sz="2250" dirty="0">
                 <a:solidFill>
                   <a:srgbClr val="4ADE80"/>
@@ -21504,7 +22526,7 @@
                 <a:ea typeface="Courier New" pitchFamily="34" charset="-122"/>
                 <a:cs typeface="Courier New" pitchFamily="34" charset="-120"/>
               </a:rPr>
-              <a:t>kafka · or · redpanda</a:t>
+              <a:t> </a:t>
             </a:r>
             <a:endParaRPr lang="en-US" sz="2250" dirty="0"/>
           </a:p>
@@ -21562,18 +22584,18 @@
         </p:nvSpPr>
         <p:spPr>
           <a:xfrm>
-            <a:off x="914330" y="5766827"/>
-            <a:ext cx="1619635" cy="463923"/>
-          </a:xfrm>
-          <a:prstGeom prst="rect">
-            <a:avLst/>
-          </a:prstGeom>
-          <a:noFill/>
-          <a:ln/>
-        </p:spPr>
-        <p:txBody>
-          <a:bodyPr wrap="square" lIns="25400" tIns="25400" rIns="25400" bIns="25400" rtlCol="0" anchor="t">
-            <a:normAutofit fontScale="92500" lnSpcReduction="20000"/>
+            <a:off x="914330" y="5482375"/>
+            <a:ext cx="1619635" cy="748375"/>
+          </a:xfrm>
+          <a:prstGeom prst="rect">
+            <a:avLst/>
+          </a:prstGeom>
+          <a:noFill/>
+          <a:ln/>
+        </p:spPr>
+        <p:txBody>
+          <a:bodyPr wrap="square" lIns="25400" tIns="25400" rIns="25400" bIns="25400" rtlCol="0" anchor="t">
+            <a:normAutofit fontScale="77500" lnSpcReduction="20000"/>
           </a:bodyPr>
           <a:lstStyle/>
           <a:p>
@@ -21592,7 +22614,26 @@
                 <a:ea typeface="Courier New" pitchFamily="34" charset="-122"/>
                 <a:cs typeface="Courier New" pitchFamily="34" charset="-120"/>
               </a:rPr>
-              <a:t>zookeeper</a:t>
+              <a:t>REDIS /</a:t>
+            </a:r>
+          </a:p>
+          <a:p>
+            <a:pPr marL="0" indent="0" algn="l">
+              <a:lnSpc>
+                <a:spcPct val="150000"/>
+              </a:lnSpc>
+              <a:buNone/>
+            </a:pPr>
+            <a:r>
+              <a:rPr lang="en-US" sz="2250" dirty="0">
+                <a:solidFill>
+                  <a:srgbClr val="4ADE80"/>
+                </a:solidFill>
+                <a:latin typeface="Courier New" pitchFamily="34" charset="0"/>
+                <a:ea typeface="Courier New" pitchFamily="34" charset="-122"/>
+                <a:cs typeface="Courier New" pitchFamily="34" charset="-120"/>
+              </a:rPr>
+              <a:t>Proxy</a:t>
             </a:r>
             <a:endParaRPr lang="en-US" sz="2250" dirty="0"/>
           </a:p>
@@ -21636,7 +22677,7 @@
                 <a:ea typeface="Arial" pitchFamily="34" charset="-122"/>
                 <a:cs typeface="Arial" pitchFamily="34" charset="-120"/>
               </a:rPr>
-              <a:t>Only present if you're using Kafka. Not needed with Redpanda.</a:t>
+              <a:t>Web services.</a:t>
             </a:r>
             <a:endParaRPr lang="en-US" sz="2250" dirty="0"/>
           </a:p>
@@ -21804,7 +22845,7 @@
 </p:sld>
 </file>
 
-<file path=ppt/slides/slide27.xml><?xml version="1.0" encoding="utf-8"?>
+<file path=ppt/slides/slide28.xml><?xml version="1.0" encoding="utf-8"?>
 <p:sld xmlns:a="http://schemas.openxmlformats.org/drawingml/2006/main" xmlns:r="http://schemas.openxmlformats.org/officeDocument/2006/relationships" xmlns:p="http://schemas.openxmlformats.org/presentationml/2006/main">
   <p:cSld name="Slide 27">
     <p:bg>
@@ -22409,7 +23450,7 @@
                 <a:ea typeface="Courier New" pitchFamily="34" charset="-122"/>
                 <a:cs typeface="Courier New" pitchFamily="34" charset="-120"/>
               </a:rPr>
-              <a:t>KAFKA / REDPANDA</a:t>
+              <a:t>KAFKA</a:t>
             </a:r>
             <a:endParaRPr lang="en-US" sz="1800" dirty="0"/>
           </a:p>
@@ -23053,7 +24094,7 @@
 </p:sld>
 </file>
 
-<file path=ppt/slides/slide28.xml><?xml version="1.0" encoding="utf-8"?>
+<file path=ppt/slides/slide29.xml><?xml version="1.0" encoding="utf-8"?>
 <p:sld xmlns:a="http://schemas.openxmlformats.org/drawingml/2006/main" xmlns:r="http://schemas.openxmlformats.org/officeDocument/2006/relationships" xmlns:p="http://schemas.openxmlformats.org/presentationml/2006/main">
   <p:cSld name="Slide 29">
     <p:bg>
@@ -23776,901 +24817,6 @@
                 <a:cs typeface="Courier New" pitchFamily="34" charset="-120"/>
               </a:rPr>
               <a:t>slide 29</a:t>
-            </a:r>
-            <a:endParaRPr lang="en-US" sz="1800" dirty="0"/>
-          </a:p>
-        </p:txBody>
-      </p:sp>
-    </p:spTree>
-  </p:cSld>
-  <p:clrMapOvr>
-    <a:masterClrMapping/>
-  </p:clrMapOvr>
-</p:sld>
-</file>
-
-<file path=ppt/slides/slide29.xml><?xml version="1.0" encoding="utf-8"?>
-<p:sld xmlns:a="http://schemas.openxmlformats.org/drawingml/2006/main" xmlns:r="http://schemas.openxmlformats.org/officeDocument/2006/relationships" xmlns:p="http://schemas.openxmlformats.org/presentationml/2006/main">
-  <p:cSld name="Slide 30">
-    <p:bg>
-      <p:bgPr>
-        <a:solidFill>
-          <a:srgbClr val="08111F"/>
-        </a:solidFill>
-        <a:effectLst/>
-      </p:bgPr>
-    </p:bg>
-    <p:spTree>
-      <p:nvGrpSpPr>
-        <p:cNvPr id="1" name=""/>
-        <p:cNvGrpSpPr/>
-        <p:nvPr/>
-      </p:nvGrpSpPr>
-      <p:grpSpPr>
-        <a:xfrm>
-          <a:off x="0" y="0"/>
-          <a:ext cx="0" cy="0"/>
-          <a:chOff x="0" y="0"/>
-          <a:chExt cx="0" cy="0"/>
-        </a:xfrm>
-      </p:grpSpPr>
-      <p:sp>
-        <p:nvSpPr>
-          <p:cNvPr id="2" name="Text 0"/>
-          <p:cNvSpPr/>
-          <p:nvPr/>
-        </p:nvSpPr>
-        <p:spPr>
-          <a:xfrm>
-            <a:off x="914330" y="342830"/>
-            <a:ext cx="2271152" cy="363071"/>
-          </a:xfrm>
-          <a:prstGeom prst="rect">
-            <a:avLst/>
-          </a:prstGeom>
-          <a:noFill/>
-          <a:ln/>
-        </p:spPr>
-        <p:txBody>
-          <a:bodyPr wrap="square" lIns="25400" tIns="25400" rIns="25400" bIns="25400" rtlCol="0" anchor="t">
-            <a:normAutofit fontScale="92500" lnSpcReduction="20000"/>
-          </a:bodyPr>
-          <a:lstStyle/>
-          <a:p>
-            <a:pPr marL="0" indent="0" algn="l">
-              <a:lnSpc>
-                <a:spcPct val="145000"/>
-              </a:lnSpc>
-              <a:buNone/>
-            </a:pPr>
-            <a:r>
-              <a:rPr lang="en-US" sz="1800" kern="0" spc="72" dirty="0">
-                <a:solidFill>
-                  <a:srgbClr val="4ADE80"/>
-                </a:solidFill>
-                <a:latin typeface="Courier New" pitchFamily="34" charset="0"/>
-                <a:ea typeface="Courier New" pitchFamily="34" charset="-122"/>
-                <a:cs typeface="Courier New" pitchFamily="34" charset="-120"/>
-              </a:rPr>
-              <a:t>§ 03 stand up</a:t>
-            </a:r>
-            <a:endParaRPr lang="en-US" sz="1800" dirty="0"/>
-          </a:p>
-        </p:txBody>
-      </p:sp>
-      <p:sp>
-        <p:nvSpPr>
-          <p:cNvPr id="3" name="Text 1"/>
-          <p:cNvSpPr/>
-          <p:nvPr/>
-        </p:nvSpPr>
-        <p:spPr>
-          <a:xfrm>
-            <a:off x="15617672" y="342830"/>
-            <a:ext cx="1832197" cy="363071"/>
-          </a:xfrm>
-          <a:prstGeom prst="rect">
-            <a:avLst/>
-          </a:prstGeom>
-          <a:noFill/>
-          <a:ln/>
-        </p:spPr>
-        <p:txBody>
-          <a:bodyPr wrap="square" lIns="25400" tIns="25400" rIns="25400" bIns="25400" rtlCol="0" anchor="t">
-            <a:normAutofit fontScale="92500" lnSpcReduction="20000"/>
-          </a:bodyPr>
-          <a:lstStyle/>
-          <a:p>
-            <a:pPr marL="0" indent="0" algn="l">
-              <a:lnSpc>
-                <a:spcPct val="145000"/>
-              </a:lnSpc>
-              <a:buNone/>
-            </a:pPr>
-            <a:r>
-              <a:rPr lang="en-US" sz="1800" kern="0" spc="72" dirty="0">
-                <a:solidFill>
-                  <a:srgbClr val="56688A"/>
-                </a:solidFill>
-                <a:latin typeface="Courier New" pitchFamily="34" charset="0"/>
-                <a:ea typeface="Courier New" pitchFamily="34" charset="-122"/>
-                <a:cs typeface="Courier New" pitchFamily="34" charset="-120"/>
-              </a:rPr>
-              <a:t>iterate fast</a:t>
-            </a:r>
-            <a:endParaRPr lang="en-US" sz="1800" dirty="0"/>
-          </a:p>
-        </p:txBody>
-      </p:sp>
-      <p:sp>
-        <p:nvSpPr>
-          <p:cNvPr id="4" name="Text 2"/>
-          <p:cNvSpPr/>
-          <p:nvPr/>
-        </p:nvSpPr>
-        <p:spPr>
-          <a:xfrm>
-            <a:off x="914330" y="838165"/>
-            <a:ext cx="16953120" cy="374276"/>
-          </a:xfrm>
-          <a:prstGeom prst="rect">
-            <a:avLst/>
-          </a:prstGeom>
-          <a:noFill/>
-          <a:ln/>
-        </p:spPr>
-        <p:txBody>
-          <a:bodyPr wrap="square" lIns="25400" tIns="25400" rIns="25400" bIns="25400" rtlCol="0" anchor="t">
-            <a:normAutofit fontScale="92500" lnSpcReduction="20000"/>
-          </a:bodyPr>
-          <a:lstStyle/>
-          <a:p>
-            <a:pPr marL="0" indent="0" algn="l">
-              <a:lnSpc>
-                <a:spcPct val="150000"/>
-              </a:lnSpc>
-              <a:buNone/>
-            </a:pPr>
-            <a:r>
-              <a:rPr lang="en-US" sz="1800" kern="0" spc="324" dirty="0">
-                <a:solidFill>
-                  <a:srgbClr val="4ADE80"/>
-                </a:solidFill>
-                <a:latin typeface="Courier New" pitchFamily="34" charset="0"/>
-                <a:ea typeface="Courier New" pitchFamily="34" charset="-122"/>
-                <a:cs typeface="Courier New" pitchFamily="34" charset="-120"/>
-              </a:rPr>
-              <a:t>DON'T BOUNCE THE WHOLE STACK</a:t>
-            </a:r>
-            <a:endParaRPr lang="en-US" sz="1800" dirty="0"/>
-          </a:p>
-        </p:txBody>
-      </p:sp>
-      <p:sp>
-        <p:nvSpPr>
-          <p:cNvPr id="5" name="Text 3"/>
-          <p:cNvSpPr/>
-          <p:nvPr/>
-        </p:nvSpPr>
-        <p:spPr>
-          <a:xfrm>
-            <a:off x="914330" y="1441006"/>
-            <a:ext cx="14716124" cy="676835"/>
-          </a:xfrm>
-          <a:prstGeom prst="rect">
-            <a:avLst/>
-          </a:prstGeom>
-          <a:noFill/>
-          <a:ln/>
-        </p:spPr>
-        <p:txBody>
-          <a:bodyPr wrap="square" lIns="25400" tIns="25400" rIns="25400" bIns="25400" rtlCol="0" anchor="t">
-            <a:normAutofit fontScale="92500" lnSpcReduction="20000"/>
-          </a:bodyPr>
-          <a:lstStyle/>
-          <a:p>
-            <a:pPr marL="0" indent="0" algn="l">
-              <a:lnSpc>
-                <a:spcPct val="105000"/>
-              </a:lnSpc>
-              <a:buNone/>
-            </a:pPr>
-            <a:r>
-              <a:rPr lang="en-US" sz="4800" b="1" kern="0" spc="-72" dirty="0">
-                <a:solidFill>
-                  <a:srgbClr val="E6EDF3"/>
-                </a:solidFill>
-                <a:latin typeface="Arial" pitchFamily="34" charset="0"/>
-                <a:ea typeface="Arial" pitchFamily="34" charset="-122"/>
-                <a:cs typeface="Arial" pitchFamily="34" charset="-120"/>
-              </a:rPr>
-              <a:t>Restart only what changed.</a:t>
-            </a:r>
-            <a:endParaRPr lang="en-US" sz="4800" dirty="0"/>
-          </a:p>
-        </p:txBody>
-      </p:sp>
-      <p:sp>
-        <p:nvSpPr>
-          <p:cNvPr id="6" name="Text 4"/>
-          <p:cNvSpPr/>
-          <p:nvPr/>
-        </p:nvSpPr>
-        <p:spPr>
-          <a:xfrm>
-            <a:off x="914330" y="2536906"/>
-            <a:ext cx="14716124" cy="979394"/>
-          </a:xfrm>
-          <a:prstGeom prst="rect">
-            <a:avLst/>
-          </a:prstGeom>
-          <a:noFill/>
-          <a:ln/>
-        </p:spPr>
-        <p:txBody>
-          <a:bodyPr wrap="square" lIns="25400" tIns="25400" rIns="25400" bIns="25400" rtlCol="0" anchor="t">
-            <a:normAutofit fontScale="92500" lnSpcReduction="20000"/>
-          </a:bodyPr>
-          <a:lstStyle/>
-          <a:p>
-            <a:pPr marL="0" indent="0" algn="l">
-              <a:lnSpc>
-                <a:spcPct val="140000"/>
-              </a:lnSpc>
-              <a:buNone/>
-            </a:pPr>
-            <a:r>
-              <a:rPr lang="en-US" sz="2700" dirty="0">
-                <a:solidFill>
-                  <a:srgbClr val="CBD5E1"/>
-                </a:solidFill>
-                <a:latin typeface="Arial" pitchFamily="34" charset="0"/>
-                <a:ea typeface="Arial" pitchFamily="34" charset="-122"/>
-                <a:cs typeface="Arial" pitchFamily="34" charset="-120"/>
-              </a:rPr>
-              <a:t>Config files are bind-mounted from the host. The container already has the new file — it just needs to re-read it on startup.</a:t>
-            </a:r>
-            <a:endParaRPr lang="en-US" sz="2700" dirty="0"/>
-          </a:p>
-        </p:txBody>
-      </p:sp>
-      <p:sp>
-        <p:nvSpPr>
-          <p:cNvPr id="7" name="Text 5"/>
-          <p:cNvSpPr/>
-          <p:nvPr/>
-        </p:nvSpPr>
-        <p:spPr>
-          <a:xfrm>
-            <a:off x="914330" y="3973360"/>
-            <a:ext cx="8162579" cy="374276"/>
-          </a:xfrm>
-          <a:prstGeom prst="rect">
-            <a:avLst/>
-          </a:prstGeom>
-          <a:noFill/>
-          <a:ln/>
-        </p:spPr>
-        <p:txBody>
-          <a:bodyPr wrap="square" lIns="25400" tIns="25400" rIns="25400" bIns="25400" rtlCol="0" anchor="t">
-            <a:normAutofit fontScale="92500" lnSpcReduction="20000"/>
-          </a:bodyPr>
-          <a:lstStyle/>
-          <a:p>
-            <a:pPr marL="0" indent="0" algn="l">
-              <a:lnSpc>
-                <a:spcPct val="150000"/>
-              </a:lnSpc>
-              <a:buNone/>
-            </a:pPr>
-            <a:r>
-              <a:rPr lang="en-US" sz="1800" kern="0" spc="72" dirty="0">
-                <a:solidFill>
-                  <a:srgbClr val="56688A"/>
-                </a:solidFill>
-                <a:latin typeface="Courier New" pitchFamily="34" charset="0"/>
-                <a:ea typeface="Courier New" pitchFamily="34" charset="-122"/>
-                <a:cs typeface="Courier New" pitchFamily="34" charset="-120"/>
-              </a:rPr>
-              <a:t>config file changed</a:t>
-            </a:r>
-            <a:endParaRPr lang="en-US" sz="1800" dirty="0"/>
-          </a:p>
-        </p:txBody>
-      </p:sp>
-      <p:sp>
-        <p:nvSpPr>
-          <p:cNvPr id="8" name="Shape 6"/>
-          <p:cNvSpPr/>
-          <p:nvPr/>
-        </p:nvSpPr>
-        <p:spPr>
-          <a:xfrm>
-            <a:off x="914330" y="4423697"/>
-            <a:ext cx="7924834" cy="3222742"/>
-          </a:xfrm>
-          <a:prstGeom prst="roundRect">
-            <a:avLst>
-              <a:gd name="adj" fmla="val 1773"/>
-            </a:avLst>
-          </a:prstGeom>
-          <a:solidFill>
-            <a:srgbClr val="0C1729"/>
-          </a:solidFill>
-          <a:ln w="11206">
-            <a:solidFill>
-              <a:srgbClr val="1E3354"/>
-            </a:solidFill>
-            <a:prstDash val="solid"/>
-          </a:ln>
-        </p:spPr>
-        <p:txBody>
-          <a:bodyPr/>
-          <a:lstStyle/>
-          <a:p>
-            <a:endParaRPr lang="en-US"/>
-          </a:p>
-        </p:txBody>
-      </p:sp>
-      <p:sp>
-        <p:nvSpPr>
-          <p:cNvPr id="9" name="Text 7"/>
-          <p:cNvSpPr/>
-          <p:nvPr/>
-        </p:nvSpPr>
-        <p:spPr>
-          <a:xfrm>
-            <a:off x="1268436" y="4701603"/>
-            <a:ext cx="7454368" cy="2705030"/>
-          </a:xfrm>
-          <a:prstGeom prst="rect">
-            <a:avLst/>
-          </a:prstGeom>
-          <a:noFill/>
-          <a:ln/>
-        </p:spPr>
-        <p:txBody>
-          <a:bodyPr wrap="square" lIns="25400" tIns="25400" rIns="25400" bIns="25400" rtlCol="0" anchor="t">
-            <a:normAutofit lnSpcReduction="10000"/>
-          </a:bodyPr>
-          <a:lstStyle/>
-          <a:p>
-            <a:pPr marL="0" indent="0" algn="l">
-              <a:lnSpc>
-                <a:spcPct val="155000"/>
-              </a:lnSpc>
-              <a:buNone/>
-            </a:pPr>
-            <a:r>
-              <a:rPr lang="en-US" sz="1950" dirty="0">
-                <a:solidFill>
-                  <a:srgbClr val="4ADE80"/>
-                </a:solidFill>
-                <a:latin typeface="Courier New" pitchFamily="34" charset="0"/>
-                <a:ea typeface="Courier New" pitchFamily="34" charset="-122"/>
-                <a:cs typeface="Courier New" pitchFamily="34" charset="-120"/>
-              </a:rPr>
-              <a:t>$ </a:t>
-            </a:r>
-            <a:r>
-              <a:rPr lang="en-US" sz="1950" dirty="0">
-                <a:solidFill>
-                  <a:srgbClr val="CBD5E1"/>
-                </a:solidFill>
-                <a:highlight>
-                  <a:srgbClr val="0C1729"/>
-                </a:highlight>
-                <a:latin typeface="Courier New" pitchFamily="34" charset="0"/>
-                <a:ea typeface="Courier New" pitchFamily="34" charset="-122"/>
-                <a:cs typeface="Courier New" pitchFamily="34" charset="-120"/>
-              </a:rPr>
-              <a:t> docker compose restart \</a:t>
-            </a:r>
-            <a:endParaRPr lang="en-US" sz="1950" dirty="0"/>
-          </a:p>
-          <a:p>
-            <a:pPr marL="0" indent="0" algn="l">
-              <a:lnSpc>
-                <a:spcPct val="155000"/>
-              </a:lnSpc>
-              <a:buNone/>
-            </a:pPr>
-            <a:r>
-              <a:rPr lang="en-US" sz="1950" dirty="0">
-                <a:solidFill>
-                  <a:srgbClr val="CBD5E1"/>
-                </a:solidFill>
-                <a:highlight>
-                  <a:srgbClr val="0C1729"/>
-                </a:highlight>
-                <a:latin typeface="Courier New" pitchFamily="34" charset="0"/>
-                <a:ea typeface="Courier New" pitchFamily="34" charset="-122"/>
-                <a:cs typeface="Courier New" pitchFamily="34" charset="-120"/>
-              </a:rPr>
-              <a:t>    akvorado-outlet </a:t>
-            </a:r>
-            <a:endParaRPr lang="en-US" sz="1950" dirty="0"/>
-          </a:p>
-          <a:p>
-            <a:pPr marL="0" indent="0" algn="l">
-              <a:lnSpc>
-                <a:spcPct val="155000"/>
-              </a:lnSpc>
-              <a:buNone/>
-            </a:pPr>
-            <a:r>
-              <a:rPr lang="en-US" sz="1950" dirty="0">
-                <a:solidFill>
-                  <a:srgbClr val="4ADE80"/>
-                </a:solidFill>
-                <a:latin typeface="Courier New" pitchFamily="34" charset="0"/>
-                <a:ea typeface="Courier New" pitchFamily="34" charset="-122"/>
-                <a:cs typeface="Courier New" pitchFamily="34" charset="-120"/>
-              </a:rPr>
-              <a:t>$ </a:t>
-            </a:r>
-            <a:r>
-              <a:rPr lang="en-US" sz="1950" dirty="0">
-                <a:solidFill>
-                  <a:srgbClr val="CBD5E1"/>
-                </a:solidFill>
-                <a:highlight>
-                  <a:srgbClr val="0C1729"/>
-                </a:highlight>
-                <a:latin typeface="Courier New" pitchFamily="34" charset="0"/>
-                <a:ea typeface="Courier New" pitchFamily="34" charset="-122"/>
-                <a:cs typeface="Courier New" pitchFamily="34" charset="-120"/>
-              </a:rPr>
-              <a:t> docker compose restart \</a:t>
-            </a:r>
-            <a:endParaRPr lang="en-US" sz="1950" dirty="0"/>
-          </a:p>
-          <a:p>
-            <a:pPr marL="0" indent="0" algn="l">
-              <a:lnSpc>
-                <a:spcPct val="155000"/>
-              </a:lnSpc>
-              <a:buNone/>
-            </a:pPr>
-            <a:r>
-              <a:rPr lang="en-US" sz="1950" dirty="0">
-                <a:solidFill>
-                  <a:srgbClr val="CBD5E1"/>
-                </a:solidFill>
-                <a:highlight>
-                  <a:srgbClr val="0C1729"/>
-                </a:highlight>
-                <a:latin typeface="Courier New" pitchFamily="34" charset="0"/>
-                <a:ea typeface="Courier New" pitchFamily="34" charset="-122"/>
-                <a:cs typeface="Courier New" pitchFamily="34" charset="-120"/>
-              </a:rPr>
-              <a:t>    akvorado-inlet </a:t>
-            </a:r>
-            <a:endParaRPr lang="en-US" sz="1950" dirty="0"/>
-          </a:p>
-          <a:p>
-            <a:pPr marL="0" indent="0" algn="l">
-              <a:lnSpc>
-                <a:spcPct val="155000"/>
-              </a:lnSpc>
-              <a:buNone/>
-            </a:pPr>
-            <a:r>
-              <a:rPr lang="en-US" sz="1950" dirty="0">
-                <a:solidFill>
-                  <a:srgbClr val="4ADE80"/>
-                </a:solidFill>
-                <a:latin typeface="Courier New" pitchFamily="34" charset="0"/>
-                <a:ea typeface="Courier New" pitchFamily="34" charset="-122"/>
-                <a:cs typeface="Courier New" pitchFamily="34" charset="-120"/>
-              </a:rPr>
-              <a:t>$ </a:t>
-            </a:r>
-            <a:r>
-              <a:rPr lang="en-US" sz="1950" dirty="0">
-                <a:solidFill>
-                  <a:srgbClr val="CBD5E1"/>
-                </a:solidFill>
-                <a:highlight>
-                  <a:srgbClr val="0C1729"/>
-                </a:highlight>
-                <a:latin typeface="Courier New" pitchFamily="34" charset="0"/>
-                <a:ea typeface="Courier New" pitchFamily="34" charset="-122"/>
-                <a:cs typeface="Courier New" pitchFamily="34" charset="-120"/>
-              </a:rPr>
-              <a:t> docker compose restart \</a:t>
-            </a:r>
-            <a:endParaRPr lang="en-US" sz="1950" dirty="0"/>
-          </a:p>
-          <a:p>
-            <a:pPr marL="0" indent="0" algn="l">
-              <a:lnSpc>
-                <a:spcPct val="155000"/>
-              </a:lnSpc>
-              <a:buNone/>
-            </a:pPr>
-            <a:r>
-              <a:rPr lang="en-US" sz="1950" dirty="0">
-                <a:solidFill>
-                  <a:srgbClr val="CBD5E1"/>
-                </a:solidFill>
-                <a:highlight>
-                  <a:srgbClr val="0C1729"/>
-                </a:highlight>
-                <a:latin typeface="Courier New" pitchFamily="34" charset="0"/>
-                <a:ea typeface="Courier New" pitchFamily="34" charset="-122"/>
-                <a:cs typeface="Courier New" pitchFamily="34" charset="-120"/>
-              </a:rPr>
-              <a:t>    akvorado-orchestrator</a:t>
-            </a:r>
-            <a:endParaRPr lang="en-US" sz="1950" dirty="0"/>
-          </a:p>
-        </p:txBody>
-      </p:sp>
-      <p:sp>
-        <p:nvSpPr>
-          <p:cNvPr id="10" name="Text 8"/>
-          <p:cNvSpPr/>
-          <p:nvPr/>
-        </p:nvSpPr>
-        <p:spPr>
-          <a:xfrm>
-            <a:off x="914330" y="7798768"/>
-            <a:ext cx="8162579" cy="374276"/>
-          </a:xfrm>
-          <a:prstGeom prst="rect">
-            <a:avLst/>
-          </a:prstGeom>
-          <a:noFill/>
-          <a:ln/>
-        </p:spPr>
-        <p:txBody>
-          <a:bodyPr wrap="square" lIns="25400" tIns="25400" rIns="25400" bIns="25400" rtlCol="0" anchor="t">
-            <a:normAutofit fontScale="92500" lnSpcReduction="20000"/>
-          </a:bodyPr>
-          <a:lstStyle/>
-          <a:p>
-            <a:pPr marL="0" indent="0" algn="l">
-              <a:lnSpc>
-                <a:spcPct val="150000"/>
-              </a:lnSpc>
-              <a:buNone/>
-            </a:pPr>
-            <a:r>
-              <a:rPr lang="en-US" sz="1800" dirty="0">
-                <a:solidFill>
-                  <a:srgbClr val="8A9BB4"/>
-                </a:solidFill>
-                <a:latin typeface="Courier New" pitchFamily="34" charset="0"/>
-                <a:ea typeface="Courier New" pitchFamily="34" charset="-122"/>
-                <a:cs typeface="Courier New" pitchFamily="34" charset="-120"/>
-              </a:rPr>
-              <a:t>A few seconds. ClickHouse and Kafka stay up.</a:t>
-            </a:r>
-            <a:endParaRPr lang="en-US" sz="1800" dirty="0"/>
-          </a:p>
-        </p:txBody>
-      </p:sp>
-      <p:sp>
-        <p:nvSpPr>
-          <p:cNvPr id="11" name="Text 9"/>
-          <p:cNvSpPr/>
-          <p:nvPr/>
-        </p:nvSpPr>
-        <p:spPr>
-          <a:xfrm>
-            <a:off x="9448659" y="3973360"/>
-            <a:ext cx="8162760" cy="374276"/>
-          </a:xfrm>
-          <a:prstGeom prst="rect">
-            <a:avLst/>
-          </a:prstGeom>
-          <a:noFill/>
-          <a:ln/>
-        </p:spPr>
-        <p:txBody>
-          <a:bodyPr wrap="square" lIns="25400" tIns="25400" rIns="25400" bIns="25400" rtlCol="0" anchor="t">
-            <a:normAutofit fontScale="92500" lnSpcReduction="20000"/>
-          </a:bodyPr>
-          <a:lstStyle/>
-          <a:p>
-            <a:pPr marL="0" indent="0" algn="l">
-              <a:lnSpc>
-                <a:spcPct val="150000"/>
-              </a:lnSpc>
-              <a:buNone/>
-            </a:pPr>
-            <a:r>
-              <a:rPr lang="en-US" sz="1800" kern="0" spc="72" dirty="0">
-                <a:solidFill>
-                  <a:srgbClr val="56688A"/>
-                </a:solidFill>
-                <a:latin typeface="Courier New" pitchFamily="34" charset="0"/>
-                <a:ea typeface="Courier New" pitchFamily="34" charset="-122"/>
-                <a:cs typeface="Courier New" pitchFamily="34" charset="-120"/>
-              </a:rPr>
-              <a:t>docker-compose.yml itself changed</a:t>
-            </a:r>
-            <a:endParaRPr lang="en-US" sz="1800" dirty="0"/>
-          </a:p>
-        </p:txBody>
-      </p:sp>
-      <p:sp>
-        <p:nvSpPr>
-          <p:cNvPr id="12" name="Shape 10"/>
-          <p:cNvSpPr/>
-          <p:nvPr/>
-        </p:nvSpPr>
-        <p:spPr>
-          <a:xfrm>
-            <a:off x="9448659" y="4423697"/>
-            <a:ext cx="7925010" cy="2841742"/>
-          </a:xfrm>
-          <a:prstGeom prst="roundRect">
-            <a:avLst>
-              <a:gd name="adj" fmla="val 2011"/>
-            </a:avLst>
-          </a:prstGeom>
-          <a:solidFill>
-            <a:srgbClr val="0C1729"/>
-          </a:solidFill>
-          <a:ln w="11206">
-            <a:solidFill>
-              <a:srgbClr val="1E3354"/>
-            </a:solidFill>
-            <a:prstDash val="solid"/>
-          </a:ln>
-        </p:spPr>
-        <p:txBody>
-          <a:bodyPr/>
-          <a:lstStyle/>
-          <a:p>
-            <a:endParaRPr lang="en-US"/>
-          </a:p>
-        </p:txBody>
-      </p:sp>
-      <p:sp>
-        <p:nvSpPr>
-          <p:cNvPr id="13" name="Text 11"/>
-          <p:cNvSpPr/>
-          <p:nvPr/>
-        </p:nvSpPr>
-        <p:spPr>
-          <a:xfrm>
-            <a:off x="9802765" y="4701603"/>
-            <a:ext cx="7454548" cy="2324030"/>
-          </a:xfrm>
-          <a:prstGeom prst="rect">
-            <a:avLst/>
-          </a:prstGeom>
-          <a:noFill/>
-          <a:ln/>
-        </p:spPr>
-        <p:txBody>
-          <a:bodyPr wrap="square" lIns="25400" tIns="25400" rIns="25400" bIns="25400" rtlCol="0" anchor="t">
-            <a:normAutofit/>
-          </a:bodyPr>
-          <a:lstStyle/>
-          <a:p>
-            <a:pPr marL="0" indent="0" algn="l">
-              <a:lnSpc>
-                <a:spcPct val="155000"/>
-              </a:lnSpc>
-              <a:buNone/>
-            </a:pPr>
-            <a:r>
-              <a:rPr lang="en-US" sz="1950" dirty="0">
-                <a:solidFill>
-                  <a:srgbClr val="56688A"/>
-                </a:solidFill>
-                <a:latin typeface="Courier New" pitchFamily="34" charset="0"/>
-                <a:ea typeface="Courier New" pitchFamily="34" charset="-122"/>
-                <a:cs typeface="Courier New" pitchFamily="34" charset="-120"/>
-              </a:rPr>
-              <a:t># ports, env vars, mounts # need a recreate, not a restart </a:t>
-            </a:r>
-            <a:r>
-              <a:rPr lang="en-US" sz="1950" dirty="0">
-                <a:solidFill>
-                  <a:srgbClr val="4ADE80"/>
-                </a:solidFill>
-                <a:latin typeface="Courier New" pitchFamily="34" charset="0"/>
-                <a:ea typeface="Courier New" pitchFamily="34" charset="-122"/>
-                <a:cs typeface="Courier New" pitchFamily="34" charset="-120"/>
-              </a:rPr>
-              <a:t>$ </a:t>
-            </a:r>
-            <a:r>
-              <a:rPr lang="en-US" sz="1950" dirty="0">
-                <a:solidFill>
-                  <a:srgbClr val="CBD5E1"/>
-                </a:solidFill>
-                <a:highlight>
-                  <a:srgbClr val="0C1729"/>
-                </a:highlight>
-                <a:latin typeface="Courier New" pitchFamily="34" charset="0"/>
-                <a:ea typeface="Courier New" pitchFamily="34" charset="-122"/>
-                <a:cs typeface="Courier New" pitchFamily="34" charset="-120"/>
-              </a:rPr>
-              <a:t> docker compose up -d \</a:t>
-            </a:r>
-            <a:endParaRPr lang="en-US" sz="1950" dirty="0"/>
-          </a:p>
-          <a:p>
-            <a:pPr marL="0" indent="0" algn="l">
-              <a:lnSpc>
-                <a:spcPct val="155000"/>
-              </a:lnSpc>
-              <a:buNone/>
-            </a:pPr>
-            <a:r>
-              <a:rPr lang="en-US" sz="1950" dirty="0">
-                <a:solidFill>
-                  <a:srgbClr val="CBD5E1"/>
-                </a:solidFill>
-                <a:highlight>
-                  <a:srgbClr val="0C1729"/>
-                </a:highlight>
-                <a:latin typeface="Courier New" pitchFamily="34" charset="0"/>
-                <a:ea typeface="Courier New" pitchFamily="34" charset="-122"/>
-                <a:cs typeface="Courier New" pitchFamily="34" charset="-120"/>
-              </a:rPr>
-              <a:t>    --force-recreate \</a:t>
-            </a:r>
-            <a:endParaRPr lang="en-US" sz="1950" dirty="0"/>
-          </a:p>
-          <a:p>
-            <a:pPr marL="0" indent="0" algn="l">
-              <a:lnSpc>
-                <a:spcPct val="155000"/>
-              </a:lnSpc>
-              <a:buNone/>
-            </a:pPr>
-            <a:r>
-              <a:rPr lang="en-US" sz="1950" dirty="0">
-                <a:solidFill>
-                  <a:srgbClr val="CBD5E1"/>
-                </a:solidFill>
-                <a:highlight>
-                  <a:srgbClr val="0C1729"/>
-                </a:highlight>
-                <a:latin typeface="Courier New" pitchFamily="34" charset="0"/>
-                <a:ea typeface="Courier New" pitchFamily="34" charset="-122"/>
-                <a:cs typeface="Courier New" pitchFamily="34" charset="-120"/>
-              </a:rPr>
-              <a:t>    akvorado-outlet</a:t>
-            </a:r>
-            <a:endParaRPr lang="en-US" sz="1950" dirty="0"/>
-          </a:p>
-        </p:txBody>
-      </p:sp>
-      <p:sp>
-        <p:nvSpPr>
-          <p:cNvPr id="14" name="Text 12"/>
-          <p:cNvSpPr/>
-          <p:nvPr/>
-        </p:nvSpPr>
-        <p:spPr>
-          <a:xfrm>
-            <a:off x="9448659" y="7417768"/>
-            <a:ext cx="8162760" cy="374276"/>
-          </a:xfrm>
-          <a:prstGeom prst="rect">
-            <a:avLst/>
-          </a:prstGeom>
-          <a:noFill/>
-          <a:ln/>
-        </p:spPr>
-        <p:txBody>
-          <a:bodyPr wrap="square" lIns="25400" tIns="25400" rIns="25400" bIns="25400" rtlCol="0" anchor="t">
-            <a:normAutofit fontScale="92500" lnSpcReduction="20000"/>
-          </a:bodyPr>
-          <a:lstStyle/>
-          <a:p>
-            <a:pPr marL="0" indent="0" algn="l">
-              <a:lnSpc>
-                <a:spcPct val="150000"/>
-              </a:lnSpc>
-              <a:buNone/>
-            </a:pPr>
-            <a:r>
-              <a:rPr lang="en-US" sz="1800" dirty="0">
-                <a:solidFill>
-                  <a:srgbClr val="FBBF24"/>
-                </a:solidFill>
-                <a:latin typeface="Courier New" pitchFamily="34" charset="0"/>
-                <a:ea typeface="Courier New" pitchFamily="34" charset="-122"/>
-                <a:cs typeface="Courier New" pitchFamily="34" charset="-120"/>
-              </a:rPr>
-              <a:t>Restart ≠ recreate. Know the difference.</a:t>
-            </a:r>
-            <a:endParaRPr lang="en-US" sz="1800" dirty="0"/>
-          </a:p>
-        </p:txBody>
-      </p:sp>
-      <p:sp>
-        <p:nvSpPr>
-          <p:cNvPr id="15" name="Text 13"/>
-          <p:cNvSpPr/>
-          <p:nvPr/>
-        </p:nvSpPr>
-        <p:spPr>
-          <a:xfrm>
-            <a:off x="914330" y="9619199"/>
-            <a:ext cx="3767941" cy="363071"/>
-          </a:xfrm>
-          <a:prstGeom prst="rect">
-            <a:avLst/>
-          </a:prstGeom>
-          <a:noFill/>
-          <a:ln/>
-        </p:spPr>
-        <p:txBody>
-          <a:bodyPr wrap="square" lIns="25400" tIns="25400" rIns="25400" bIns="25400" rtlCol="0" anchor="t">
-            <a:normAutofit fontScale="92500" lnSpcReduction="20000"/>
-          </a:bodyPr>
-          <a:lstStyle/>
-          <a:p>
-            <a:pPr marL="0" indent="0" algn="l">
-              <a:lnSpc>
-                <a:spcPct val="145000"/>
-              </a:lnSpc>
-              <a:buNone/>
-            </a:pPr>
-            <a:r>
-              <a:rPr lang="en-US" sz="1800" kern="0" spc="72" dirty="0">
-                <a:solidFill>
-                  <a:srgbClr val="56688A"/>
-                </a:solidFill>
-                <a:latin typeface="Courier New" pitchFamily="34" charset="0"/>
-                <a:ea typeface="Courier New" pitchFamily="34" charset="-122"/>
-                <a:cs typeface="Courier New" pitchFamily="34" charset="-120"/>
-              </a:rPr>
-              <a:t>akvorado-lab · don jolley</a:t>
-            </a:r>
-            <a:endParaRPr lang="en-US" sz="1800" dirty="0"/>
-          </a:p>
-        </p:txBody>
-      </p:sp>
-      <p:sp>
-        <p:nvSpPr>
-          <p:cNvPr id="16" name="Text 14"/>
-          <p:cNvSpPr/>
-          <p:nvPr/>
-        </p:nvSpPr>
-        <p:spPr>
-          <a:xfrm>
-            <a:off x="15764049" y="9619199"/>
-            <a:ext cx="1685820" cy="363071"/>
-          </a:xfrm>
-          <a:prstGeom prst="rect">
-            <a:avLst/>
-          </a:prstGeom>
-          <a:noFill/>
-          <a:ln/>
-        </p:spPr>
-        <p:txBody>
-          <a:bodyPr wrap="square" lIns="25400" tIns="25400" rIns="25400" bIns="25400" rtlCol="0" anchor="t">
-            <a:normAutofit fontScale="92500" lnSpcReduction="20000"/>
-          </a:bodyPr>
-          <a:lstStyle/>
-          <a:p>
-            <a:pPr marL="0" indent="0" algn="l">
-              <a:lnSpc>
-                <a:spcPct val="145000"/>
-              </a:lnSpc>
-              <a:buNone/>
-            </a:pPr>
-            <a:r>
-              <a:rPr lang="en-US" sz="1800" kern="0" spc="72" dirty="0">
-                <a:solidFill>
-                  <a:srgbClr val="56688A"/>
-                </a:solidFill>
-                <a:latin typeface="Courier New" pitchFamily="34" charset="0"/>
-                <a:ea typeface="Courier New" pitchFamily="34" charset="-122"/>
-                <a:cs typeface="Courier New" pitchFamily="34" charset="-120"/>
-              </a:rPr>
-              <a:t>slide 30</a:t>
             </a:r>
             <a:endParaRPr lang="en-US" sz="1800" dirty="0"/>
           </a:p>
@@ -25935,6 +26081,901 @@
 
 <file path=ppt/slides/slide30.xml><?xml version="1.0" encoding="utf-8"?>
 <p:sld xmlns:a="http://schemas.openxmlformats.org/drawingml/2006/main" xmlns:r="http://schemas.openxmlformats.org/officeDocument/2006/relationships" xmlns:p="http://schemas.openxmlformats.org/presentationml/2006/main">
+  <p:cSld name="Slide 30">
+    <p:bg>
+      <p:bgPr>
+        <a:solidFill>
+          <a:srgbClr val="08111F"/>
+        </a:solidFill>
+        <a:effectLst/>
+      </p:bgPr>
+    </p:bg>
+    <p:spTree>
+      <p:nvGrpSpPr>
+        <p:cNvPr id="1" name=""/>
+        <p:cNvGrpSpPr/>
+        <p:nvPr/>
+      </p:nvGrpSpPr>
+      <p:grpSpPr>
+        <a:xfrm>
+          <a:off x="0" y="0"/>
+          <a:ext cx="0" cy="0"/>
+          <a:chOff x="0" y="0"/>
+          <a:chExt cx="0" cy="0"/>
+        </a:xfrm>
+      </p:grpSpPr>
+      <p:sp>
+        <p:nvSpPr>
+          <p:cNvPr id="2" name="Text 0"/>
+          <p:cNvSpPr/>
+          <p:nvPr/>
+        </p:nvSpPr>
+        <p:spPr>
+          <a:xfrm>
+            <a:off x="914330" y="342830"/>
+            <a:ext cx="2271152" cy="363071"/>
+          </a:xfrm>
+          <a:prstGeom prst="rect">
+            <a:avLst/>
+          </a:prstGeom>
+          <a:noFill/>
+          <a:ln/>
+        </p:spPr>
+        <p:txBody>
+          <a:bodyPr wrap="square" lIns="25400" tIns="25400" rIns="25400" bIns="25400" rtlCol="0" anchor="t">
+            <a:normAutofit fontScale="92500" lnSpcReduction="20000"/>
+          </a:bodyPr>
+          <a:lstStyle/>
+          <a:p>
+            <a:pPr marL="0" indent="0" algn="l">
+              <a:lnSpc>
+                <a:spcPct val="145000"/>
+              </a:lnSpc>
+              <a:buNone/>
+            </a:pPr>
+            <a:r>
+              <a:rPr lang="en-US" sz="1800" kern="0" spc="72" dirty="0">
+                <a:solidFill>
+                  <a:srgbClr val="4ADE80"/>
+                </a:solidFill>
+                <a:latin typeface="Courier New" pitchFamily="34" charset="0"/>
+                <a:ea typeface="Courier New" pitchFamily="34" charset="-122"/>
+                <a:cs typeface="Courier New" pitchFamily="34" charset="-120"/>
+              </a:rPr>
+              <a:t>§ 03 stand up</a:t>
+            </a:r>
+            <a:endParaRPr lang="en-US" sz="1800" dirty="0"/>
+          </a:p>
+        </p:txBody>
+      </p:sp>
+      <p:sp>
+        <p:nvSpPr>
+          <p:cNvPr id="3" name="Text 1"/>
+          <p:cNvSpPr/>
+          <p:nvPr/>
+        </p:nvSpPr>
+        <p:spPr>
+          <a:xfrm>
+            <a:off x="15617672" y="342830"/>
+            <a:ext cx="1832197" cy="363071"/>
+          </a:xfrm>
+          <a:prstGeom prst="rect">
+            <a:avLst/>
+          </a:prstGeom>
+          <a:noFill/>
+          <a:ln/>
+        </p:spPr>
+        <p:txBody>
+          <a:bodyPr wrap="square" lIns="25400" tIns="25400" rIns="25400" bIns="25400" rtlCol="0" anchor="t">
+            <a:normAutofit fontScale="92500" lnSpcReduction="20000"/>
+          </a:bodyPr>
+          <a:lstStyle/>
+          <a:p>
+            <a:pPr marL="0" indent="0" algn="l">
+              <a:lnSpc>
+                <a:spcPct val="145000"/>
+              </a:lnSpc>
+              <a:buNone/>
+            </a:pPr>
+            <a:r>
+              <a:rPr lang="en-US" sz="1800" kern="0" spc="72" dirty="0">
+                <a:solidFill>
+                  <a:srgbClr val="56688A"/>
+                </a:solidFill>
+                <a:latin typeface="Courier New" pitchFamily="34" charset="0"/>
+                <a:ea typeface="Courier New" pitchFamily="34" charset="-122"/>
+                <a:cs typeface="Courier New" pitchFamily="34" charset="-120"/>
+              </a:rPr>
+              <a:t>iterate fast</a:t>
+            </a:r>
+            <a:endParaRPr lang="en-US" sz="1800" dirty="0"/>
+          </a:p>
+        </p:txBody>
+      </p:sp>
+      <p:sp>
+        <p:nvSpPr>
+          <p:cNvPr id="4" name="Text 2"/>
+          <p:cNvSpPr/>
+          <p:nvPr/>
+        </p:nvSpPr>
+        <p:spPr>
+          <a:xfrm>
+            <a:off x="914330" y="838165"/>
+            <a:ext cx="16953120" cy="374276"/>
+          </a:xfrm>
+          <a:prstGeom prst="rect">
+            <a:avLst/>
+          </a:prstGeom>
+          <a:noFill/>
+          <a:ln/>
+        </p:spPr>
+        <p:txBody>
+          <a:bodyPr wrap="square" lIns="25400" tIns="25400" rIns="25400" bIns="25400" rtlCol="0" anchor="t">
+            <a:normAutofit fontScale="92500" lnSpcReduction="20000"/>
+          </a:bodyPr>
+          <a:lstStyle/>
+          <a:p>
+            <a:pPr marL="0" indent="0" algn="l">
+              <a:lnSpc>
+                <a:spcPct val="150000"/>
+              </a:lnSpc>
+              <a:buNone/>
+            </a:pPr>
+            <a:r>
+              <a:rPr lang="en-US" sz="1800" kern="0" spc="324" dirty="0">
+                <a:solidFill>
+                  <a:srgbClr val="4ADE80"/>
+                </a:solidFill>
+                <a:latin typeface="Courier New" pitchFamily="34" charset="0"/>
+                <a:ea typeface="Courier New" pitchFamily="34" charset="-122"/>
+                <a:cs typeface="Courier New" pitchFamily="34" charset="-120"/>
+              </a:rPr>
+              <a:t>DON'T BOUNCE THE WHOLE STACK</a:t>
+            </a:r>
+            <a:endParaRPr lang="en-US" sz="1800" dirty="0"/>
+          </a:p>
+        </p:txBody>
+      </p:sp>
+      <p:sp>
+        <p:nvSpPr>
+          <p:cNvPr id="5" name="Text 3"/>
+          <p:cNvSpPr/>
+          <p:nvPr/>
+        </p:nvSpPr>
+        <p:spPr>
+          <a:xfrm>
+            <a:off x="914330" y="1441006"/>
+            <a:ext cx="14716124" cy="676835"/>
+          </a:xfrm>
+          <a:prstGeom prst="rect">
+            <a:avLst/>
+          </a:prstGeom>
+          <a:noFill/>
+          <a:ln/>
+        </p:spPr>
+        <p:txBody>
+          <a:bodyPr wrap="square" lIns="25400" tIns="25400" rIns="25400" bIns="25400" rtlCol="0" anchor="t">
+            <a:normAutofit fontScale="92500" lnSpcReduction="20000"/>
+          </a:bodyPr>
+          <a:lstStyle/>
+          <a:p>
+            <a:pPr marL="0" indent="0" algn="l">
+              <a:lnSpc>
+                <a:spcPct val="105000"/>
+              </a:lnSpc>
+              <a:buNone/>
+            </a:pPr>
+            <a:r>
+              <a:rPr lang="en-US" sz="4800" b="1" kern="0" spc="-72" dirty="0">
+                <a:solidFill>
+                  <a:srgbClr val="E6EDF3"/>
+                </a:solidFill>
+                <a:latin typeface="Arial" pitchFamily="34" charset="0"/>
+                <a:ea typeface="Arial" pitchFamily="34" charset="-122"/>
+                <a:cs typeface="Arial" pitchFamily="34" charset="-120"/>
+              </a:rPr>
+              <a:t>Restart only what changed.</a:t>
+            </a:r>
+            <a:endParaRPr lang="en-US" sz="4800" dirty="0"/>
+          </a:p>
+        </p:txBody>
+      </p:sp>
+      <p:sp>
+        <p:nvSpPr>
+          <p:cNvPr id="6" name="Text 4"/>
+          <p:cNvSpPr/>
+          <p:nvPr/>
+        </p:nvSpPr>
+        <p:spPr>
+          <a:xfrm>
+            <a:off x="914330" y="2536906"/>
+            <a:ext cx="14716124" cy="979394"/>
+          </a:xfrm>
+          <a:prstGeom prst="rect">
+            <a:avLst/>
+          </a:prstGeom>
+          <a:noFill/>
+          <a:ln/>
+        </p:spPr>
+        <p:txBody>
+          <a:bodyPr wrap="square" lIns="25400" tIns="25400" rIns="25400" bIns="25400" rtlCol="0" anchor="t">
+            <a:normAutofit fontScale="92500" lnSpcReduction="20000"/>
+          </a:bodyPr>
+          <a:lstStyle/>
+          <a:p>
+            <a:pPr marL="0" indent="0" algn="l">
+              <a:lnSpc>
+                <a:spcPct val="140000"/>
+              </a:lnSpc>
+              <a:buNone/>
+            </a:pPr>
+            <a:r>
+              <a:rPr lang="en-US" sz="2700" dirty="0">
+                <a:solidFill>
+                  <a:srgbClr val="CBD5E1"/>
+                </a:solidFill>
+                <a:latin typeface="Arial" pitchFamily="34" charset="0"/>
+                <a:ea typeface="Arial" pitchFamily="34" charset="-122"/>
+                <a:cs typeface="Arial" pitchFamily="34" charset="-120"/>
+              </a:rPr>
+              <a:t>Config files are bind-mounted from the host. The container already has the new file — it just needs to re-read it on startup.</a:t>
+            </a:r>
+            <a:endParaRPr lang="en-US" sz="2700" dirty="0"/>
+          </a:p>
+        </p:txBody>
+      </p:sp>
+      <p:sp>
+        <p:nvSpPr>
+          <p:cNvPr id="7" name="Text 5"/>
+          <p:cNvSpPr/>
+          <p:nvPr/>
+        </p:nvSpPr>
+        <p:spPr>
+          <a:xfrm>
+            <a:off x="914330" y="3973360"/>
+            <a:ext cx="8162579" cy="374276"/>
+          </a:xfrm>
+          <a:prstGeom prst="rect">
+            <a:avLst/>
+          </a:prstGeom>
+          <a:noFill/>
+          <a:ln/>
+        </p:spPr>
+        <p:txBody>
+          <a:bodyPr wrap="square" lIns="25400" tIns="25400" rIns="25400" bIns="25400" rtlCol="0" anchor="t">
+            <a:normAutofit fontScale="92500" lnSpcReduction="20000"/>
+          </a:bodyPr>
+          <a:lstStyle/>
+          <a:p>
+            <a:pPr marL="0" indent="0" algn="l">
+              <a:lnSpc>
+                <a:spcPct val="150000"/>
+              </a:lnSpc>
+              <a:buNone/>
+            </a:pPr>
+            <a:r>
+              <a:rPr lang="en-US" sz="1800" kern="0" spc="72" dirty="0">
+                <a:solidFill>
+                  <a:srgbClr val="56688A"/>
+                </a:solidFill>
+                <a:latin typeface="Courier New" pitchFamily="34" charset="0"/>
+                <a:ea typeface="Courier New" pitchFamily="34" charset="-122"/>
+                <a:cs typeface="Courier New" pitchFamily="34" charset="-120"/>
+              </a:rPr>
+              <a:t>config file changed</a:t>
+            </a:r>
+            <a:endParaRPr lang="en-US" sz="1800" dirty="0"/>
+          </a:p>
+        </p:txBody>
+      </p:sp>
+      <p:sp>
+        <p:nvSpPr>
+          <p:cNvPr id="8" name="Shape 6"/>
+          <p:cNvSpPr/>
+          <p:nvPr/>
+        </p:nvSpPr>
+        <p:spPr>
+          <a:xfrm>
+            <a:off x="914330" y="4423697"/>
+            <a:ext cx="7924834" cy="3222742"/>
+          </a:xfrm>
+          <a:prstGeom prst="roundRect">
+            <a:avLst>
+              <a:gd name="adj" fmla="val 1773"/>
+            </a:avLst>
+          </a:prstGeom>
+          <a:solidFill>
+            <a:srgbClr val="0C1729"/>
+          </a:solidFill>
+          <a:ln w="11206">
+            <a:solidFill>
+              <a:srgbClr val="1E3354"/>
+            </a:solidFill>
+            <a:prstDash val="solid"/>
+          </a:ln>
+        </p:spPr>
+        <p:txBody>
+          <a:bodyPr/>
+          <a:lstStyle/>
+          <a:p>
+            <a:endParaRPr lang="en-US"/>
+          </a:p>
+        </p:txBody>
+      </p:sp>
+      <p:sp>
+        <p:nvSpPr>
+          <p:cNvPr id="9" name="Text 7"/>
+          <p:cNvSpPr/>
+          <p:nvPr/>
+        </p:nvSpPr>
+        <p:spPr>
+          <a:xfrm>
+            <a:off x="1268436" y="4701603"/>
+            <a:ext cx="7454368" cy="2705030"/>
+          </a:xfrm>
+          <a:prstGeom prst="rect">
+            <a:avLst/>
+          </a:prstGeom>
+          <a:noFill/>
+          <a:ln/>
+        </p:spPr>
+        <p:txBody>
+          <a:bodyPr wrap="square" lIns="25400" tIns="25400" rIns="25400" bIns="25400" rtlCol="0" anchor="t">
+            <a:normAutofit lnSpcReduction="10000"/>
+          </a:bodyPr>
+          <a:lstStyle/>
+          <a:p>
+            <a:pPr marL="0" indent="0" algn="l">
+              <a:lnSpc>
+                <a:spcPct val="155000"/>
+              </a:lnSpc>
+              <a:buNone/>
+            </a:pPr>
+            <a:r>
+              <a:rPr lang="en-US" sz="1950" dirty="0">
+                <a:solidFill>
+                  <a:srgbClr val="4ADE80"/>
+                </a:solidFill>
+                <a:latin typeface="Courier New" pitchFamily="34" charset="0"/>
+                <a:ea typeface="Courier New" pitchFamily="34" charset="-122"/>
+                <a:cs typeface="Courier New" pitchFamily="34" charset="-120"/>
+              </a:rPr>
+              <a:t>$ </a:t>
+            </a:r>
+            <a:r>
+              <a:rPr lang="en-US" sz="1950" dirty="0">
+                <a:solidFill>
+                  <a:srgbClr val="CBD5E1"/>
+                </a:solidFill>
+                <a:highlight>
+                  <a:srgbClr val="0C1729"/>
+                </a:highlight>
+                <a:latin typeface="Courier New" pitchFamily="34" charset="0"/>
+                <a:ea typeface="Courier New" pitchFamily="34" charset="-122"/>
+                <a:cs typeface="Courier New" pitchFamily="34" charset="-120"/>
+              </a:rPr>
+              <a:t> docker compose restart \</a:t>
+            </a:r>
+            <a:endParaRPr lang="en-US" sz="1950" dirty="0"/>
+          </a:p>
+          <a:p>
+            <a:pPr marL="0" indent="0" algn="l">
+              <a:lnSpc>
+                <a:spcPct val="155000"/>
+              </a:lnSpc>
+              <a:buNone/>
+            </a:pPr>
+            <a:r>
+              <a:rPr lang="en-US" sz="1950" dirty="0">
+                <a:solidFill>
+                  <a:srgbClr val="CBD5E1"/>
+                </a:solidFill>
+                <a:highlight>
+                  <a:srgbClr val="0C1729"/>
+                </a:highlight>
+                <a:latin typeface="Courier New" pitchFamily="34" charset="0"/>
+                <a:ea typeface="Courier New" pitchFamily="34" charset="-122"/>
+                <a:cs typeface="Courier New" pitchFamily="34" charset="-120"/>
+              </a:rPr>
+              <a:t>    akvorado-outlet </a:t>
+            </a:r>
+            <a:endParaRPr lang="en-US" sz="1950" dirty="0"/>
+          </a:p>
+          <a:p>
+            <a:pPr marL="0" indent="0" algn="l">
+              <a:lnSpc>
+                <a:spcPct val="155000"/>
+              </a:lnSpc>
+              <a:buNone/>
+            </a:pPr>
+            <a:r>
+              <a:rPr lang="en-US" sz="1950" dirty="0">
+                <a:solidFill>
+                  <a:srgbClr val="4ADE80"/>
+                </a:solidFill>
+                <a:latin typeface="Courier New" pitchFamily="34" charset="0"/>
+                <a:ea typeface="Courier New" pitchFamily="34" charset="-122"/>
+                <a:cs typeface="Courier New" pitchFamily="34" charset="-120"/>
+              </a:rPr>
+              <a:t>$ </a:t>
+            </a:r>
+            <a:r>
+              <a:rPr lang="en-US" sz="1950" dirty="0">
+                <a:solidFill>
+                  <a:srgbClr val="CBD5E1"/>
+                </a:solidFill>
+                <a:highlight>
+                  <a:srgbClr val="0C1729"/>
+                </a:highlight>
+                <a:latin typeface="Courier New" pitchFamily="34" charset="0"/>
+                <a:ea typeface="Courier New" pitchFamily="34" charset="-122"/>
+                <a:cs typeface="Courier New" pitchFamily="34" charset="-120"/>
+              </a:rPr>
+              <a:t> docker compose restart \</a:t>
+            </a:r>
+            <a:endParaRPr lang="en-US" sz="1950" dirty="0"/>
+          </a:p>
+          <a:p>
+            <a:pPr marL="0" indent="0" algn="l">
+              <a:lnSpc>
+                <a:spcPct val="155000"/>
+              </a:lnSpc>
+              <a:buNone/>
+            </a:pPr>
+            <a:r>
+              <a:rPr lang="en-US" sz="1950" dirty="0">
+                <a:solidFill>
+                  <a:srgbClr val="CBD5E1"/>
+                </a:solidFill>
+                <a:highlight>
+                  <a:srgbClr val="0C1729"/>
+                </a:highlight>
+                <a:latin typeface="Courier New" pitchFamily="34" charset="0"/>
+                <a:ea typeface="Courier New" pitchFamily="34" charset="-122"/>
+                <a:cs typeface="Courier New" pitchFamily="34" charset="-120"/>
+              </a:rPr>
+              <a:t>    akvorado-inlet </a:t>
+            </a:r>
+            <a:endParaRPr lang="en-US" sz="1950" dirty="0"/>
+          </a:p>
+          <a:p>
+            <a:pPr marL="0" indent="0" algn="l">
+              <a:lnSpc>
+                <a:spcPct val="155000"/>
+              </a:lnSpc>
+              <a:buNone/>
+            </a:pPr>
+            <a:r>
+              <a:rPr lang="en-US" sz="1950" dirty="0">
+                <a:solidFill>
+                  <a:srgbClr val="4ADE80"/>
+                </a:solidFill>
+                <a:latin typeface="Courier New" pitchFamily="34" charset="0"/>
+                <a:ea typeface="Courier New" pitchFamily="34" charset="-122"/>
+                <a:cs typeface="Courier New" pitchFamily="34" charset="-120"/>
+              </a:rPr>
+              <a:t>$ </a:t>
+            </a:r>
+            <a:r>
+              <a:rPr lang="en-US" sz="1950" dirty="0">
+                <a:solidFill>
+                  <a:srgbClr val="CBD5E1"/>
+                </a:solidFill>
+                <a:highlight>
+                  <a:srgbClr val="0C1729"/>
+                </a:highlight>
+                <a:latin typeface="Courier New" pitchFamily="34" charset="0"/>
+                <a:ea typeface="Courier New" pitchFamily="34" charset="-122"/>
+                <a:cs typeface="Courier New" pitchFamily="34" charset="-120"/>
+              </a:rPr>
+              <a:t> docker compose restart \</a:t>
+            </a:r>
+            <a:endParaRPr lang="en-US" sz="1950" dirty="0"/>
+          </a:p>
+          <a:p>
+            <a:pPr marL="0" indent="0" algn="l">
+              <a:lnSpc>
+                <a:spcPct val="155000"/>
+              </a:lnSpc>
+              <a:buNone/>
+            </a:pPr>
+            <a:r>
+              <a:rPr lang="en-US" sz="1950" dirty="0">
+                <a:solidFill>
+                  <a:srgbClr val="CBD5E1"/>
+                </a:solidFill>
+                <a:highlight>
+                  <a:srgbClr val="0C1729"/>
+                </a:highlight>
+                <a:latin typeface="Courier New" pitchFamily="34" charset="0"/>
+                <a:ea typeface="Courier New" pitchFamily="34" charset="-122"/>
+                <a:cs typeface="Courier New" pitchFamily="34" charset="-120"/>
+              </a:rPr>
+              <a:t>    akvorado-orchestrator</a:t>
+            </a:r>
+            <a:endParaRPr lang="en-US" sz="1950" dirty="0"/>
+          </a:p>
+        </p:txBody>
+      </p:sp>
+      <p:sp>
+        <p:nvSpPr>
+          <p:cNvPr id="10" name="Text 8"/>
+          <p:cNvSpPr/>
+          <p:nvPr/>
+        </p:nvSpPr>
+        <p:spPr>
+          <a:xfrm>
+            <a:off x="914330" y="7798768"/>
+            <a:ext cx="8162579" cy="374276"/>
+          </a:xfrm>
+          <a:prstGeom prst="rect">
+            <a:avLst/>
+          </a:prstGeom>
+          <a:noFill/>
+          <a:ln/>
+        </p:spPr>
+        <p:txBody>
+          <a:bodyPr wrap="square" lIns="25400" tIns="25400" rIns="25400" bIns="25400" rtlCol="0" anchor="t">
+            <a:normAutofit fontScale="92500" lnSpcReduction="20000"/>
+          </a:bodyPr>
+          <a:lstStyle/>
+          <a:p>
+            <a:pPr marL="0" indent="0" algn="l">
+              <a:lnSpc>
+                <a:spcPct val="150000"/>
+              </a:lnSpc>
+              <a:buNone/>
+            </a:pPr>
+            <a:r>
+              <a:rPr lang="en-US" sz="1800" dirty="0">
+                <a:solidFill>
+                  <a:srgbClr val="8A9BB4"/>
+                </a:solidFill>
+                <a:latin typeface="Courier New" pitchFamily="34" charset="0"/>
+                <a:ea typeface="Courier New" pitchFamily="34" charset="-122"/>
+                <a:cs typeface="Courier New" pitchFamily="34" charset="-120"/>
+              </a:rPr>
+              <a:t>A few seconds. ClickHouse and Kafka stay up.</a:t>
+            </a:r>
+            <a:endParaRPr lang="en-US" sz="1800" dirty="0"/>
+          </a:p>
+        </p:txBody>
+      </p:sp>
+      <p:sp>
+        <p:nvSpPr>
+          <p:cNvPr id="11" name="Text 9"/>
+          <p:cNvSpPr/>
+          <p:nvPr/>
+        </p:nvSpPr>
+        <p:spPr>
+          <a:xfrm>
+            <a:off x="9448659" y="3973360"/>
+            <a:ext cx="8162760" cy="374276"/>
+          </a:xfrm>
+          <a:prstGeom prst="rect">
+            <a:avLst/>
+          </a:prstGeom>
+          <a:noFill/>
+          <a:ln/>
+        </p:spPr>
+        <p:txBody>
+          <a:bodyPr wrap="square" lIns="25400" tIns="25400" rIns="25400" bIns="25400" rtlCol="0" anchor="t">
+            <a:normAutofit fontScale="92500" lnSpcReduction="20000"/>
+          </a:bodyPr>
+          <a:lstStyle/>
+          <a:p>
+            <a:pPr marL="0" indent="0" algn="l">
+              <a:lnSpc>
+                <a:spcPct val="150000"/>
+              </a:lnSpc>
+              <a:buNone/>
+            </a:pPr>
+            <a:r>
+              <a:rPr lang="en-US" sz="1800" kern="0" spc="72" dirty="0">
+                <a:solidFill>
+                  <a:srgbClr val="56688A"/>
+                </a:solidFill>
+                <a:latin typeface="Courier New" pitchFamily="34" charset="0"/>
+                <a:ea typeface="Courier New" pitchFamily="34" charset="-122"/>
+                <a:cs typeface="Courier New" pitchFamily="34" charset="-120"/>
+              </a:rPr>
+              <a:t>docker-compose.yml itself changed</a:t>
+            </a:r>
+            <a:endParaRPr lang="en-US" sz="1800" dirty="0"/>
+          </a:p>
+        </p:txBody>
+      </p:sp>
+      <p:sp>
+        <p:nvSpPr>
+          <p:cNvPr id="12" name="Shape 10"/>
+          <p:cNvSpPr/>
+          <p:nvPr/>
+        </p:nvSpPr>
+        <p:spPr>
+          <a:xfrm>
+            <a:off x="9448659" y="4423697"/>
+            <a:ext cx="7925010" cy="2841742"/>
+          </a:xfrm>
+          <a:prstGeom prst="roundRect">
+            <a:avLst>
+              <a:gd name="adj" fmla="val 2011"/>
+            </a:avLst>
+          </a:prstGeom>
+          <a:solidFill>
+            <a:srgbClr val="0C1729"/>
+          </a:solidFill>
+          <a:ln w="11206">
+            <a:solidFill>
+              <a:srgbClr val="1E3354"/>
+            </a:solidFill>
+            <a:prstDash val="solid"/>
+          </a:ln>
+        </p:spPr>
+        <p:txBody>
+          <a:bodyPr/>
+          <a:lstStyle/>
+          <a:p>
+            <a:endParaRPr lang="en-US"/>
+          </a:p>
+        </p:txBody>
+      </p:sp>
+      <p:sp>
+        <p:nvSpPr>
+          <p:cNvPr id="13" name="Text 11"/>
+          <p:cNvSpPr/>
+          <p:nvPr/>
+        </p:nvSpPr>
+        <p:spPr>
+          <a:xfrm>
+            <a:off x="9802765" y="4701603"/>
+            <a:ext cx="7454548" cy="2324030"/>
+          </a:xfrm>
+          <a:prstGeom prst="rect">
+            <a:avLst/>
+          </a:prstGeom>
+          <a:noFill/>
+          <a:ln/>
+        </p:spPr>
+        <p:txBody>
+          <a:bodyPr wrap="square" lIns="25400" tIns="25400" rIns="25400" bIns="25400" rtlCol="0" anchor="t">
+            <a:normAutofit/>
+          </a:bodyPr>
+          <a:lstStyle/>
+          <a:p>
+            <a:pPr marL="0" indent="0" algn="l">
+              <a:lnSpc>
+                <a:spcPct val="155000"/>
+              </a:lnSpc>
+              <a:buNone/>
+            </a:pPr>
+            <a:r>
+              <a:rPr lang="en-US" sz="1950" dirty="0">
+                <a:solidFill>
+                  <a:srgbClr val="56688A"/>
+                </a:solidFill>
+                <a:latin typeface="Courier New" pitchFamily="34" charset="0"/>
+                <a:ea typeface="Courier New" pitchFamily="34" charset="-122"/>
+                <a:cs typeface="Courier New" pitchFamily="34" charset="-120"/>
+              </a:rPr>
+              <a:t># ports, env vars, mounts # need a recreate, not a restart </a:t>
+            </a:r>
+            <a:r>
+              <a:rPr lang="en-US" sz="1950" dirty="0">
+                <a:solidFill>
+                  <a:srgbClr val="4ADE80"/>
+                </a:solidFill>
+                <a:latin typeface="Courier New" pitchFamily="34" charset="0"/>
+                <a:ea typeface="Courier New" pitchFamily="34" charset="-122"/>
+                <a:cs typeface="Courier New" pitchFamily="34" charset="-120"/>
+              </a:rPr>
+              <a:t>$ </a:t>
+            </a:r>
+            <a:r>
+              <a:rPr lang="en-US" sz="1950" dirty="0">
+                <a:solidFill>
+                  <a:srgbClr val="CBD5E1"/>
+                </a:solidFill>
+                <a:highlight>
+                  <a:srgbClr val="0C1729"/>
+                </a:highlight>
+                <a:latin typeface="Courier New" pitchFamily="34" charset="0"/>
+                <a:ea typeface="Courier New" pitchFamily="34" charset="-122"/>
+                <a:cs typeface="Courier New" pitchFamily="34" charset="-120"/>
+              </a:rPr>
+              <a:t> docker compose up -d \</a:t>
+            </a:r>
+            <a:endParaRPr lang="en-US" sz="1950" dirty="0"/>
+          </a:p>
+          <a:p>
+            <a:pPr marL="0" indent="0" algn="l">
+              <a:lnSpc>
+                <a:spcPct val="155000"/>
+              </a:lnSpc>
+              <a:buNone/>
+            </a:pPr>
+            <a:r>
+              <a:rPr lang="en-US" sz="1950" dirty="0">
+                <a:solidFill>
+                  <a:srgbClr val="CBD5E1"/>
+                </a:solidFill>
+                <a:highlight>
+                  <a:srgbClr val="0C1729"/>
+                </a:highlight>
+                <a:latin typeface="Courier New" pitchFamily="34" charset="0"/>
+                <a:ea typeface="Courier New" pitchFamily="34" charset="-122"/>
+                <a:cs typeface="Courier New" pitchFamily="34" charset="-120"/>
+              </a:rPr>
+              <a:t>    --force-recreate \</a:t>
+            </a:r>
+            <a:endParaRPr lang="en-US" sz="1950" dirty="0"/>
+          </a:p>
+          <a:p>
+            <a:pPr marL="0" indent="0" algn="l">
+              <a:lnSpc>
+                <a:spcPct val="155000"/>
+              </a:lnSpc>
+              <a:buNone/>
+            </a:pPr>
+            <a:r>
+              <a:rPr lang="en-US" sz="1950" dirty="0">
+                <a:solidFill>
+                  <a:srgbClr val="CBD5E1"/>
+                </a:solidFill>
+                <a:highlight>
+                  <a:srgbClr val="0C1729"/>
+                </a:highlight>
+                <a:latin typeface="Courier New" pitchFamily="34" charset="0"/>
+                <a:ea typeface="Courier New" pitchFamily="34" charset="-122"/>
+                <a:cs typeface="Courier New" pitchFamily="34" charset="-120"/>
+              </a:rPr>
+              <a:t>    akvorado-outlet</a:t>
+            </a:r>
+            <a:endParaRPr lang="en-US" sz="1950" dirty="0"/>
+          </a:p>
+        </p:txBody>
+      </p:sp>
+      <p:sp>
+        <p:nvSpPr>
+          <p:cNvPr id="14" name="Text 12"/>
+          <p:cNvSpPr/>
+          <p:nvPr/>
+        </p:nvSpPr>
+        <p:spPr>
+          <a:xfrm>
+            <a:off x="9448659" y="7417768"/>
+            <a:ext cx="8162760" cy="374276"/>
+          </a:xfrm>
+          <a:prstGeom prst="rect">
+            <a:avLst/>
+          </a:prstGeom>
+          <a:noFill/>
+          <a:ln/>
+        </p:spPr>
+        <p:txBody>
+          <a:bodyPr wrap="square" lIns="25400" tIns="25400" rIns="25400" bIns="25400" rtlCol="0" anchor="t">
+            <a:normAutofit fontScale="92500" lnSpcReduction="20000"/>
+          </a:bodyPr>
+          <a:lstStyle/>
+          <a:p>
+            <a:pPr marL="0" indent="0" algn="l">
+              <a:lnSpc>
+                <a:spcPct val="150000"/>
+              </a:lnSpc>
+              <a:buNone/>
+            </a:pPr>
+            <a:r>
+              <a:rPr lang="en-US" sz="1800" dirty="0">
+                <a:solidFill>
+                  <a:srgbClr val="FBBF24"/>
+                </a:solidFill>
+                <a:latin typeface="Courier New" pitchFamily="34" charset="0"/>
+                <a:ea typeface="Courier New" pitchFamily="34" charset="-122"/>
+                <a:cs typeface="Courier New" pitchFamily="34" charset="-120"/>
+              </a:rPr>
+              <a:t>Restart ≠ recreate. Know the difference.</a:t>
+            </a:r>
+            <a:endParaRPr lang="en-US" sz="1800" dirty="0"/>
+          </a:p>
+        </p:txBody>
+      </p:sp>
+      <p:sp>
+        <p:nvSpPr>
+          <p:cNvPr id="15" name="Text 13"/>
+          <p:cNvSpPr/>
+          <p:nvPr/>
+        </p:nvSpPr>
+        <p:spPr>
+          <a:xfrm>
+            <a:off x="914330" y="9619199"/>
+            <a:ext cx="3767941" cy="363071"/>
+          </a:xfrm>
+          <a:prstGeom prst="rect">
+            <a:avLst/>
+          </a:prstGeom>
+          <a:noFill/>
+          <a:ln/>
+        </p:spPr>
+        <p:txBody>
+          <a:bodyPr wrap="square" lIns="25400" tIns="25400" rIns="25400" bIns="25400" rtlCol="0" anchor="t">
+            <a:normAutofit fontScale="92500" lnSpcReduction="20000"/>
+          </a:bodyPr>
+          <a:lstStyle/>
+          <a:p>
+            <a:pPr marL="0" indent="0" algn="l">
+              <a:lnSpc>
+                <a:spcPct val="145000"/>
+              </a:lnSpc>
+              <a:buNone/>
+            </a:pPr>
+            <a:r>
+              <a:rPr lang="en-US" sz="1800" kern="0" spc="72" dirty="0">
+                <a:solidFill>
+                  <a:srgbClr val="56688A"/>
+                </a:solidFill>
+                <a:latin typeface="Courier New" pitchFamily="34" charset="0"/>
+                <a:ea typeface="Courier New" pitchFamily="34" charset="-122"/>
+                <a:cs typeface="Courier New" pitchFamily="34" charset="-120"/>
+              </a:rPr>
+              <a:t>akvorado-lab · don jolley</a:t>
+            </a:r>
+            <a:endParaRPr lang="en-US" sz="1800" dirty="0"/>
+          </a:p>
+        </p:txBody>
+      </p:sp>
+      <p:sp>
+        <p:nvSpPr>
+          <p:cNvPr id="16" name="Text 14"/>
+          <p:cNvSpPr/>
+          <p:nvPr/>
+        </p:nvSpPr>
+        <p:spPr>
+          <a:xfrm>
+            <a:off x="15764049" y="9619199"/>
+            <a:ext cx="1685820" cy="363071"/>
+          </a:xfrm>
+          <a:prstGeom prst="rect">
+            <a:avLst/>
+          </a:prstGeom>
+          <a:noFill/>
+          <a:ln/>
+        </p:spPr>
+        <p:txBody>
+          <a:bodyPr wrap="square" lIns="25400" tIns="25400" rIns="25400" bIns="25400" rtlCol="0" anchor="t">
+            <a:normAutofit fontScale="92500" lnSpcReduction="20000"/>
+          </a:bodyPr>
+          <a:lstStyle/>
+          <a:p>
+            <a:pPr marL="0" indent="0" algn="l">
+              <a:lnSpc>
+                <a:spcPct val="145000"/>
+              </a:lnSpc>
+              <a:buNone/>
+            </a:pPr>
+            <a:r>
+              <a:rPr lang="en-US" sz="1800" kern="0" spc="72" dirty="0">
+                <a:solidFill>
+                  <a:srgbClr val="56688A"/>
+                </a:solidFill>
+                <a:latin typeface="Courier New" pitchFamily="34" charset="0"/>
+                <a:ea typeface="Courier New" pitchFamily="34" charset="-122"/>
+                <a:cs typeface="Courier New" pitchFamily="34" charset="-120"/>
+              </a:rPr>
+              <a:t>slide 30</a:t>
+            </a:r>
+            <a:endParaRPr lang="en-US" sz="1800" dirty="0"/>
+          </a:p>
+        </p:txBody>
+      </p:sp>
+    </p:spTree>
+  </p:cSld>
+  <p:clrMapOvr>
+    <a:masterClrMapping/>
+  </p:clrMapOvr>
+</p:sld>
+</file>
+
+<file path=ppt/slides/slide31.xml><?xml version="1.0" encoding="utf-8"?>
+<p:sld xmlns:a="http://schemas.openxmlformats.org/drawingml/2006/main" xmlns:r="http://schemas.openxmlformats.org/officeDocument/2006/relationships" xmlns:p="http://schemas.openxmlformats.org/presentationml/2006/main">
   <p:cSld name="Slide 31">
     <p:bg>
       <p:bgPr>
@@ -26537,7 +27578,7 @@
 </p:sld>
 </file>
 
-<file path=ppt/slides/slide31.xml><?xml version="1.0" encoding="utf-8"?>
+<file path=ppt/slides/slide32.xml><?xml version="1.0" encoding="utf-8"?>
 <p:sld xmlns:a="http://schemas.openxmlformats.org/drawingml/2006/main" xmlns:r="http://schemas.openxmlformats.org/officeDocument/2006/relationships" xmlns:p="http://schemas.openxmlformats.org/presentationml/2006/main">
   <p:cSld name="Slide 32">
     <p:bg>
@@ -26751,7 +27792,7 @@
 </p:sld>
 </file>
 
-<file path=ppt/slides/slide32.xml><?xml version="1.0" encoding="utf-8"?>
+<file path=ppt/slides/slide33.xml><?xml version="1.0" encoding="utf-8"?>
 <p:sld xmlns:a="http://schemas.openxmlformats.org/drawingml/2006/main" xmlns:r="http://schemas.openxmlformats.org/officeDocument/2006/relationships" xmlns:p="http://schemas.openxmlformats.org/presentationml/2006/main">
   <p:cSld name="Slide 33">
     <p:bg>
@@ -27501,7 +28542,7 @@
 </p:sld>
 </file>
 
-<file path=ppt/slides/slide33.xml><?xml version="1.0" encoding="utf-8"?>
+<file path=ppt/slides/slide34.xml><?xml version="1.0" encoding="utf-8"?>
 <p:sld xmlns:a="http://schemas.openxmlformats.org/drawingml/2006/main" xmlns:r="http://schemas.openxmlformats.org/officeDocument/2006/relationships" xmlns:p="http://schemas.openxmlformats.org/presentationml/2006/main">
   <p:cSld name="Slide 34">
     <p:bg>
@@ -28102,7 +29143,7 @@
 </p:sld>
 </file>
 
-<file path=ppt/slides/slide34.xml><?xml version="1.0" encoding="utf-8"?>
+<file path=ppt/slides/slide35.xml><?xml version="1.0" encoding="utf-8"?>
 <p:sld xmlns:a="http://schemas.openxmlformats.org/drawingml/2006/main" xmlns:r="http://schemas.openxmlformats.org/officeDocument/2006/relationships" xmlns:p="http://schemas.openxmlformats.org/presentationml/2006/main">
   <p:cSld name="Slide 35">
     <p:bg>
@@ -28794,7 +29835,7 @@
 </p:sld>
 </file>
 
-<file path=ppt/slides/slide35.xml><?xml version="1.0" encoding="utf-8"?>
+<file path=ppt/slides/slide36.xml><?xml version="1.0" encoding="utf-8"?>
 <p:sld xmlns:a="http://schemas.openxmlformats.org/drawingml/2006/main" xmlns:r="http://schemas.openxmlformats.org/officeDocument/2006/relationships" xmlns:p="http://schemas.openxmlformats.org/presentationml/2006/main">
   <p:cSld name="Slide 36">
     <p:bg>
@@ -29559,7 +30600,7 @@
 </p:sld>
 </file>
 
-<file path=ppt/slides/slide36.xml><?xml version="1.0" encoding="utf-8"?>
+<file path=ppt/slides/slide37.xml><?xml version="1.0" encoding="utf-8"?>
 <p:sld xmlns:a="http://schemas.openxmlformats.org/drawingml/2006/main" xmlns:r="http://schemas.openxmlformats.org/officeDocument/2006/relationships" xmlns:p="http://schemas.openxmlformats.org/presentationml/2006/main">
   <p:cSld name="Slide 37">
     <p:bg>
@@ -30320,7 +31361,7 @@
 </p:sld>
 </file>
 
-<file path=ppt/slides/slide37.xml><?xml version="1.0" encoding="utf-8"?>
+<file path=ppt/slides/slide38.xml><?xml version="1.0" encoding="utf-8"?>
 <p:sld xmlns:a="http://schemas.openxmlformats.org/drawingml/2006/main" xmlns:r="http://schemas.openxmlformats.org/officeDocument/2006/relationships" xmlns:p="http://schemas.openxmlformats.org/presentationml/2006/main">
   <p:cSld name="Slide 40">
     <p:bg>
@@ -30512,7 +31553,7 @@
 </p:sld>
 </file>
 
-<file path=ppt/slides/slide38.xml><?xml version="1.0" encoding="utf-8"?>
+<file path=ppt/slides/slide39.xml><?xml version="1.0" encoding="utf-8"?>
 <p:sld xmlns:a="http://schemas.openxmlformats.org/drawingml/2006/main" xmlns:r="http://schemas.openxmlformats.org/officeDocument/2006/relationships" xmlns:p="http://schemas.openxmlformats.org/presentationml/2006/main">
   <p:cSld name="Slide 41">
     <p:bg>
@@ -31041,848 +32082,6 @@
                 <a:cs typeface="Courier New" pitchFamily="34" charset="-120"/>
               </a:rPr>
               <a:t>slide 41</a:t>
-            </a:r>
-            <a:endParaRPr lang="en-US" sz="1800" dirty="0"/>
-          </a:p>
-        </p:txBody>
-      </p:sp>
-    </p:spTree>
-  </p:cSld>
-  <p:clrMapOvr>
-    <a:masterClrMapping/>
-  </p:clrMapOvr>
-</p:sld>
-</file>
-
-<file path=ppt/slides/slide39.xml><?xml version="1.0" encoding="utf-8"?>
-<p:sld xmlns:a="http://schemas.openxmlformats.org/drawingml/2006/main" xmlns:r="http://schemas.openxmlformats.org/officeDocument/2006/relationships" xmlns:p="http://schemas.openxmlformats.org/presentationml/2006/main">
-  <p:cSld name="Slide 42">
-    <p:bg>
-      <p:bgPr>
-        <a:solidFill>
-          <a:srgbClr val="08111F"/>
-        </a:solidFill>
-        <a:effectLst/>
-      </p:bgPr>
-    </p:bg>
-    <p:spTree>
-      <p:nvGrpSpPr>
-        <p:cNvPr id="1" name=""/>
-        <p:cNvGrpSpPr/>
-        <p:nvPr/>
-      </p:nvGrpSpPr>
-      <p:grpSpPr>
-        <a:xfrm>
-          <a:off x="0" y="0"/>
-          <a:ext cx="0" cy="0"/>
-          <a:chOff x="0" y="0"/>
-          <a:chExt cx="0" cy="0"/>
-        </a:xfrm>
-      </p:grpSpPr>
-      <p:sp>
-        <p:nvSpPr>
-          <p:cNvPr id="2" name="Text 0"/>
-          <p:cNvSpPr/>
-          <p:nvPr/>
-        </p:nvSpPr>
-        <p:spPr>
-          <a:xfrm>
-            <a:off x="914330" y="342830"/>
-            <a:ext cx="1978574" cy="363071"/>
-          </a:xfrm>
-          <a:prstGeom prst="rect">
-            <a:avLst/>
-          </a:prstGeom>
-          <a:noFill/>
-          <a:ln/>
-        </p:spPr>
-        <p:txBody>
-          <a:bodyPr wrap="square" lIns="25400" tIns="25400" rIns="25400" bIns="25400" rtlCol="0" anchor="t">
-            <a:normAutofit fontScale="92500" lnSpcReduction="20000"/>
-          </a:bodyPr>
-          <a:lstStyle/>
-          <a:p>
-            <a:pPr marL="0" indent="0" algn="l">
-              <a:lnSpc>
-                <a:spcPct val="145000"/>
-              </a:lnSpc>
-              <a:buNone/>
-            </a:pPr>
-            <a:r>
-              <a:rPr lang="en-US" sz="1800" kern="0" spc="72" dirty="0">
-                <a:solidFill>
-                  <a:srgbClr val="4ADE80"/>
-                </a:solidFill>
-                <a:latin typeface="Courier New" pitchFamily="34" charset="0"/>
-                <a:ea typeface="Courier New" pitchFamily="34" charset="-122"/>
-                <a:cs typeface="Courier New" pitchFamily="34" charset="-120"/>
-              </a:rPr>
-              <a:t>§ 05 verify</a:t>
-            </a:r>
-            <a:endParaRPr lang="en-US" sz="1800" dirty="0"/>
-          </a:p>
-        </p:txBody>
-      </p:sp>
-      <p:sp>
-        <p:nvSpPr>
-          <p:cNvPr id="3" name="Text 1"/>
-          <p:cNvSpPr/>
-          <p:nvPr/>
-        </p:nvSpPr>
-        <p:spPr>
-          <a:xfrm>
-            <a:off x="15910251" y="342830"/>
-            <a:ext cx="1539618" cy="363071"/>
-          </a:xfrm>
-          <a:prstGeom prst="rect">
-            <a:avLst/>
-          </a:prstGeom>
-          <a:noFill/>
-          <a:ln/>
-        </p:spPr>
-        <p:txBody>
-          <a:bodyPr wrap="square" lIns="25400" tIns="25400" rIns="25400" bIns="25400" rtlCol="0" anchor="t">
-            <a:normAutofit fontScale="92500" lnSpcReduction="20000"/>
-          </a:bodyPr>
-          <a:lstStyle/>
-          <a:p>
-            <a:pPr marL="0" indent="0" algn="l">
-              <a:lnSpc>
-                <a:spcPct val="145000"/>
-              </a:lnSpc>
-              <a:buNone/>
-            </a:pPr>
-            <a:r>
-              <a:rPr lang="en-US" sz="1800" kern="0" spc="72" dirty="0">
-                <a:solidFill>
-                  <a:srgbClr val="56688A"/>
-                </a:solidFill>
-                <a:latin typeface="Courier New" pitchFamily="34" charset="0"/>
-                <a:ea typeface="Courier New" pitchFamily="34" charset="-122"/>
-                <a:cs typeface="Courier New" pitchFamily="34" charset="-120"/>
-              </a:rPr>
-              <a:t>wire check</a:t>
-            </a:r>
-            <a:endParaRPr lang="en-US" sz="1800" dirty="0"/>
-          </a:p>
-        </p:txBody>
-      </p:sp>
-      <p:sp>
-        <p:nvSpPr>
-          <p:cNvPr id="4" name="Text 2"/>
-          <p:cNvSpPr/>
-          <p:nvPr/>
-        </p:nvSpPr>
-        <p:spPr>
-          <a:xfrm>
-            <a:off x="914330" y="838165"/>
-            <a:ext cx="16953120" cy="374276"/>
-          </a:xfrm>
-          <a:prstGeom prst="rect">
-            <a:avLst/>
-          </a:prstGeom>
-          <a:noFill/>
-          <a:ln/>
-        </p:spPr>
-        <p:txBody>
-          <a:bodyPr wrap="square" lIns="25400" tIns="25400" rIns="25400" bIns="25400" rtlCol="0" anchor="t">
-            <a:normAutofit fontScale="92500" lnSpcReduction="20000"/>
-          </a:bodyPr>
-          <a:lstStyle/>
-          <a:p>
-            <a:pPr marL="0" indent="0" algn="l">
-              <a:lnSpc>
-                <a:spcPct val="150000"/>
-              </a:lnSpc>
-              <a:buNone/>
-            </a:pPr>
-            <a:r>
-              <a:rPr lang="en-US" sz="1800" kern="0" spc="324" dirty="0">
-                <a:solidFill>
-                  <a:srgbClr val="4ADE80"/>
-                </a:solidFill>
-                <a:latin typeface="Courier New" pitchFamily="34" charset="0"/>
-                <a:ea typeface="Courier New" pitchFamily="34" charset="-122"/>
-                <a:cs typeface="Courier New" pitchFamily="34" charset="-120"/>
-              </a:rPr>
-              <a:t>WHEN IN DOUBT, DROP TO THE WIRE</a:t>
-            </a:r>
-            <a:endParaRPr lang="en-US" sz="1800" dirty="0"/>
-          </a:p>
-        </p:txBody>
-      </p:sp>
-      <p:sp>
-        <p:nvSpPr>
-          <p:cNvPr id="5" name="Text 3"/>
-          <p:cNvSpPr/>
-          <p:nvPr/>
-        </p:nvSpPr>
-        <p:spPr>
-          <a:xfrm>
-            <a:off x="914330" y="1441006"/>
-            <a:ext cx="14716124" cy="676835"/>
-          </a:xfrm>
-          <a:prstGeom prst="rect">
-            <a:avLst/>
-          </a:prstGeom>
-          <a:noFill/>
-          <a:ln/>
-        </p:spPr>
-        <p:txBody>
-          <a:bodyPr wrap="square" lIns="25400" tIns="25400" rIns="25400" bIns="25400" rtlCol="0" anchor="t">
-            <a:normAutofit fontScale="92500" lnSpcReduction="20000"/>
-          </a:bodyPr>
-          <a:lstStyle/>
-          <a:p>
-            <a:pPr marL="0" indent="0" algn="l">
-              <a:lnSpc>
-                <a:spcPct val="105000"/>
-              </a:lnSpc>
-              <a:buNone/>
-            </a:pPr>
-            <a:r>
-              <a:rPr lang="en-US" sz="4800" b="1" kern="0" spc="-72" dirty="0">
-                <a:solidFill>
-                  <a:srgbClr val="E6EDF3"/>
-                </a:solidFill>
-                <a:latin typeface="Arial" pitchFamily="34" charset="0"/>
-                <a:ea typeface="Arial" pitchFamily="34" charset="-122"/>
-                <a:cs typeface="Arial" pitchFamily="34" charset="-120"/>
-              </a:rPr>
-              <a:t>tcpdump on the VM, not in the container.</a:t>
-            </a:r>
-            <a:endParaRPr lang="en-US" sz="4800" dirty="0"/>
-          </a:p>
-        </p:txBody>
-      </p:sp>
-      <p:sp>
-        <p:nvSpPr>
-          <p:cNvPr id="6" name="Text 4"/>
-          <p:cNvSpPr/>
-          <p:nvPr/>
-        </p:nvSpPr>
-        <p:spPr>
-          <a:xfrm>
-            <a:off x="914330" y="2536906"/>
-            <a:ext cx="14716124" cy="508747"/>
-          </a:xfrm>
-          <a:prstGeom prst="rect">
-            <a:avLst/>
-          </a:prstGeom>
-          <a:noFill/>
-          <a:ln/>
-        </p:spPr>
-        <p:txBody>
-          <a:bodyPr wrap="square" lIns="25400" tIns="25400" rIns="25400" bIns="25400" rtlCol="0" anchor="t">
-            <a:normAutofit fontScale="92500" lnSpcReduction="10000"/>
-          </a:bodyPr>
-          <a:lstStyle/>
-          <a:p>
-            <a:pPr marL="0" indent="0" algn="l">
-              <a:lnSpc>
-                <a:spcPct val="140000"/>
-              </a:lnSpc>
-              <a:buNone/>
-            </a:pPr>
-            <a:r>
-              <a:rPr lang="en-US" sz="2700" dirty="0">
-                <a:solidFill>
-                  <a:srgbClr val="CBD5E1"/>
-                </a:solidFill>
-                <a:latin typeface="Arial" pitchFamily="34" charset="0"/>
-                <a:ea typeface="Arial" pitchFamily="34" charset="-122"/>
-                <a:cs typeface="Arial" pitchFamily="34" charset="-120"/>
-              </a:rPr>
-              <a:t>If the inlet logs are silent, prove flows are even reaching the VM before blaming the stack.</a:t>
-            </a:r>
-            <a:endParaRPr lang="en-US" sz="2700" dirty="0"/>
-          </a:p>
-        </p:txBody>
-      </p:sp>
-      <p:sp>
-        <p:nvSpPr>
-          <p:cNvPr id="7" name="Text 5"/>
-          <p:cNvSpPr/>
-          <p:nvPr/>
-        </p:nvSpPr>
-        <p:spPr>
-          <a:xfrm>
-            <a:off x="914330" y="3502714"/>
-            <a:ext cx="8162579" cy="374276"/>
-          </a:xfrm>
-          <a:prstGeom prst="rect">
-            <a:avLst/>
-          </a:prstGeom>
-          <a:noFill/>
-          <a:ln/>
-        </p:spPr>
-        <p:txBody>
-          <a:bodyPr wrap="square" lIns="25400" tIns="25400" rIns="25400" bIns="25400" rtlCol="0" anchor="t">
-            <a:normAutofit fontScale="92500" lnSpcReduction="20000"/>
-          </a:bodyPr>
-          <a:lstStyle/>
-          <a:p>
-            <a:pPr marL="0" indent="0" algn="l">
-              <a:lnSpc>
-                <a:spcPct val="150000"/>
-              </a:lnSpc>
-              <a:buNone/>
-            </a:pPr>
-            <a:r>
-              <a:rPr lang="en-US" sz="1800" kern="0" spc="72" dirty="0">
-                <a:solidFill>
-                  <a:srgbClr val="56688A"/>
-                </a:solidFill>
-                <a:latin typeface="Courier New" pitchFamily="34" charset="0"/>
-                <a:ea typeface="Courier New" pitchFamily="34" charset="-122"/>
-                <a:cs typeface="Courier New" pitchFamily="34" charset="-120"/>
-              </a:rPr>
-              <a:t>incoming netflow</a:t>
-            </a:r>
-            <a:endParaRPr lang="en-US" sz="1800" dirty="0"/>
-          </a:p>
-        </p:txBody>
-      </p:sp>
-      <p:sp>
-        <p:nvSpPr>
-          <p:cNvPr id="8" name="Shape 6"/>
-          <p:cNvSpPr/>
-          <p:nvPr/>
-        </p:nvSpPr>
-        <p:spPr>
-          <a:xfrm>
-            <a:off x="914330" y="3953050"/>
-            <a:ext cx="7924834" cy="1698742"/>
-          </a:xfrm>
-          <a:prstGeom prst="roundRect">
-            <a:avLst>
-              <a:gd name="adj" fmla="val 3364"/>
-            </a:avLst>
-          </a:prstGeom>
-          <a:solidFill>
-            <a:srgbClr val="0C1729"/>
-          </a:solidFill>
-          <a:ln w="11206">
-            <a:solidFill>
-              <a:srgbClr val="1E3354"/>
-            </a:solidFill>
-            <a:prstDash val="solid"/>
-          </a:ln>
-        </p:spPr>
-        <p:txBody>
-          <a:bodyPr/>
-          <a:lstStyle/>
-          <a:p>
-            <a:endParaRPr lang="en-US"/>
-          </a:p>
-        </p:txBody>
-      </p:sp>
-      <p:sp>
-        <p:nvSpPr>
-          <p:cNvPr id="9" name="Text 7"/>
-          <p:cNvSpPr/>
-          <p:nvPr/>
-        </p:nvSpPr>
-        <p:spPr>
-          <a:xfrm>
-            <a:off x="1268436" y="4230956"/>
-            <a:ext cx="7454368" cy="1181030"/>
-          </a:xfrm>
-          <a:prstGeom prst="rect">
-            <a:avLst/>
-          </a:prstGeom>
-          <a:noFill/>
-          <a:ln/>
-        </p:spPr>
-        <p:txBody>
-          <a:bodyPr wrap="square" lIns="25400" tIns="25400" rIns="25400" bIns="25400" rtlCol="0" anchor="t">
-            <a:normAutofit fontScale="92500" lnSpcReduction="20000"/>
-          </a:bodyPr>
-          <a:lstStyle/>
-          <a:p>
-            <a:pPr marL="0" indent="0" algn="l">
-              <a:lnSpc>
-                <a:spcPct val="155000"/>
-              </a:lnSpc>
-              <a:buNone/>
-            </a:pPr>
-            <a:r>
-              <a:rPr lang="en-US" sz="1950" dirty="0">
-                <a:solidFill>
-                  <a:srgbClr val="4ADE80"/>
-                </a:solidFill>
-                <a:latin typeface="Courier New" pitchFamily="34" charset="0"/>
-                <a:ea typeface="Courier New" pitchFamily="34" charset="-122"/>
-                <a:cs typeface="Courier New" pitchFamily="34" charset="-120"/>
-              </a:rPr>
-              <a:t>$ </a:t>
-            </a:r>
-            <a:r>
-              <a:rPr lang="en-US" sz="1950" dirty="0">
-                <a:solidFill>
-                  <a:srgbClr val="CBD5E1"/>
-                </a:solidFill>
-                <a:highlight>
-                  <a:srgbClr val="0C1729"/>
-                </a:highlight>
-                <a:latin typeface="Courier New" pitchFamily="34" charset="0"/>
-                <a:ea typeface="Courier New" pitchFamily="34" charset="-122"/>
-                <a:cs typeface="Courier New" pitchFamily="34" charset="-120"/>
-              </a:rPr>
-              <a:t> sudo tcpdump -i any \</a:t>
-            </a:r>
-            <a:endParaRPr lang="en-US" sz="1950" dirty="0"/>
-          </a:p>
-          <a:p>
-            <a:pPr marL="0" indent="0" algn="l">
-              <a:lnSpc>
-                <a:spcPct val="155000"/>
-              </a:lnSpc>
-              <a:buNone/>
-            </a:pPr>
-            <a:r>
-              <a:rPr lang="en-US" sz="1950" dirty="0">
-                <a:solidFill>
-                  <a:srgbClr val="CBD5E1"/>
-                </a:solidFill>
-                <a:highlight>
-                  <a:srgbClr val="0C1729"/>
-                </a:highlight>
-                <a:latin typeface="Courier New" pitchFamily="34" charset="0"/>
-                <a:ea typeface="Courier New" pitchFamily="34" charset="-122"/>
-                <a:cs typeface="Courier New" pitchFamily="34" charset="-120"/>
-              </a:rPr>
-              <a:t>    udp port  </a:t>
-            </a:r>
-            <a:endParaRPr lang="en-US" sz="1950" dirty="0"/>
-          </a:p>
-          <a:p>
-            <a:pPr marL="0" indent="0" algn="l">
-              <a:lnSpc>
-                <a:spcPct val="155000"/>
-              </a:lnSpc>
-              <a:buNone/>
-            </a:pPr>
-            <a:r>
-              <a:rPr lang="en-US" sz="1950" dirty="0">
-                <a:solidFill>
-                  <a:srgbClr val="FDBA74"/>
-                </a:solidFill>
-                <a:latin typeface="Courier New" pitchFamily="34" charset="0"/>
-                <a:ea typeface="Courier New" pitchFamily="34" charset="-122"/>
-                <a:cs typeface="Courier New" pitchFamily="34" charset="-120"/>
-              </a:rPr>
-              <a:t>2055</a:t>
-            </a:r>
-            <a:r>
-              <a:rPr lang="en-US" sz="1950" dirty="0">
-                <a:solidFill>
-                  <a:srgbClr val="CBD5E1"/>
-                </a:solidFill>
-                <a:highlight>
-                  <a:srgbClr val="0C1729"/>
-                </a:highlight>
-                <a:latin typeface="Courier New" pitchFamily="34" charset="0"/>
-                <a:ea typeface="Courier New" pitchFamily="34" charset="-122"/>
-                <a:cs typeface="Courier New" pitchFamily="34" charset="-120"/>
-              </a:rPr>
-              <a:t> -n</a:t>
-            </a:r>
-            <a:endParaRPr lang="en-US" sz="1950" dirty="0"/>
-          </a:p>
-        </p:txBody>
-      </p:sp>
-      <p:sp>
-        <p:nvSpPr>
-          <p:cNvPr id="10" name="Text 8"/>
-          <p:cNvSpPr/>
-          <p:nvPr/>
-        </p:nvSpPr>
-        <p:spPr>
-          <a:xfrm>
-            <a:off x="9448659" y="3502714"/>
-            <a:ext cx="8162760" cy="374276"/>
-          </a:xfrm>
-          <a:prstGeom prst="rect">
-            <a:avLst/>
-          </a:prstGeom>
-          <a:noFill/>
-          <a:ln/>
-        </p:spPr>
-        <p:txBody>
-          <a:bodyPr wrap="square" lIns="25400" tIns="25400" rIns="25400" bIns="25400" rtlCol="0" anchor="t">
-            <a:normAutofit fontScale="92500" lnSpcReduction="20000"/>
-          </a:bodyPr>
-          <a:lstStyle/>
-          <a:p>
-            <a:pPr marL="0" indent="0" algn="l">
-              <a:lnSpc>
-                <a:spcPct val="150000"/>
-              </a:lnSpc>
-              <a:buNone/>
-            </a:pPr>
-            <a:r>
-              <a:rPr lang="en-US" sz="1800" kern="0" spc="72" dirty="0">
-                <a:solidFill>
-                  <a:srgbClr val="56688A"/>
-                </a:solidFill>
-                <a:latin typeface="Courier New" pitchFamily="34" charset="0"/>
-                <a:ea typeface="Courier New" pitchFamily="34" charset="-122"/>
-                <a:cs typeface="Courier New" pitchFamily="34" charset="-120"/>
-              </a:rPr>
-              <a:t>incoming sflow</a:t>
-            </a:r>
-            <a:endParaRPr lang="en-US" sz="1800" dirty="0"/>
-          </a:p>
-        </p:txBody>
-      </p:sp>
-      <p:sp>
-        <p:nvSpPr>
-          <p:cNvPr id="11" name="Shape 9"/>
-          <p:cNvSpPr/>
-          <p:nvPr/>
-        </p:nvSpPr>
-        <p:spPr>
-          <a:xfrm>
-            <a:off x="9448659" y="3953050"/>
-            <a:ext cx="7925010" cy="1698742"/>
-          </a:xfrm>
-          <a:prstGeom prst="roundRect">
-            <a:avLst>
-              <a:gd name="adj" fmla="val 3364"/>
-            </a:avLst>
-          </a:prstGeom>
-          <a:solidFill>
-            <a:srgbClr val="0C1729"/>
-          </a:solidFill>
-          <a:ln w="11206">
-            <a:solidFill>
-              <a:srgbClr val="1E3354"/>
-            </a:solidFill>
-            <a:prstDash val="solid"/>
-          </a:ln>
-        </p:spPr>
-        <p:txBody>
-          <a:bodyPr/>
-          <a:lstStyle/>
-          <a:p>
-            <a:endParaRPr lang="en-US"/>
-          </a:p>
-        </p:txBody>
-      </p:sp>
-      <p:sp>
-        <p:nvSpPr>
-          <p:cNvPr id="12" name="Text 10"/>
-          <p:cNvSpPr/>
-          <p:nvPr/>
-        </p:nvSpPr>
-        <p:spPr>
-          <a:xfrm>
-            <a:off x="9802765" y="4230956"/>
-            <a:ext cx="7454548" cy="1181030"/>
-          </a:xfrm>
-          <a:prstGeom prst="rect">
-            <a:avLst/>
-          </a:prstGeom>
-          <a:noFill/>
-          <a:ln/>
-        </p:spPr>
-        <p:txBody>
-          <a:bodyPr wrap="square" lIns="25400" tIns="25400" rIns="25400" bIns="25400" rtlCol="0" anchor="t">
-            <a:normAutofit fontScale="92500" lnSpcReduction="20000"/>
-          </a:bodyPr>
-          <a:lstStyle/>
-          <a:p>
-            <a:pPr marL="0" indent="0" algn="l">
-              <a:lnSpc>
-                <a:spcPct val="155000"/>
-              </a:lnSpc>
-              <a:buNone/>
-            </a:pPr>
-            <a:r>
-              <a:rPr lang="en-US" sz="1950" dirty="0">
-                <a:solidFill>
-                  <a:srgbClr val="4ADE80"/>
-                </a:solidFill>
-                <a:latin typeface="Courier New" pitchFamily="34" charset="0"/>
-                <a:ea typeface="Courier New" pitchFamily="34" charset="-122"/>
-                <a:cs typeface="Courier New" pitchFamily="34" charset="-120"/>
-              </a:rPr>
-              <a:t>$ </a:t>
-            </a:r>
-            <a:r>
-              <a:rPr lang="en-US" sz="1950" dirty="0">
-                <a:solidFill>
-                  <a:srgbClr val="CBD5E1"/>
-                </a:solidFill>
-                <a:highlight>
-                  <a:srgbClr val="0C1729"/>
-                </a:highlight>
-                <a:latin typeface="Courier New" pitchFamily="34" charset="0"/>
-                <a:ea typeface="Courier New" pitchFamily="34" charset="-122"/>
-                <a:cs typeface="Courier New" pitchFamily="34" charset="-120"/>
-              </a:rPr>
-              <a:t> sudo tcpdump -i any \</a:t>
-            </a:r>
-            <a:endParaRPr lang="en-US" sz="1950" dirty="0"/>
-          </a:p>
-          <a:p>
-            <a:pPr marL="0" indent="0" algn="l">
-              <a:lnSpc>
-                <a:spcPct val="155000"/>
-              </a:lnSpc>
-              <a:buNone/>
-            </a:pPr>
-            <a:r>
-              <a:rPr lang="en-US" sz="1950" dirty="0">
-                <a:solidFill>
-                  <a:srgbClr val="CBD5E1"/>
-                </a:solidFill>
-                <a:highlight>
-                  <a:srgbClr val="0C1729"/>
-                </a:highlight>
-                <a:latin typeface="Courier New" pitchFamily="34" charset="0"/>
-                <a:ea typeface="Courier New" pitchFamily="34" charset="-122"/>
-                <a:cs typeface="Courier New" pitchFamily="34" charset="-120"/>
-              </a:rPr>
-              <a:t>    udp port  </a:t>
-            </a:r>
-            <a:endParaRPr lang="en-US" sz="1950" dirty="0"/>
-          </a:p>
-          <a:p>
-            <a:pPr marL="0" indent="0" algn="l">
-              <a:lnSpc>
-                <a:spcPct val="155000"/>
-              </a:lnSpc>
-              <a:buNone/>
-            </a:pPr>
-            <a:r>
-              <a:rPr lang="en-US" sz="1950" dirty="0">
-                <a:solidFill>
-                  <a:srgbClr val="FDBA74"/>
-                </a:solidFill>
-                <a:latin typeface="Courier New" pitchFamily="34" charset="0"/>
-                <a:ea typeface="Courier New" pitchFamily="34" charset="-122"/>
-                <a:cs typeface="Courier New" pitchFamily="34" charset="-120"/>
-              </a:rPr>
-              <a:t>6343</a:t>
-            </a:r>
-            <a:r>
-              <a:rPr lang="en-US" sz="1950" dirty="0">
-                <a:solidFill>
-                  <a:srgbClr val="CBD5E1"/>
-                </a:solidFill>
-                <a:highlight>
-                  <a:srgbClr val="0C1729"/>
-                </a:highlight>
-                <a:latin typeface="Courier New" pitchFamily="34" charset="0"/>
-                <a:ea typeface="Courier New" pitchFamily="34" charset="-122"/>
-                <a:cs typeface="Courier New" pitchFamily="34" charset="-120"/>
-              </a:rPr>
-              <a:t> -n</a:t>
-            </a:r>
-            <a:endParaRPr lang="en-US" sz="1950" dirty="0"/>
-          </a:p>
-        </p:txBody>
-      </p:sp>
-      <p:sp>
-        <p:nvSpPr>
-          <p:cNvPr id="13" name="Shape 11"/>
-          <p:cNvSpPr/>
-          <p:nvPr/>
-        </p:nvSpPr>
-        <p:spPr>
-          <a:xfrm>
-            <a:off x="914330" y="8088896"/>
-            <a:ext cx="28015" cy="1283949"/>
-          </a:xfrm>
-          <a:prstGeom prst="rect">
-            <a:avLst/>
-          </a:prstGeom>
-          <a:solidFill>
-            <a:srgbClr val="4ADE80"/>
-          </a:solidFill>
-          <a:ln/>
-        </p:spPr>
-        <p:txBody>
-          <a:bodyPr/>
-          <a:lstStyle/>
-          <a:p>
-            <a:endParaRPr lang="en-US"/>
-          </a:p>
-        </p:txBody>
-      </p:sp>
-      <p:sp>
-        <p:nvSpPr>
-          <p:cNvPr id="14" name="Text 12"/>
-          <p:cNvSpPr/>
-          <p:nvPr/>
-        </p:nvSpPr>
-        <p:spPr>
-          <a:xfrm>
-            <a:off x="1209010" y="8126891"/>
-            <a:ext cx="16649600" cy="363071"/>
-          </a:xfrm>
-          <a:prstGeom prst="rect">
-            <a:avLst/>
-          </a:prstGeom>
-          <a:noFill/>
-          <a:ln/>
-        </p:spPr>
-        <p:txBody>
-          <a:bodyPr wrap="square" lIns="25400" tIns="25400" rIns="25400" bIns="25400" rtlCol="0" anchor="t">
-            <a:normAutofit fontScale="92500" lnSpcReduction="20000"/>
-          </a:bodyPr>
-          <a:lstStyle/>
-          <a:p>
-            <a:pPr marL="0" indent="0" algn="l">
-              <a:lnSpc>
-                <a:spcPct val="145000"/>
-              </a:lnSpc>
-              <a:buNone/>
-            </a:pPr>
-            <a:r>
-              <a:rPr lang="en-US" sz="1800" kern="0" spc="216" dirty="0">
-                <a:solidFill>
-                  <a:srgbClr val="4ADE80"/>
-                </a:solidFill>
-                <a:latin typeface="Courier New" pitchFamily="34" charset="0"/>
-                <a:ea typeface="Courier New" pitchFamily="34" charset="-122"/>
-                <a:cs typeface="Courier New" pitchFamily="34" charset="-120"/>
-              </a:rPr>
-              <a:t>INTERPRETING RESULTS</a:t>
-            </a:r>
-            <a:endParaRPr lang="en-US" sz="1800" dirty="0"/>
-          </a:p>
-        </p:txBody>
-      </p:sp>
-      <p:sp>
-        <p:nvSpPr>
-          <p:cNvPr id="15" name="Text 13"/>
-          <p:cNvSpPr/>
-          <p:nvPr/>
-        </p:nvSpPr>
-        <p:spPr>
-          <a:xfrm>
-            <a:off x="1209010" y="8572849"/>
-            <a:ext cx="15925462" cy="755277"/>
-          </a:xfrm>
-          <a:prstGeom prst="rect">
-            <a:avLst/>
-          </a:prstGeom>
-          <a:noFill/>
-          <a:ln/>
-        </p:spPr>
-        <p:txBody>
-          <a:bodyPr wrap="square" lIns="0" tIns="0" rIns="0" bIns="0" rtlCol="0" anchor="t">
-            <a:normAutofit fontScale="85000" lnSpcReduction="10000"/>
-          </a:bodyPr>
-          <a:lstStyle/>
-          <a:p>
-            <a:pPr marL="0" indent="0" algn="l">
-              <a:lnSpc>
-                <a:spcPct val="145000"/>
-              </a:lnSpc>
-              <a:buNone/>
-            </a:pPr>
-            <a:r>
-              <a:rPr lang="en-US" sz="2250" dirty="0">
-                <a:solidFill>
-                  <a:srgbClr val="CBD5E1"/>
-                </a:solidFill>
-                <a:latin typeface="Arial" pitchFamily="34" charset="0"/>
-                <a:ea typeface="Arial" pitchFamily="34" charset="-122"/>
-                <a:cs typeface="Arial" pitchFamily="34" charset="-120"/>
-              </a:rPr>
-              <a:t>Packets here but nothing in Akvorado → problem is inside the container stack. No packets → the device isn't sending, or a firewall is in the way.</a:t>
-            </a:r>
-            <a:endParaRPr lang="en-US" sz="2250" dirty="0"/>
-          </a:p>
-        </p:txBody>
-      </p:sp>
-      <p:sp>
-        <p:nvSpPr>
-          <p:cNvPr id="16" name="Text 14"/>
-          <p:cNvSpPr/>
-          <p:nvPr/>
-        </p:nvSpPr>
-        <p:spPr>
-          <a:xfrm>
-            <a:off x="914330" y="9619199"/>
-            <a:ext cx="3767941" cy="363071"/>
-          </a:xfrm>
-          <a:prstGeom prst="rect">
-            <a:avLst/>
-          </a:prstGeom>
-          <a:noFill/>
-          <a:ln/>
-        </p:spPr>
-        <p:txBody>
-          <a:bodyPr wrap="square" lIns="25400" tIns="25400" rIns="25400" bIns="25400" rtlCol="0" anchor="t">
-            <a:normAutofit fontScale="92500" lnSpcReduction="20000"/>
-          </a:bodyPr>
-          <a:lstStyle/>
-          <a:p>
-            <a:pPr marL="0" indent="0" algn="l">
-              <a:lnSpc>
-                <a:spcPct val="145000"/>
-              </a:lnSpc>
-              <a:buNone/>
-            </a:pPr>
-            <a:r>
-              <a:rPr lang="en-US" sz="1800" kern="0" spc="72" dirty="0">
-                <a:solidFill>
-                  <a:srgbClr val="56688A"/>
-                </a:solidFill>
-                <a:latin typeface="Courier New" pitchFamily="34" charset="0"/>
-                <a:ea typeface="Courier New" pitchFamily="34" charset="-122"/>
-                <a:cs typeface="Courier New" pitchFamily="34" charset="-120"/>
-              </a:rPr>
-              <a:t>akvorado-lab · don jolley</a:t>
-            </a:r>
-            <a:endParaRPr lang="en-US" sz="1800" dirty="0"/>
-          </a:p>
-        </p:txBody>
-      </p:sp>
-      <p:sp>
-        <p:nvSpPr>
-          <p:cNvPr id="17" name="Text 15"/>
-          <p:cNvSpPr/>
-          <p:nvPr/>
-        </p:nvSpPr>
-        <p:spPr>
-          <a:xfrm>
-            <a:off x="15764049" y="9619199"/>
-            <a:ext cx="1685820" cy="363071"/>
-          </a:xfrm>
-          <a:prstGeom prst="rect">
-            <a:avLst/>
-          </a:prstGeom>
-          <a:noFill/>
-          <a:ln/>
-        </p:spPr>
-        <p:txBody>
-          <a:bodyPr wrap="square" lIns="25400" tIns="25400" rIns="25400" bIns="25400" rtlCol="0" anchor="t">
-            <a:normAutofit fontScale="92500" lnSpcReduction="20000"/>
-          </a:bodyPr>
-          <a:lstStyle/>
-          <a:p>
-            <a:pPr marL="0" indent="0" algn="l">
-              <a:lnSpc>
-                <a:spcPct val="145000"/>
-              </a:lnSpc>
-              <a:buNone/>
-            </a:pPr>
-            <a:r>
-              <a:rPr lang="en-US" sz="1800" kern="0" spc="72" dirty="0">
-                <a:solidFill>
-                  <a:srgbClr val="56688A"/>
-                </a:solidFill>
-                <a:latin typeface="Courier New" pitchFamily="34" charset="0"/>
-                <a:ea typeface="Courier New" pitchFamily="34" charset="-122"/>
-                <a:cs typeface="Courier New" pitchFamily="34" charset="-120"/>
-              </a:rPr>
-              <a:t>slide 42</a:t>
             </a:r>
             <a:endParaRPr lang="en-US" sz="1800" dirty="0"/>
           </a:p>
@@ -32090,6 +32289,848 @@
 
 <file path=ppt/slides/slide40.xml><?xml version="1.0" encoding="utf-8"?>
 <p:sld xmlns:a="http://schemas.openxmlformats.org/drawingml/2006/main" xmlns:r="http://schemas.openxmlformats.org/officeDocument/2006/relationships" xmlns:p="http://schemas.openxmlformats.org/presentationml/2006/main">
+  <p:cSld name="Slide 42">
+    <p:bg>
+      <p:bgPr>
+        <a:solidFill>
+          <a:srgbClr val="08111F"/>
+        </a:solidFill>
+        <a:effectLst/>
+      </p:bgPr>
+    </p:bg>
+    <p:spTree>
+      <p:nvGrpSpPr>
+        <p:cNvPr id="1" name=""/>
+        <p:cNvGrpSpPr/>
+        <p:nvPr/>
+      </p:nvGrpSpPr>
+      <p:grpSpPr>
+        <a:xfrm>
+          <a:off x="0" y="0"/>
+          <a:ext cx="0" cy="0"/>
+          <a:chOff x="0" y="0"/>
+          <a:chExt cx="0" cy="0"/>
+        </a:xfrm>
+      </p:grpSpPr>
+      <p:sp>
+        <p:nvSpPr>
+          <p:cNvPr id="2" name="Text 0"/>
+          <p:cNvSpPr/>
+          <p:nvPr/>
+        </p:nvSpPr>
+        <p:spPr>
+          <a:xfrm>
+            <a:off x="914330" y="342830"/>
+            <a:ext cx="1978574" cy="363071"/>
+          </a:xfrm>
+          <a:prstGeom prst="rect">
+            <a:avLst/>
+          </a:prstGeom>
+          <a:noFill/>
+          <a:ln/>
+        </p:spPr>
+        <p:txBody>
+          <a:bodyPr wrap="square" lIns="25400" tIns="25400" rIns="25400" bIns="25400" rtlCol="0" anchor="t">
+            <a:normAutofit fontScale="92500" lnSpcReduction="20000"/>
+          </a:bodyPr>
+          <a:lstStyle/>
+          <a:p>
+            <a:pPr marL="0" indent="0" algn="l">
+              <a:lnSpc>
+                <a:spcPct val="145000"/>
+              </a:lnSpc>
+              <a:buNone/>
+            </a:pPr>
+            <a:r>
+              <a:rPr lang="en-US" sz="1800" kern="0" spc="72" dirty="0">
+                <a:solidFill>
+                  <a:srgbClr val="4ADE80"/>
+                </a:solidFill>
+                <a:latin typeface="Courier New" pitchFamily="34" charset="0"/>
+                <a:ea typeface="Courier New" pitchFamily="34" charset="-122"/>
+                <a:cs typeface="Courier New" pitchFamily="34" charset="-120"/>
+              </a:rPr>
+              <a:t>§ 05 verify</a:t>
+            </a:r>
+            <a:endParaRPr lang="en-US" sz="1800" dirty="0"/>
+          </a:p>
+        </p:txBody>
+      </p:sp>
+      <p:sp>
+        <p:nvSpPr>
+          <p:cNvPr id="3" name="Text 1"/>
+          <p:cNvSpPr/>
+          <p:nvPr/>
+        </p:nvSpPr>
+        <p:spPr>
+          <a:xfrm>
+            <a:off x="15910251" y="342830"/>
+            <a:ext cx="1539618" cy="363071"/>
+          </a:xfrm>
+          <a:prstGeom prst="rect">
+            <a:avLst/>
+          </a:prstGeom>
+          <a:noFill/>
+          <a:ln/>
+        </p:spPr>
+        <p:txBody>
+          <a:bodyPr wrap="square" lIns="25400" tIns="25400" rIns="25400" bIns="25400" rtlCol="0" anchor="t">
+            <a:normAutofit fontScale="92500" lnSpcReduction="20000"/>
+          </a:bodyPr>
+          <a:lstStyle/>
+          <a:p>
+            <a:pPr marL="0" indent="0" algn="l">
+              <a:lnSpc>
+                <a:spcPct val="145000"/>
+              </a:lnSpc>
+              <a:buNone/>
+            </a:pPr>
+            <a:r>
+              <a:rPr lang="en-US" sz="1800" kern="0" spc="72" dirty="0">
+                <a:solidFill>
+                  <a:srgbClr val="56688A"/>
+                </a:solidFill>
+                <a:latin typeface="Courier New" pitchFamily="34" charset="0"/>
+                <a:ea typeface="Courier New" pitchFamily="34" charset="-122"/>
+                <a:cs typeface="Courier New" pitchFamily="34" charset="-120"/>
+              </a:rPr>
+              <a:t>wire check</a:t>
+            </a:r>
+            <a:endParaRPr lang="en-US" sz="1800" dirty="0"/>
+          </a:p>
+        </p:txBody>
+      </p:sp>
+      <p:sp>
+        <p:nvSpPr>
+          <p:cNvPr id="4" name="Text 2"/>
+          <p:cNvSpPr/>
+          <p:nvPr/>
+        </p:nvSpPr>
+        <p:spPr>
+          <a:xfrm>
+            <a:off x="914330" y="838165"/>
+            <a:ext cx="16953120" cy="374276"/>
+          </a:xfrm>
+          <a:prstGeom prst="rect">
+            <a:avLst/>
+          </a:prstGeom>
+          <a:noFill/>
+          <a:ln/>
+        </p:spPr>
+        <p:txBody>
+          <a:bodyPr wrap="square" lIns="25400" tIns="25400" rIns="25400" bIns="25400" rtlCol="0" anchor="t">
+            <a:normAutofit fontScale="92500" lnSpcReduction="20000"/>
+          </a:bodyPr>
+          <a:lstStyle/>
+          <a:p>
+            <a:pPr marL="0" indent="0" algn="l">
+              <a:lnSpc>
+                <a:spcPct val="150000"/>
+              </a:lnSpc>
+              <a:buNone/>
+            </a:pPr>
+            <a:r>
+              <a:rPr lang="en-US" sz="1800" kern="0" spc="324" dirty="0">
+                <a:solidFill>
+                  <a:srgbClr val="4ADE80"/>
+                </a:solidFill>
+                <a:latin typeface="Courier New" pitchFamily="34" charset="0"/>
+                <a:ea typeface="Courier New" pitchFamily="34" charset="-122"/>
+                <a:cs typeface="Courier New" pitchFamily="34" charset="-120"/>
+              </a:rPr>
+              <a:t>WHEN IN DOUBT, DROP TO THE WIRE</a:t>
+            </a:r>
+            <a:endParaRPr lang="en-US" sz="1800" dirty="0"/>
+          </a:p>
+        </p:txBody>
+      </p:sp>
+      <p:sp>
+        <p:nvSpPr>
+          <p:cNvPr id="5" name="Text 3"/>
+          <p:cNvSpPr/>
+          <p:nvPr/>
+        </p:nvSpPr>
+        <p:spPr>
+          <a:xfrm>
+            <a:off x="914330" y="1441006"/>
+            <a:ext cx="14716124" cy="676835"/>
+          </a:xfrm>
+          <a:prstGeom prst="rect">
+            <a:avLst/>
+          </a:prstGeom>
+          <a:noFill/>
+          <a:ln/>
+        </p:spPr>
+        <p:txBody>
+          <a:bodyPr wrap="square" lIns="25400" tIns="25400" rIns="25400" bIns="25400" rtlCol="0" anchor="t">
+            <a:normAutofit fontScale="92500" lnSpcReduction="20000"/>
+          </a:bodyPr>
+          <a:lstStyle/>
+          <a:p>
+            <a:pPr marL="0" indent="0" algn="l">
+              <a:lnSpc>
+                <a:spcPct val="105000"/>
+              </a:lnSpc>
+              <a:buNone/>
+            </a:pPr>
+            <a:r>
+              <a:rPr lang="en-US" sz="4800" b="1" kern="0" spc="-72" dirty="0">
+                <a:solidFill>
+                  <a:srgbClr val="E6EDF3"/>
+                </a:solidFill>
+                <a:latin typeface="Arial" pitchFamily="34" charset="0"/>
+                <a:ea typeface="Arial" pitchFamily="34" charset="-122"/>
+                <a:cs typeface="Arial" pitchFamily="34" charset="-120"/>
+              </a:rPr>
+              <a:t>tcpdump on the VM, not in the container.</a:t>
+            </a:r>
+            <a:endParaRPr lang="en-US" sz="4800" dirty="0"/>
+          </a:p>
+        </p:txBody>
+      </p:sp>
+      <p:sp>
+        <p:nvSpPr>
+          <p:cNvPr id="6" name="Text 4"/>
+          <p:cNvSpPr/>
+          <p:nvPr/>
+        </p:nvSpPr>
+        <p:spPr>
+          <a:xfrm>
+            <a:off x="914330" y="2536906"/>
+            <a:ext cx="14716124" cy="508747"/>
+          </a:xfrm>
+          <a:prstGeom prst="rect">
+            <a:avLst/>
+          </a:prstGeom>
+          <a:noFill/>
+          <a:ln/>
+        </p:spPr>
+        <p:txBody>
+          <a:bodyPr wrap="square" lIns="25400" tIns="25400" rIns="25400" bIns="25400" rtlCol="0" anchor="t">
+            <a:normAutofit fontScale="92500" lnSpcReduction="10000"/>
+          </a:bodyPr>
+          <a:lstStyle/>
+          <a:p>
+            <a:pPr marL="0" indent="0" algn="l">
+              <a:lnSpc>
+                <a:spcPct val="140000"/>
+              </a:lnSpc>
+              <a:buNone/>
+            </a:pPr>
+            <a:r>
+              <a:rPr lang="en-US" sz="2700" dirty="0">
+                <a:solidFill>
+                  <a:srgbClr val="CBD5E1"/>
+                </a:solidFill>
+                <a:latin typeface="Arial" pitchFamily="34" charset="0"/>
+                <a:ea typeface="Arial" pitchFamily="34" charset="-122"/>
+                <a:cs typeface="Arial" pitchFamily="34" charset="-120"/>
+              </a:rPr>
+              <a:t>If the inlet logs are silent, prove flows are even reaching the VM before blaming the stack.</a:t>
+            </a:r>
+            <a:endParaRPr lang="en-US" sz="2700" dirty="0"/>
+          </a:p>
+        </p:txBody>
+      </p:sp>
+      <p:sp>
+        <p:nvSpPr>
+          <p:cNvPr id="7" name="Text 5"/>
+          <p:cNvSpPr/>
+          <p:nvPr/>
+        </p:nvSpPr>
+        <p:spPr>
+          <a:xfrm>
+            <a:off x="914330" y="3502714"/>
+            <a:ext cx="8162579" cy="374276"/>
+          </a:xfrm>
+          <a:prstGeom prst="rect">
+            <a:avLst/>
+          </a:prstGeom>
+          <a:noFill/>
+          <a:ln/>
+        </p:spPr>
+        <p:txBody>
+          <a:bodyPr wrap="square" lIns="25400" tIns="25400" rIns="25400" bIns="25400" rtlCol="0" anchor="t">
+            <a:normAutofit fontScale="92500" lnSpcReduction="20000"/>
+          </a:bodyPr>
+          <a:lstStyle/>
+          <a:p>
+            <a:pPr marL="0" indent="0" algn="l">
+              <a:lnSpc>
+                <a:spcPct val="150000"/>
+              </a:lnSpc>
+              <a:buNone/>
+            </a:pPr>
+            <a:r>
+              <a:rPr lang="en-US" sz="1800" kern="0" spc="72" dirty="0">
+                <a:solidFill>
+                  <a:srgbClr val="56688A"/>
+                </a:solidFill>
+                <a:latin typeface="Courier New" pitchFamily="34" charset="0"/>
+                <a:ea typeface="Courier New" pitchFamily="34" charset="-122"/>
+                <a:cs typeface="Courier New" pitchFamily="34" charset="-120"/>
+              </a:rPr>
+              <a:t>incoming netflow</a:t>
+            </a:r>
+            <a:endParaRPr lang="en-US" sz="1800" dirty="0"/>
+          </a:p>
+        </p:txBody>
+      </p:sp>
+      <p:sp>
+        <p:nvSpPr>
+          <p:cNvPr id="8" name="Shape 6"/>
+          <p:cNvSpPr/>
+          <p:nvPr/>
+        </p:nvSpPr>
+        <p:spPr>
+          <a:xfrm>
+            <a:off x="914330" y="3953050"/>
+            <a:ext cx="7924834" cy="1698742"/>
+          </a:xfrm>
+          <a:prstGeom prst="roundRect">
+            <a:avLst>
+              <a:gd name="adj" fmla="val 3364"/>
+            </a:avLst>
+          </a:prstGeom>
+          <a:solidFill>
+            <a:srgbClr val="0C1729"/>
+          </a:solidFill>
+          <a:ln w="11206">
+            <a:solidFill>
+              <a:srgbClr val="1E3354"/>
+            </a:solidFill>
+            <a:prstDash val="solid"/>
+          </a:ln>
+        </p:spPr>
+        <p:txBody>
+          <a:bodyPr/>
+          <a:lstStyle/>
+          <a:p>
+            <a:endParaRPr lang="en-US"/>
+          </a:p>
+        </p:txBody>
+      </p:sp>
+      <p:sp>
+        <p:nvSpPr>
+          <p:cNvPr id="9" name="Text 7"/>
+          <p:cNvSpPr/>
+          <p:nvPr/>
+        </p:nvSpPr>
+        <p:spPr>
+          <a:xfrm>
+            <a:off x="1268436" y="4230956"/>
+            <a:ext cx="7454368" cy="1181030"/>
+          </a:xfrm>
+          <a:prstGeom prst="rect">
+            <a:avLst/>
+          </a:prstGeom>
+          <a:noFill/>
+          <a:ln/>
+        </p:spPr>
+        <p:txBody>
+          <a:bodyPr wrap="square" lIns="25400" tIns="25400" rIns="25400" bIns="25400" rtlCol="0" anchor="t">
+            <a:normAutofit fontScale="92500" lnSpcReduction="20000"/>
+          </a:bodyPr>
+          <a:lstStyle/>
+          <a:p>
+            <a:pPr marL="0" indent="0" algn="l">
+              <a:lnSpc>
+                <a:spcPct val="155000"/>
+              </a:lnSpc>
+              <a:buNone/>
+            </a:pPr>
+            <a:r>
+              <a:rPr lang="en-US" sz="1950" dirty="0">
+                <a:solidFill>
+                  <a:srgbClr val="4ADE80"/>
+                </a:solidFill>
+                <a:latin typeface="Courier New" pitchFamily="34" charset="0"/>
+                <a:ea typeface="Courier New" pitchFamily="34" charset="-122"/>
+                <a:cs typeface="Courier New" pitchFamily="34" charset="-120"/>
+              </a:rPr>
+              <a:t>$ </a:t>
+            </a:r>
+            <a:r>
+              <a:rPr lang="en-US" sz="1950" dirty="0">
+                <a:solidFill>
+                  <a:srgbClr val="CBD5E1"/>
+                </a:solidFill>
+                <a:highlight>
+                  <a:srgbClr val="0C1729"/>
+                </a:highlight>
+                <a:latin typeface="Courier New" pitchFamily="34" charset="0"/>
+                <a:ea typeface="Courier New" pitchFamily="34" charset="-122"/>
+                <a:cs typeface="Courier New" pitchFamily="34" charset="-120"/>
+              </a:rPr>
+              <a:t> sudo tcpdump -i any \</a:t>
+            </a:r>
+            <a:endParaRPr lang="en-US" sz="1950" dirty="0"/>
+          </a:p>
+          <a:p>
+            <a:pPr marL="0" indent="0" algn="l">
+              <a:lnSpc>
+                <a:spcPct val="155000"/>
+              </a:lnSpc>
+              <a:buNone/>
+            </a:pPr>
+            <a:r>
+              <a:rPr lang="en-US" sz="1950" dirty="0">
+                <a:solidFill>
+                  <a:srgbClr val="CBD5E1"/>
+                </a:solidFill>
+                <a:highlight>
+                  <a:srgbClr val="0C1729"/>
+                </a:highlight>
+                <a:latin typeface="Courier New" pitchFamily="34" charset="0"/>
+                <a:ea typeface="Courier New" pitchFamily="34" charset="-122"/>
+                <a:cs typeface="Courier New" pitchFamily="34" charset="-120"/>
+              </a:rPr>
+              <a:t>    udp port  </a:t>
+            </a:r>
+            <a:endParaRPr lang="en-US" sz="1950" dirty="0"/>
+          </a:p>
+          <a:p>
+            <a:pPr marL="0" indent="0" algn="l">
+              <a:lnSpc>
+                <a:spcPct val="155000"/>
+              </a:lnSpc>
+              <a:buNone/>
+            </a:pPr>
+            <a:r>
+              <a:rPr lang="en-US" sz="1950" dirty="0">
+                <a:solidFill>
+                  <a:srgbClr val="FDBA74"/>
+                </a:solidFill>
+                <a:latin typeface="Courier New" pitchFamily="34" charset="0"/>
+                <a:ea typeface="Courier New" pitchFamily="34" charset="-122"/>
+                <a:cs typeface="Courier New" pitchFamily="34" charset="-120"/>
+              </a:rPr>
+              <a:t>2055</a:t>
+            </a:r>
+            <a:r>
+              <a:rPr lang="en-US" sz="1950" dirty="0">
+                <a:solidFill>
+                  <a:srgbClr val="CBD5E1"/>
+                </a:solidFill>
+                <a:highlight>
+                  <a:srgbClr val="0C1729"/>
+                </a:highlight>
+                <a:latin typeface="Courier New" pitchFamily="34" charset="0"/>
+                <a:ea typeface="Courier New" pitchFamily="34" charset="-122"/>
+                <a:cs typeface="Courier New" pitchFamily="34" charset="-120"/>
+              </a:rPr>
+              <a:t> -n</a:t>
+            </a:r>
+            <a:endParaRPr lang="en-US" sz="1950" dirty="0"/>
+          </a:p>
+        </p:txBody>
+      </p:sp>
+      <p:sp>
+        <p:nvSpPr>
+          <p:cNvPr id="10" name="Text 8"/>
+          <p:cNvSpPr/>
+          <p:nvPr/>
+        </p:nvSpPr>
+        <p:spPr>
+          <a:xfrm>
+            <a:off x="9448659" y="3502714"/>
+            <a:ext cx="8162760" cy="374276"/>
+          </a:xfrm>
+          <a:prstGeom prst="rect">
+            <a:avLst/>
+          </a:prstGeom>
+          <a:noFill/>
+          <a:ln/>
+        </p:spPr>
+        <p:txBody>
+          <a:bodyPr wrap="square" lIns="25400" tIns="25400" rIns="25400" bIns="25400" rtlCol="0" anchor="t">
+            <a:normAutofit fontScale="92500" lnSpcReduction="20000"/>
+          </a:bodyPr>
+          <a:lstStyle/>
+          <a:p>
+            <a:pPr marL="0" indent="0" algn="l">
+              <a:lnSpc>
+                <a:spcPct val="150000"/>
+              </a:lnSpc>
+              <a:buNone/>
+            </a:pPr>
+            <a:r>
+              <a:rPr lang="en-US" sz="1800" kern="0" spc="72" dirty="0">
+                <a:solidFill>
+                  <a:srgbClr val="56688A"/>
+                </a:solidFill>
+                <a:latin typeface="Courier New" pitchFamily="34" charset="0"/>
+                <a:ea typeface="Courier New" pitchFamily="34" charset="-122"/>
+                <a:cs typeface="Courier New" pitchFamily="34" charset="-120"/>
+              </a:rPr>
+              <a:t>incoming sflow</a:t>
+            </a:r>
+            <a:endParaRPr lang="en-US" sz="1800" dirty="0"/>
+          </a:p>
+        </p:txBody>
+      </p:sp>
+      <p:sp>
+        <p:nvSpPr>
+          <p:cNvPr id="11" name="Shape 9"/>
+          <p:cNvSpPr/>
+          <p:nvPr/>
+        </p:nvSpPr>
+        <p:spPr>
+          <a:xfrm>
+            <a:off x="9448659" y="3953050"/>
+            <a:ext cx="7925010" cy="1698742"/>
+          </a:xfrm>
+          <a:prstGeom prst="roundRect">
+            <a:avLst>
+              <a:gd name="adj" fmla="val 3364"/>
+            </a:avLst>
+          </a:prstGeom>
+          <a:solidFill>
+            <a:srgbClr val="0C1729"/>
+          </a:solidFill>
+          <a:ln w="11206">
+            <a:solidFill>
+              <a:srgbClr val="1E3354"/>
+            </a:solidFill>
+            <a:prstDash val="solid"/>
+          </a:ln>
+        </p:spPr>
+        <p:txBody>
+          <a:bodyPr/>
+          <a:lstStyle/>
+          <a:p>
+            <a:endParaRPr lang="en-US"/>
+          </a:p>
+        </p:txBody>
+      </p:sp>
+      <p:sp>
+        <p:nvSpPr>
+          <p:cNvPr id="12" name="Text 10"/>
+          <p:cNvSpPr/>
+          <p:nvPr/>
+        </p:nvSpPr>
+        <p:spPr>
+          <a:xfrm>
+            <a:off x="9802765" y="4230956"/>
+            <a:ext cx="7454548" cy="1181030"/>
+          </a:xfrm>
+          <a:prstGeom prst="rect">
+            <a:avLst/>
+          </a:prstGeom>
+          <a:noFill/>
+          <a:ln/>
+        </p:spPr>
+        <p:txBody>
+          <a:bodyPr wrap="square" lIns="25400" tIns="25400" rIns="25400" bIns="25400" rtlCol="0" anchor="t">
+            <a:normAutofit fontScale="92500" lnSpcReduction="20000"/>
+          </a:bodyPr>
+          <a:lstStyle/>
+          <a:p>
+            <a:pPr marL="0" indent="0" algn="l">
+              <a:lnSpc>
+                <a:spcPct val="155000"/>
+              </a:lnSpc>
+              <a:buNone/>
+            </a:pPr>
+            <a:r>
+              <a:rPr lang="en-US" sz="1950" dirty="0">
+                <a:solidFill>
+                  <a:srgbClr val="4ADE80"/>
+                </a:solidFill>
+                <a:latin typeface="Courier New" pitchFamily="34" charset="0"/>
+                <a:ea typeface="Courier New" pitchFamily="34" charset="-122"/>
+                <a:cs typeface="Courier New" pitchFamily="34" charset="-120"/>
+              </a:rPr>
+              <a:t>$ </a:t>
+            </a:r>
+            <a:r>
+              <a:rPr lang="en-US" sz="1950" dirty="0">
+                <a:solidFill>
+                  <a:srgbClr val="CBD5E1"/>
+                </a:solidFill>
+                <a:highlight>
+                  <a:srgbClr val="0C1729"/>
+                </a:highlight>
+                <a:latin typeface="Courier New" pitchFamily="34" charset="0"/>
+                <a:ea typeface="Courier New" pitchFamily="34" charset="-122"/>
+                <a:cs typeface="Courier New" pitchFamily="34" charset="-120"/>
+              </a:rPr>
+              <a:t> sudo tcpdump -i any \</a:t>
+            </a:r>
+            <a:endParaRPr lang="en-US" sz="1950" dirty="0"/>
+          </a:p>
+          <a:p>
+            <a:pPr marL="0" indent="0" algn="l">
+              <a:lnSpc>
+                <a:spcPct val="155000"/>
+              </a:lnSpc>
+              <a:buNone/>
+            </a:pPr>
+            <a:r>
+              <a:rPr lang="en-US" sz="1950" dirty="0">
+                <a:solidFill>
+                  <a:srgbClr val="CBD5E1"/>
+                </a:solidFill>
+                <a:highlight>
+                  <a:srgbClr val="0C1729"/>
+                </a:highlight>
+                <a:latin typeface="Courier New" pitchFamily="34" charset="0"/>
+                <a:ea typeface="Courier New" pitchFamily="34" charset="-122"/>
+                <a:cs typeface="Courier New" pitchFamily="34" charset="-120"/>
+              </a:rPr>
+              <a:t>    udp port  </a:t>
+            </a:r>
+            <a:endParaRPr lang="en-US" sz="1950" dirty="0"/>
+          </a:p>
+          <a:p>
+            <a:pPr marL="0" indent="0" algn="l">
+              <a:lnSpc>
+                <a:spcPct val="155000"/>
+              </a:lnSpc>
+              <a:buNone/>
+            </a:pPr>
+            <a:r>
+              <a:rPr lang="en-US" sz="1950" dirty="0">
+                <a:solidFill>
+                  <a:srgbClr val="FDBA74"/>
+                </a:solidFill>
+                <a:latin typeface="Courier New" pitchFamily="34" charset="0"/>
+                <a:ea typeface="Courier New" pitchFamily="34" charset="-122"/>
+                <a:cs typeface="Courier New" pitchFamily="34" charset="-120"/>
+              </a:rPr>
+              <a:t>6343</a:t>
+            </a:r>
+            <a:r>
+              <a:rPr lang="en-US" sz="1950" dirty="0">
+                <a:solidFill>
+                  <a:srgbClr val="CBD5E1"/>
+                </a:solidFill>
+                <a:highlight>
+                  <a:srgbClr val="0C1729"/>
+                </a:highlight>
+                <a:latin typeface="Courier New" pitchFamily="34" charset="0"/>
+                <a:ea typeface="Courier New" pitchFamily="34" charset="-122"/>
+                <a:cs typeface="Courier New" pitchFamily="34" charset="-120"/>
+              </a:rPr>
+              <a:t> -n</a:t>
+            </a:r>
+            <a:endParaRPr lang="en-US" sz="1950" dirty="0"/>
+          </a:p>
+        </p:txBody>
+      </p:sp>
+      <p:sp>
+        <p:nvSpPr>
+          <p:cNvPr id="13" name="Shape 11"/>
+          <p:cNvSpPr/>
+          <p:nvPr/>
+        </p:nvSpPr>
+        <p:spPr>
+          <a:xfrm>
+            <a:off x="914330" y="8088896"/>
+            <a:ext cx="28015" cy="1283949"/>
+          </a:xfrm>
+          <a:prstGeom prst="rect">
+            <a:avLst/>
+          </a:prstGeom>
+          <a:solidFill>
+            <a:srgbClr val="4ADE80"/>
+          </a:solidFill>
+          <a:ln/>
+        </p:spPr>
+        <p:txBody>
+          <a:bodyPr/>
+          <a:lstStyle/>
+          <a:p>
+            <a:endParaRPr lang="en-US"/>
+          </a:p>
+        </p:txBody>
+      </p:sp>
+      <p:sp>
+        <p:nvSpPr>
+          <p:cNvPr id="14" name="Text 12"/>
+          <p:cNvSpPr/>
+          <p:nvPr/>
+        </p:nvSpPr>
+        <p:spPr>
+          <a:xfrm>
+            <a:off x="1209010" y="8126891"/>
+            <a:ext cx="16649600" cy="363071"/>
+          </a:xfrm>
+          <a:prstGeom prst="rect">
+            <a:avLst/>
+          </a:prstGeom>
+          <a:noFill/>
+          <a:ln/>
+        </p:spPr>
+        <p:txBody>
+          <a:bodyPr wrap="square" lIns="25400" tIns="25400" rIns="25400" bIns="25400" rtlCol="0" anchor="t">
+            <a:normAutofit fontScale="92500" lnSpcReduction="20000"/>
+          </a:bodyPr>
+          <a:lstStyle/>
+          <a:p>
+            <a:pPr marL="0" indent="0" algn="l">
+              <a:lnSpc>
+                <a:spcPct val="145000"/>
+              </a:lnSpc>
+              <a:buNone/>
+            </a:pPr>
+            <a:r>
+              <a:rPr lang="en-US" sz="1800" kern="0" spc="216" dirty="0">
+                <a:solidFill>
+                  <a:srgbClr val="4ADE80"/>
+                </a:solidFill>
+                <a:latin typeface="Courier New" pitchFamily="34" charset="0"/>
+                <a:ea typeface="Courier New" pitchFamily="34" charset="-122"/>
+                <a:cs typeface="Courier New" pitchFamily="34" charset="-120"/>
+              </a:rPr>
+              <a:t>INTERPRETING RESULTS</a:t>
+            </a:r>
+            <a:endParaRPr lang="en-US" sz="1800" dirty="0"/>
+          </a:p>
+        </p:txBody>
+      </p:sp>
+      <p:sp>
+        <p:nvSpPr>
+          <p:cNvPr id="15" name="Text 13"/>
+          <p:cNvSpPr/>
+          <p:nvPr/>
+        </p:nvSpPr>
+        <p:spPr>
+          <a:xfrm>
+            <a:off x="1209010" y="8572849"/>
+            <a:ext cx="15925462" cy="755277"/>
+          </a:xfrm>
+          <a:prstGeom prst="rect">
+            <a:avLst/>
+          </a:prstGeom>
+          <a:noFill/>
+          <a:ln/>
+        </p:spPr>
+        <p:txBody>
+          <a:bodyPr wrap="square" lIns="0" tIns="0" rIns="0" bIns="0" rtlCol="0" anchor="t">
+            <a:normAutofit fontScale="85000" lnSpcReduction="10000"/>
+          </a:bodyPr>
+          <a:lstStyle/>
+          <a:p>
+            <a:pPr marL="0" indent="0" algn="l">
+              <a:lnSpc>
+                <a:spcPct val="145000"/>
+              </a:lnSpc>
+              <a:buNone/>
+            </a:pPr>
+            <a:r>
+              <a:rPr lang="en-US" sz="2250" dirty="0">
+                <a:solidFill>
+                  <a:srgbClr val="CBD5E1"/>
+                </a:solidFill>
+                <a:latin typeface="Arial" pitchFamily="34" charset="0"/>
+                <a:ea typeface="Arial" pitchFamily="34" charset="-122"/>
+                <a:cs typeface="Arial" pitchFamily="34" charset="-120"/>
+              </a:rPr>
+              <a:t>Packets here but nothing in Akvorado → problem is inside the container stack. No packets → the device isn't sending, or a firewall is in the way.</a:t>
+            </a:r>
+            <a:endParaRPr lang="en-US" sz="2250" dirty="0"/>
+          </a:p>
+        </p:txBody>
+      </p:sp>
+      <p:sp>
+        <p:nvSpPr>
+          <p:cNvPr id="16" name="Text 14"/>
+          <p:cNvSpPr/>
+          <p:nvPr/>
+        </p:nvSpPr>
+        <p:spPr>
+          <a:xfrm>
+            <a:off x="914330" y="9619199"/>
+            <a:ext cx="3767941" cy="363071"/>
+          </a:xfrm>
+          <a:prstGeom prst="rect">
+            <a:avLst/>
+          </a:prstGeom>
+          <a:noFill/>
+          <a:ln/>
+        </p:spPr>
+        <p:txBody>
+          <a:bodyPr wrap="square" lIns="25400" tIns="25400" rIns="25400" bIns="25400" rtlCol="0" anchor="t">
+            <a:normAutofit fontScale="92500" lnSpcReduction="20000"/>
+          </a:bodyPr>
+          <a:lstStyle/>
+          <a:p>
+            <a:pPr marL="0" indent="0" algn="l">
+              <a:lnSpc>
+                <a:spcPct val="145000"/>
+              </a:lnSpc>
+              <a:buNone/>
+            </a:pPr>
+            <a:r>
+              <a:rPr lang="en-US" sz="1800" kern="0" spc="72" dirty="0">
+                <a:solidFill>
+                  <a:srgbClr val="56688A"/>
+                </a:solidFill>
+                <a:latin typeface="Courier New" pitchFamily="34" charset="0"/>
+                <a:ea typeface="Courier New" pitchFamily="34" charset="-122"/>
+                <a:cs typeface="Courier New" pitchFamily="34" charset="-120"/>
+              </a:rPr>
+              <a:t>akvorado-lab · don jolley</a:t>
+            </a:r>
+            <a:endParaRPr lang="en-US" sz="1800" dirty="0"/>
+          </a:p>
+        </p:txBody>
+      </p:sp>
+      <p:sp>
+        <p:nvSpPr>
+          <p:cNvPr id="17" name="Text 15"/>
+          <p:cNvSpPr/>
+          <p:nvPr/>
+        </p:nvSpPr>
+        <p:spPr>
+          <a:xfrm>
+            <a:off x="15764049" y="9619199"/>
+            <a:ext cx="1685820" cy="363071"/>
+          </a:xfrm>
+          <a:prstGeom prst="rect">
+            <a:avLst/>
+          </a:prstGeom>
+          <a:noFill/>
+          <a:ln/>
+        </p:spPr>
+        <p:txBody>
+          <a:bodyPr wrap="square" lIns="25400" tIns="25400" rIns="25400" bIns="25400" rtlCol="0" anchor="t">
+            <a:normAutofit fontScale="92500" lnSpcReduction="20000"/>
+          </a:bodyPr>
+          <a:lstStyle/>
+          <a:p>
+            <a:pPr marL="0" indent="0" algn="l">
+              <a:lnSpc>
+                <a:spcPct val="145000"/>
+              </a:lnSpc>
+              <a:buNone/>
+            </a:pPr>
+            <a:r>
+              <a:rPr lang="en-US" sz="1800" kern="0" spc="72" dirty="0">
+                <a:solidFill>
+                  <a:srgbClr val="56688A"/>
+                </a:solidFill>
+                <a:latin typeface="Courier New" pitchFamily="34" charset="0"/>
+                <a:ea typeface="Courier New" pitchFamily="34" charset="-122"/>
+                <a:cs typeface="Courier New" pitchFamily="34" charset="-120"/>
+              </a:rPr>
+              <a:t>slide 42</a:t>
+            </a:r>
+            <a:endParaRPr lang="en-US" sz="1800" dirty="0"/>
+          </a:p>
+        </p:txBody>
+      </p:sp>
+    </p:spTree>
+  </p:cSld>
+  <p:clrMapOvr>
+    <a:masterClrMapping/>
+  </p:clrMapOvr>
+</p:sld>
+</file>
+
+<file path=ppt/slides/slide41.xml><?xml version="1.0" encoding="utf-8"?>
+<p:sld xmlns:a="http://schemas.openxmlformats.org/drawingml/2006/main" xmlns:r="http://schemas.openxmlformats.org/officeDocument/2006/relationships" xmlns:p="http://schemas.openxmlformats.org/presentationml/2006/main">
   <p:cSld name="Slide 43">
     <p:bg>
       <p:bgPr>
@@ -32791,7 +33832,7 @@
 </p:sld>
 </file>
 
-<file path=ppt/slides/slide41.xml><?xml version="1.0" encoding="utf-8"?>
+<file path=ppt/slides/slide42.xml><?xml version="1.0" encoding="utf-8"?>
 <p:sld xmlns:a="http://schemas.openxmlformats.org/drawingml/2006/main" xmlns:r="http://schemas.openxmlformats.org/officeDocument/2006/relationships" xmlns:p="http://schemas.openxmlformats.org/presentationml/2006/main">
   <p:cSld name="Slide 44">
     <p:bg>
@@ -32983,7 +34024,7 @@
 </p:sld>
 </file>
 
-<file path=ppt/slides/slide42.xml><?xml version="1.0" encoding="utf-8"?>
+<file path=ppt/slides/slide43.xml><?xml version="1.0" encoding="utf-8"?>
 <p:sld xmlns:a="http://schemas.openxmlformats.org/drawingml/2006/main" xmlns:r="http://schemas.openxmlformats.org/officeDocument/2006/relationships" xmlns:p="http://schemas.openxmlformats.org/presentationml/2006/main">
   <p:cSld name="Slide 45">
     <p:bg>
@@ -34414,7 +35455,7 @@
 </p:sld>
 </file>
 
-<file path=ppt/slides/slide43.xml><?xml version="1.0" encoding="utf-8"?>
+<file path=ppt/slides/slide44.xml><?xml version="1.0" encoding="utf-8"?>
 <p:sld xmlns:a="http://schemas.openxmlformats.org/drawingml/2006/main" xmlns:r="http://schemas.openxmlformats.org/officeDocument/2006/relationships" xmlns:p="http://schemas.openxmlformats.org/presentationml/2006/main">
   <p:cSld name="Slide 46">
     <p:bg>
@@ -35111,7 +36152,7 @@
 </p:sld>
 </file>
 
-<file path=ppt/slides/slide44.xml><?xml version="1.0" encoding="utf-8"?>
+<file path=ppt/slides/slide45.xml><?xml version="1.0" encoding="utf-8"?>
 <p:sld xmlns:a="http://schemas.openxmlformats.org/drawingml/2006/main" xmlns:r="http://schemas.openxmlformats.org/officeDocument/2006/relationships" xmlns:p="http://schemas.openxmlformats.org/presentationml/2006/main">
   <p:cSld name="Slide 47">
     <p:bg>
@@ -35303,7 +36344,7 @@
 </p:sld>
 </file>
 
-<file path=ppt/slides/slide45.xml><?xml version="1.0" encoding="utf-8"?>
+<file path=ppt/slides/slide46.xml><?xml version="1.0" encoding="utf-8"?>
 <p:sld xmlns:a="http://schemas.openxmlformats.org/drawingml/2006/main" xmlns:r="http://schemas.openxmlformats.org/officeDocument/2006/relationships" xmlns:p="http://schemas.openxmlformats.org/presentationml/2006/main">
   <p:cSld name="Slide 48">
     <p:bg>
@@ -36863,7 +37904,7 @@
 </p:sld>
 </file>
 
-<file path=ppt/slides/slide46.xml><?xml version="1.0" encoding="utf-8"?>
+<file path=ppt/slides/slide47.xml><?xml version="1.0" encoding="utf-8"?>
 <p:sld xmlns:a="http://schemas.openxmlformats.org/drawingml/2006/main" xmlns:r="http://schemas.openxmlformats.org/officeDocument/2006/relationships" xmlns:p="http://schemas.openxmlformats.org/presentationml/2006/main">
   <p:cSld name="Slide 49">
     <p:bg>
@@ -37769,7 +38810,7 @@
 </p:sld>
 </file>
 
-<file path=ppt/slides/slide47.xml><?xml version="1.0" encoding="utf-8"?>
+<file path=ppt/slides/slide48.xml><?xml version="1.0" encoding="utf-8"?>
 <p:sld xmlns:a="http://schemas.openxmlformats.org/drawingml/2006/main" xmlns:r="http://schemas.openxmlformats.org/officeDocument/2006/relationships" xmlns:p="http://schemas.openxmlformats.org/presentationml/2006/main">
   <p:cSld name="Slide 50">
     <p:bg>
@@ -38683,7 +39724,7 @@
 </p:sld>
 </file>
 
-<file path=ppt/slides/slide48.xml><?xml version="1.0" encoding="utf-8"?>
+<file path=ppt/slides/slide49.xml><?xml version="1.0" encoding="utf-8"?>
 <p:sld xmlns:a="http://schemas.openxmlformats.org/drawingml/2006/main" xmlns:r="http://schemas.openxmlformats.org/officeDocument/2006/relationships" xmlns:p="http://schemas.openxmlformats.org/presentationml/2006/main">
   <p:cSld name="Slide 51">
     <p:bg>
@@ -39352,618 +40393,6 @@
                 <a:cs typeface="Courier New" pitchFamily="34" charset="-120"/>
               </a:rPr>
               <a:t>slide 51</a:t>
-            </a:r>
-            <a:endParaRPr lang="en-US" sz="1800" dirty="0"/>
-          </a:p>
-        </p:txBody>
-      </p:sp>
-    </p:spTree>
-  </p:cSld>
-  <p:clrMapOvr>
-    <a:masterClrMapping/>
-  </p:clrMapOvr>
-</p:sld>
-</file>
-
-<file path=ppt/slides/slide49.xml><?xml version="1.0" encoding="utf-8"?>
-<p:sld xmlns:a="http://schemas.openxmlformats.org/drawingml/2006/main" xmlns:r="http://schemas.openxmlformats.org/officeDocument/2006/relationships" xmlns:p="http://schemas.openxmlformats.org/presentationml/2006/main">
-  <p:cSld name="Slide 52">
-    <p:bg>
-      <p:bgPr>
-        <a:solidFill>
-          <a:srgbClr val="08111F"/>
-        </a:solidFill>
-        <a:effectLst/>
-      </p:bgPr>
-    </p:bg>
-    <p:spTree>
-      <p:nvGrpSpPr>
-        <p:cNvPr id="1" name=""/>
-        <p:cNvGrpSpPr/>
-        <p:nvPr/>
-      </p:nvGrpSpPr>
-      <p:grpSpPr>
-        <a:xfrm>
-          <a:off x="0" y="0"/>
-          <a:ext cx="0" cy="0"/>
-          <a:chOff x="0" y="0"/>
-          <a:chExt cx="0" cy="0"/>
-        </a:xfrm>
-      </p:grpSpPr>
-      <p:sp>
-        <p:nvSpPr>
-          <p:cNvPr id="2" name="Text 0"/>
-          <p:cNvSpPr/>
-          <p:nvPr/>
-        </p:nvSpPr>
-        <p:spPr>
-          <a:xfrm>
-            <a:off x="914330" y="342830"/>
-            <a:ext cx="1978574" cy="363071"/>
-          </a:xfrm>
-          <a:prstGeom prst="rect">
-            <a:avLst/>
-          </a:prstGeom>
-          <a:noFill/>
-          <a:ln/>
-        </p:spPr>
-        <p:txBody>
-          <a:bodyPr wrap="square" lIns="25400" tIns="25400" rIns="25400" bIns="25400" rtlCol="0" anchor="t">
-            <a:normAutofit fontScale="92500" lnSpcReduction="20000"/>
-          </a:bodyPr>
-          <a:lstStyle/>
-          <a:p>
-            <a:pPr marL="0" indent="0" algn="l">
-              <a:lnSpc>
-                <a:spcPct val="145000"/>
-              </a:lnSpc>
-              <a:buNone/>
-            </a:pPr>
-            <a:r>
-              <a:rPr lang="en-US" sz="1800" kern="0" spc="72" dirty="0">
-                <a:solidFill>
-                  <a:srgbClr val="4ADE80"/>
-                </a:solidFill>
-                <a:latin typeface="Courier New" pitchFamily="34" charset="0"/>
-                <a:ea typeface="Courier New" pitchFamily="34" charset="-122"/>
-                <a:cs typeface="Courier New" pitchFamily="34" charset="-120"/>
-              </a:rPr>
-              <a:t>§ 07 harden</a:t>
-            </a:r>
-            <a:endParaRPr lang="en-US" sz="1800" dirty="0"/>
-          </a:p>
-        </p:txBody>
-      </p:sp>
-      <p:sp>
-        <p:nvSpPr>
-          <p:cNvPr id="3" name="Text 1"/>
-          <p:cNvSpPr/>
-          <p:nvPr/>
-        </p:nvSpPr>
-        <p:spPr>
-          <a:xfrm>
-            <a:off x="15178717" y="342830"/>
-            <a:ext cx="2271152" cy="363071"/>
-          </a:xfrm>
-          <a:prstGeom prst="rect">
-            <a:avLst/>
-          </a:prstGeom>
-          <a:noFill/>
-          <a:ln/>
-        </p:spPr>
-        <p:txBody>
-          <a:bodyPr wrap="square" lIns="25400" tIns="25400" rIns="25400" bIns="25400" rtlCol="0" anchor="t">
-            <a:normAutofit fontScale="92500" lnSpcReduction="20000"/>
-          </a:bodyPr>
-          <a:lstStyle/>
-          <a:p>
-            <a:pPr marL="0" indent="0" algn="l">
-              <a:lnSpc>
-                <a:spcPct val="145000"/>
-              </a:lnSpc>
-              <a:buNone/>
-            </a:pPr>
-            <a:r>
-              <a:rPr lang="en-US" sz="1800" kern="0" spc="72" dirty="0">
-                <a:solidFill>
-                  <a:srgbClr val="56688A"/>
-                </a:solidFill>
-                <a:latin typeface="Courier New" pitchFamily="34" charset="0"/>
-                <a:ea typeface="Courier New" pitchFamily="34" charset="-122"/>
-                <a:cs typeface="Courier New" pitchFamily="34" charset="-120"/>
-              </a:rPr>
-              <a:t>console · https</a:t>
-            </a:r>
-            <a:endParaRPr lang="en-US" sz="1800" dirty="0"/>
-          </a:p>
-        </p:txBody>
-      </p:sp>
-      <p:sp>
-        <p:nvSpPr>
-          <p:cNvPr id="4" name="Text 2"/>
-          <p:cNvSpPr/>
-          <p:nvPr/>
-        </p:nvSpPr>
-        <p:spPr>
-          <a:xfrm>
-            <a:off x="914330" y="838165"/>
-            <a:ext cx="16953120" cy="374276"/>
-          </a:xfrm>
-          <a:prstGeom prst="rect">
-            <a:avLst/>
-          </a:prstGeom>
-          <a:noFill/>
-          <a:ln/>
-        </p:spPr>
-        <p:txBody>
-          <a:bodyPr wrap="square" lIns="25400" tIns="25400" rIns="25400" bIns="25400" rtlCol="0" anchor="t">
-            <a:normAutofit fontScale="92500" lnSpcReduction="20000"/>
-          </a:bodyPr>
-          <a:lstStyle/>
-          <a:p>
-            <a:pPr marL="0" indent="0" algn="l">
-              <a:lnSpc>
-                <a:spcPct val="150000"/>
-              </a:lnSpc>
-              <a:buNone/>
-            </a:pPr>
-            <a:r>
-              <a:rPr lang="en-US" sz="1800" kern="0" spc="324" dirty="0">
-                <a:solidFill>
-                  <a:srgbClr val="4ADE80"/>
-                </a:solidFill>
-                <a:latin typeface="Courier New" pitchFamily="34" charset="0"/>
-                <a:ea typeface="Courier New" pitchFamily="34" charset="-122"/>
-                <a:cs typeface="Courier New" pitchFamily="34" charset="-120"/>
-              </a:rPr>
-              <a:t>AKVORADO-CONSOLE · LABELS</a:t>
-            </a:r>
-            <a:endParaRPr lang="en-US" sz="1800" dirty="0"/>
-          </a:p>
-        </p:txBody>
-      </p:sp>
-      <p:sp>
-        <p:nvSpPr>
-          <p:cNvPr id="5" name="Text 3"/>
-          <p:cNvSpPr/>
-          <p:nvPr/>
-        </p:nvSpPr>
-        <p:spPr>
-          <a:xfrm>
-            <a:off x="914330" y="1441006"/>
-            <a:ext cx="14716124" cy="676835"/>
-          </a:xfrm>
-          <a:prstGeom prst="rect">
-            <a:avLst/>
-          </a:prstGeom>
-          <a:noFill/>
-          <a:ln/>
-        </p:spPr>
-        <p:txBody>
-          <a:bodyPr wrap="square" lIns="25400" tIns="25400" rIns="25400" bIns="25400" rtlCol="0" anchor="t">
-            <a:normAutofit fontScale="92500" lnSpcReduction="20000"/>
-          </a:bodyPr>
-          <a:lstStyle/>
-          <a:p>
-            <a:pPr marL="0" indent="0" algn="l">
-              <a:lnSpc>
-                <a:spcPct val="105000"/>
-              </a:lnSpc>
-              <a:buNone/>
-            </a:pPr>
-            <a:r>
-              <a:rPr lang="en-US" sz="4800" b="1" kern="0" spc="-72" dirty="0">
-                <a:solidFill>
-                  <a:srgbClr val="E6EDF3"/>
-                </a:solidFill>
-                <a:latin typeface="Arial" pitchFamily="34" charset="0"/>
-                <a:ea typeface="Arial" pitchFamily="34" charset="-122"/>
-                <a:cs typeface="Arial" pitchFamily="34" charset="-120"/>
-              </a:rPr>
-              <a:t>Switch the console router to HTTPS.</a:t>
-            </a:r>
-            <a:endParaRPr lang="en-US" sz="4800" dirty="0"/>
-          </a:p>
-        </p:txBody>
-      </p:sp>
-      <p:sp>
-        <p:nvSpPr>
-          <p:cNvPr id="6" name="Shape 4"/>
-          <p:cNvSpPr/>
-          <p:nvPr/>
-        </p:nvSpPr>
-        <p:spPr>
-          <a:xfrm>
-            <a:off x="914330" y="2803572"/>
-            <a:ext cx="16459340" cy="4376947"/>
-          </a:xfrm>
-          <a:prstGeom prst="roundRect">
-            <a:avLst>
-              <a:gd name="adj" fmla="val 1306"/>
-            </a:avLst>
-          </a:prstGeom>
-          <a:solidFill>
-            <a:srgbClr val="0C1729"/>
-          </a:solidFill>
-          <a:ln w="11206">
-            <a:solidFill>
-              <a:srgbClr val="1E3354"/>
-            </a:solidFill>
-            <a:prstDash val="solid"/>
-          </a:ln>
-        </p:spPr>
-        <p:txBody>
-          <a:bodyPr/>
-          <a:lstStyle/>
-          <a:p>
-            <a:endParaRPr lang="en-US"/>
-          </a:p>
-        </p:txBody>
-      </p:sp>
-      <p:sp>
-        <p:nvSpPr>
-          <p:cNvPr id="7" name="Text 5"/>
-          <p:cNvSpPr/>
-          <p:nvPr/>
-        </p:nvSpPr>
-        <p:spPr>
-          <a:xfrm>
-            <a:off x="1268436" y="3081477"/>
-            <a:ext cx="16244908" cy="3859236"/>
-          </a:xfrm>
-          <a:prstGeom prst="rect">
-            <a:avLst/>
-          </a:prstGeom>
-          <a:noFill/>
-          <a:ln/>
-        </p:spPr>
-        <p:txBody>
-          <a:bodyPr wrap="square" lIns="25400" tIns="25400" rIns="25400" bIns="25400" rtlCol="0" anchor="t">
-            <a:normAutofit/>
-          </a:bodyPr>
-          <a:lstStyle/>
-          <a:p>
-            <a:pPr marL="0" indent="0" algn="l">
-              <a:lnSpc>
-                <a:spcPct val="155000"/>
-              </a:lnSpc>
-              <a:buNone/>
-            </a:pPr>
-            <a:r>
-              <a:rPr lang="en-US" sz="1800" dirty="0">
-                <a:solidFill>
-                  <a:srgbClr val="CBD5E1"/>
-                </a:solidFill>
-                <a:highlight>
-                  <a:srgbClr val="0C1729"/>
-                </a:highlight>
-                <a:latin typeface="Courier New" pitchFamily="34" charset="0"/>
-                <a:ea typeface="Courier New" pitchFamily="34" charset="-122"/>
-                <a:cs typeface="Courier New" pitchFamily="34" charset="-120"/>
-              </a:rPr>
-              <a:t>labels:</a:t>
-            </a:r>
-            <a:endParaRPr lang="en-US" sz="1800" dirty="0"/>
-          </a:p>
-          <a:p>
-            <a:pPr marL="0" indent="0" algn="l">
-              <a:lnSpc>
-                <a:spcPct val="155000"/>
-              </a:lnSpc>
-              <a:buNone/>
-            </a:pPr>
-            <a:r>
-              <a:rPr lang="en-US" sz="1800" dirty="0">
-                <a:solidFill>
-                  <a:srgbClr val="CBD5E1"/>
-                </a:solidFill>
-                <a:highlight>
-                  <a:srgbClr val="0C1729"/>
-                </a:highlight>
-                <a:latin typeface="Courier New" pitchFamily="34" charset="0"/>
-                <a:ea typeface="Courier New" pitchFamily="34" charset="-122"/>
-                <a:cs typeface="Courier New" pitchFamily="34" charset="-120"/>
-              </a:rPr>
-              <a:t>  - traefik.enable=</a:t>
-            </a:r>
-            <a:endParaRPr lang="en-US" sz="1800" dirty="0"/>
-          </a:p>
-          <a:p>
-            <a:pPr marL="0" indent="0" algn="l">
-              <a:lnSpc>
-                <a:spcPct val="155000"/>
-              </a:lnSpc>
-              <a:buNone/>
-            </a:pPr>
-            <a:r>
-              <a:rPr lang="en-US" sz="1800" dirty="0">
-                <a:solidFill>
-                  <a:srgbClr val="FCD34D"/>
-                </a:solidFill>
-                <a:latin typeface="Courier New" pitchFamily="34" charset="0"/>
-                <a:ea typeface="Courier New" pitchFamily="34" charset="-122"/>
-                <a:cs typeface="Courier New" pitchFamily="34" charset="-120"/>
-              </a:rPr>
-              <a:t>true </a:t>
-            </a:r>
-            <a:r>
-              <a:rPr lang="en-US" sz="1800" dirty="0">
-                <a:solidFill>
-                  <a:srgbClr val="56688A"/>
-                </a:solidFill>
-                <a:latin typeface="Courier New" pitchFamily="34" charset="0"/>
-                <a:ea typeface="Courier New" pitchFamily="34" charset="-122"/>
-                <a:cs typeface="Courier New" pitchFamily="34" charset="-120"/>
-              </a:rPr>
-              <a:t># enable TLS, attach the cert resolver, declare the domain </a:t>
-            </a:r>
-            <a:r>
-              <a:rPr lang="en-US" sz="1800" dirty="0">
-                <a:solidFill>
-                  <a:srgbClr val="CBD5E1"/>
-                </a:solidFill>
-                <a:highlight>
-                  <a:srgbClr val="0C1729"/>
-                </a:highlight>
-                <a:latin typeface="Courier New" pitchFamily="34" charset="0"/>
-                <a:ea typeface="Courier New" pitchFamily="34" charset="-122"/>
-                <a:cs typeface="Courier New" pitchFamily="34" charset="-120"/>
-              </a:rPr>
-              <a:t>  - traefik.http.routers.akvorado-console.tls= </a:t>
-            </a:r>
-            <a:r>
-              <a:rPr lang="en-US" sz="1800" dirty="0">
-                <a:solidFill>
-                  <a:srgbClr val="FCD34D"/>
-                </a:solidFill>
-                <a:latin typeface="Courier New" pitchFamily="34" charset="0"/>
-                <a:ea typeface="Courier New" pitchFamily="34" charset="-122"/>
-                <a:cs typeface="Courier New" pitchFamily="34" charset="-120"/>
-              </a:rPr>
-              <a:t>true </a:t>
-            </a:r>
-            <a:r>
-              <a:rPr lang="en-US" sz="1800" dirty="0">
-                <a:solidFill>
-                  <a:srgbClr val="CBD5E1"/>
-                </a:solidFill>
-                <a:highlight>
-                  <a:srgbClr val="0C1729"/>
-                </a:highlight>
-                <a:latin typeface="Courier New" pitchFamily="34" charset="0"/>
-                <a:ea typeface="Courier New" pitchFamily="34" charset="-122"/>
-                <a:cs typeface="Courier New" pitchFamily="34" charset="-120"/>
-              </a:rPr>
-              <a:t>  - traefik.http.routers.akvorado-console.tls.certresolver=</a:t>
-            </a:r>
-            <a:r>
-              <a:rPr lang="en-US" sz="1800" dirty="0">
-                <a:solidFill>
-                  <a:srgbClr val="FCD34D"/>
-                </a:solidFill>
-                <a:latin typeface="Courier New" pitchFamily="34" charset="0"/>
-                <a:ea typeface="Courier New" pitchFamily="34" charset="-122"/>
-                <a:cs typeface="Courier New" pitchFamily="34" charset="-120"/>
-              </a:rPr>
-              <a:t>letsencrypt </a:t>
-            </a:r>
-            <a:r>
-              <a:rPr lang="en-US" sz="1800" dirty="0">
-                <a:solidFill>
-                  <a:srgbClr val="CBD5E1"/>
-                </a:solidFill>
-                <a:highlight>
-                  <a:srgbClr val="0C1729"/>
-                </a:highlight>
-                <a:latin typeface="Courier New" pitchFamily="34" charset="0"/>
-                <a:ea typeface="Courier New" pitchFamily="34" charset="-122"/>
-                <a:cs typeface="Courier New" pitchFamily="34" charset="-120"/>
-              </a:rPr>
-              <a:t>  - traefik.http.routers.akvorado-console.tls.domains[ </a:t>
-            </a:r>
-            <a:r>
-              <a:rPr lang="en-US" sz="1800" dirty="0">
-                <a:solidFill>
-                  <a:srgbClr val="FDBA74"/>
-                </a:solidFill>
-                <a:latin typeface="Courier New" pitchFamily="34" charset="0"/>
-                <a:ea typeface="Courier New" pitchFamily="34" charset="-122"/>
-                <a:cs typeface="Courier New" pitchFamily="34" charset="-120"/>
-              </a:rPr>
-              <a:t>0</a:t>
-            </a:r>
-            <a:r>
-              <a:rPr lang="en-US" sz="1800" dirty="0">
-                <a:solidFill>
-                  <a:srgbClr val="CBD5E1"/>
-                </a:solidFill>
-                <a:highlight>
-                  <a:srgbClr val="0C1729"/>
-                </a:highlight>
-                <a:latin typeface="Courier New" pitchFamily="34" charset="0"/>
-                <a:ea typeface="Courier New" pitchFamily="34" charset="-122"/>
-                <a:cs typeface="Courier New" pitchFamily="34" charset="-120"/>
-              </a:rPr>
-              <a:t>].main=</a:t>
-            </a:r>
-            <a:r>
-              <a:rPr lang="en-US" sz="1800" dirty="0">
-                <a:solidFill>
-                  <a:srgbClr val="FCD34D"/>
-                </a:solidFill>
-                <a:latin typeface="Courier New" pitchFamily="34" charset="0"/>
-                <a:ea typeface="Courier New" pitchFamily="34" charset="-122"/>
-                <a:cs typeface="Courier New" pitchFamily="34" charset="-120"/>
-              </a:rPr>
-              <a:t>flows.example.com </a:t>
-            </a:r>
-            <a:r>
-              <a:rPr lang="en-US" sz="1800" dirty="0">
-                <a:solidFill>
-                  <a:srgbClr val="56688A"/>
-                </a:solidFill>
-                <a:latin typeface="Courier New" pitchFamily="34" charset="0"/>
-                <a:ea typeface="Courier New" pitchFamily="34" charset="-122"/>
-                <a:cs typeface="Courier New" pitchFamily="34" charset="-120"/>
-              </a:rPr>
-              <a:t># move the console off the public entrypoint onto websecure </a:t>
-            </a:r>
-            <a:r>
-              <a:rPr lang="en-US" sz="1800" dirty="0">
-                <a:solidFill>
-                  <a:srgbClr val="CBD5E1"/>
-                </a:solidFill>
-                <a:highlight>
-                  <a:srgbClr val="0C1729"/>
-                </a:highlight>
-                <a:latin typeface="Courier New" pitchFamily="34" charset="0"/>
-                <a:ea typeface="Courier New" pitchFamily="34" charset="-122"/>
-                <a:cs typeface="Courier New" pitchFamily="34" charset="-120"/>
-              </a:rPr>
-              <a:t>  - traefik.http.routers.akvorado-console.entrypoints= </a:t>
-            </a:r>
-            <a:r>
-              <a:rPr lang="en-US" sz="1800" dirty="0">
-                <a:solidFill>
-                  <a:srgbClr val="FCD34D"/>
-                </a:solidFill>
-                <a:latin typeface="Courier New" pitchFamily="34" charset="0"/>
-                <a:ea typeface="Courier New" pitchFamily="34" charset="-122"/>
-                <a:cs typeface="Courier New" pitchFamily="34" charset="-120"/>
-              </a:rPr>
-              <a:t>websecure</a:t>
-            </a:r>
-            <a:endParaRPr lang="en-US" sz="1800" dirty="0"/>
-          </a:p>
-        </p:txBody>
-      </p:sp>
-      <p:sp>
-        <p:nvSpPr>
-          <p:cNvPr id="8" name="Text 6"/>
-          <p:cNvSpPr/>
-          <p:nvPr/>
-        </p:nvSpPr>
-        <p:spPr>
-          <a:xfrm>
-            <a:off x="914330" y="7447184"/>
-            <a:ext cx="16953120" cy="710453"/>
-          </a:xfrm>
-          <a:prstGeom prst="rect">
-            <a:avLst/>
-          </a:prstGeom>
-          <a:noFill/>
-          <a:ln/>
-        </p:spPr>
-        <p:txBody>
-          <a:bodyPr wrap="square" lIns="25400" tIns="25400" rIns="25400" bIns="25400" rtlCol="0" anchor="t">
-            <a:normAutofit/>
-          </a:bodyPr>
-          <a:lstStyle/>
-          <a:p>
-            <a:pPr marL="0" indent="0" algn="l">
-              <a:lnSpc>
-                <a:spcPct val="150000"/>
-              </a:lnSpc>
-              <a:buNone/>
-            </a:pPr>
-            <a:r>
-              <a:rPr lang="en-US" sz="1800" dirty="0">
-                <a:solidFill>
-                  <a:srgbClr val="8A9BB4"/>
-                </a:solidFill>
-                <a:latin typeface="Courier New" pitchFamily="34" charset="0"/>
-                <a:ea typeface="Courier New" pitchFamily="34" charset="-122"/>
-                <a:cs typeface="Courier New" pitchFamily="34" charset="-120"/>
-              </a:rPr>
-              <a:t>The Remote-User / Remote-Name / Remote-Email headers are static under basic auth — set them to whoever owns the dashboard.</a:t>
-            </a:r>
-            <a:endParaRPr lang="en-US" sz="1800" dirty="0"/>
-          </a:p>
-        </p:txBody>
-      </p:sp>
-      <p:sp>
-        <p:nvSpPr>
-          <p:cNvPr id="9" name="Text 7"/>
-          <p:cNvSpPr/>
-          <p:nvPr/>
-        </p:nvSpPr>
-        <p:spPr>
-          <a:xfrm>
-            <a:off x="914330" y="9619199"/>
-            <a:ext cx="3767941" cy="363071"/>
-          </a:xfrm>
-          <a:prstGeom prst="rect">
-            <a:avLst/>
-          </a:prstGeom>
-          <a:noFill/>
-          <a:ln/>
-        </p:spPr>
-        <p:txBody>
-          <a:bodyPr wrap="square" lIns="25400" tIns="25400" rIns="25400" bIns="25400" rtlCol="0" anchor="t">
-            <a:normAutofit fontScale="92500" lnSpcReduction="20000"/>
-          </a:bodyPr>
-          <a:lstStyle/>
-          <a:p>
-            <a:pPr marL="0" indent="0" algn="l">
-              <a:lnSpc>
-                <a:spcPct val="145000"/>
-              </a:lnSpc>
-              <a:buNone/>
-            </a:pPr>
-            <a:r>
-              <a:rPr lang="en-US" sz="1800" kern="0" spc="72" dirty="0">
-                <a:solidFill>
-                  <a:srgbClr val="56688A"/>
-                </a:solidFill>
-                <a:latin typeface="Courier New" pitchFamily="34" charset="0"/>
-                <a:ea typeface="Courier New" pitchFamily="34" charset="-122"/>
-                <a:cs typeface="Courier New" pitchFamily="34" charset="-120"/>
-              </a:rPr>
-              <a:t>akvorado-lab · don jolley</a:t>
-            </a:r>
-            <a:endParaRPr lang="en-US" sz="1800" dirty="0"/>
-          </a:p>
-        </p:txBody>
-      </p:sp>
-      <p:sp>
-        <p:nvSpPr>
-          <p:cNvPr id="10" name="Text 8"/>
-          <p:cNvSpPr/>
-          <p:nvPr/>
-        </p:nvSpPr>
-        <p:spPr>
-          <a:xfrm>
-            <a:off x="15764049" y="9619199"/>
-            <a:ext cx="1685820" cy="363071"/>
-          </a:xfrm>
-          <a:prstGeom prst="rect">
-            <a:avLst/>
-          </a:prstGeom>
-          <a:noFill/>
-          <a:ln/>
-        </p:spPr>
-        <p:txBody>
-          <a:bodyPr wrap="square" lIns="25400" tIns="25400" rIns="25400" bIns="25400" rtlCol="0" anchor="t">
-            <a:normAutofit fontScale="92500" lnSpcReduction="20000"/>
-          </a:bodyPr>
-          <a:lstStyle/>
-          <a:p>
-            <a:pPr marL="0" indent="0" algn="l">
-              <a:lnSpc>
-                <a:spcPct val="145000"/>
-              </a:lnSpc>
-              <a:buNone/>
-            </a:pPr>
-            <a:r>
-              <a:rPr lang="en-US" sz="1800" kern="0" spc="72" dirty="0">
-                <a:solidFill>
-                  <a:srgbClr val="56688A"/>
-                </a:solidFill>
-                <a:latin typeface="Courier New" pitchFamily="34" charset="0"/>
-                <a:ea typeface="Courier New" pitchFamily="34" charset="-122"/>
-                <a:cs typeface="Courier New" pitchFamily="34" charset="-120"/>
-              </a:rPr>
-              <a:t>slide 52</a:t>
             </a:r>
             <a:endParaRPr lang="en-US" sz="1800" dirty="0"/>
           </a:p>
@@ -40021,7 +40450,7 @@
         </p:spPr>
         <p:txBody>
           <a:bodyPr wrap="square" lIns="25400" tIns="25400" rIns="25400" bIns="25400" rtlCol="0" anchor="t">
-            <a:normAutofit fontScale="92500" lnSpcReduction="20000"/>
+            <a:noAutofit/>
           </a:bodyPr>
           <a:lstStyle/>
           <a:p>
@@ -40032,7 +40461,7 @@
               <a:buNone/>
             </a:pPr>
             <a:r>
-              <a:rPr lang="en-US" sz="1800" kern="0" spc="72" dirty="0">
+              <a:rPr lang="en-US" kern="0" spc="72" dirty="0">
                 <a:solidFill>
                   <a:srgbClr val="4ADE80"/>
                 </a:solidFill>
@@ -40042,7 +40471,7 @@
               </a:rPr>
               <a:t>§ 01 fundamentals</a:t>
             </a:r>
-            <a:endParaRPr lang="en-US" sz="1800" dirty="0"/>
+            <a:endParaRPr lang="en-US" dirty="0"/>
           </a:p>
         </p:txBody>
       </p:sp>
@@ -40065,7 +40494,7 @@
         </p:spPr>
         <p:txBody>
           <a:bodyPr wrap="square" lIns="25400" tIns="25400" rIns="25400" bIns="25400" rtlCol="0" anchor="t">
-            <a:normAutofit fontScale="92500" lnSpcReduction="20000"/>
+            <a:noAutofit/>
           </a:bodyPr>
           <a:lstStyle/>
           <a:p>
@@ -40076,7 +40505,7 @@
               <a:buNone/>
             </a:pPr>
             <a:r>
-              <a:rPr lang="en-US" sz="1800" kern="0" spc="72" dirty="0">
+              <a:rPr lang="en-US" kern="0" spc="72" dirty="0">
                 <a:solidFill>
                   <a:srgbClr val="56688A"/>
                 </a:solidFill>
@@ -40086,7 +40515,7 @@
               </a:rPr>
               <a:t>flow basics</a:t>
             </a:r>
-            <a:endParaRPr lang="en-US" sz="1800" dirty="0"/>
+            <a:endParaRPr lang="en-US" dirty="0"/>
           </a:p>
         </p:txBody>
       </p:sp>
@@ -40109,7 +40538,7 @@
         </p:spPr>
         <p:txBody>
           <a:bodyPr wrap="square" lIns="25400" tIns="25400" rIns="25400" bIns="25400" rtlCol="0" anchor="t">
-            <a:normAutofit fontScale="92500" lnSpcReduction="20000"/>
+            <a:noAutofit/>
           </a:bodyPr>
           <a:lstStyle/>
           <a:p>
@@ -40120,7 +40549,7 @@
               <a:buNone/>
             </a:pPr>
             <a:r>
-              <a:rPr lang="en-US" sz="1800" kern="0" spc="324" dirty="0">
+              <a:rPr lang="en-US" kern="0" spc="324" dirty="0">
                 <a:solidFill>
                   <a:srgbClr val="4ADE80"/>
                 </a:solidFill>
@@ -40130,7 +40559,7 @@
               </a:rPr>
               <a:t>FLOW · NOUN</a:t>
             </a:r>
-            <a:endParaRPr lang="en-US" sz="1800" dirty="0"/>
+            <a:endParaRPr lang="en-US" dirty="0"/>
           </a:p>
         </p:txBody>
       </p:sp>
@@ -40153,7 +40582,7 @@
         </p:spPr>
         <p:txBody>
           <a:bodyPr wrap="square" lIns="25400" tIns="25400" rIns="25400" bIns="25400" rtlCol="0" anchor="t">
-            <a:normAutofit fontScale="92500" lnSpcReduction="20000"/>
+            <a:noAutofit/>
           </a:bodyPr>
           <a:lstStyle/>
           <a:p>
@@ -40197,7 +40626,7 @@
         </p:spPr>
         <p:txBody>
           <a:bodyPr wrap="square" lIns="25400" tIns="25400" rIns="25400" bIns="25400" rtlCol="0" anchor="t">
-            <a:normAutofit fontScale="92500"/>
+            <a:noAutofit/>
           </a:bodyPr>
           <a:lstStyle/>
           <a:p>
@@ -40208,7 +40637,7 @@
               <a:buNone/>
             </a:pPr>
             <a:r>
-              <a:rPr lang="en-US" sz="2700" dirty="0">
+              <a:rPr lang="en-US" sz="2800" dirty="0">
                 <a:solidFill>
                   <a:srgbClr val="CBD5E1"/>
                 </a:solidFill>
@@ -40218,7 +40647,7 @@
               </a:rPr>
               <a:t>Your router watches packets pass through an interface, groups them by 5-tuple, and periodically exports a summary record. The collector never sees the packets themselves — only the summaries.</a:t>
             </a:r>
-            <a:endParaRPr lang="en-US" sz="2700" dirty="0"/>
+            <a:endParaRPr lang="en-US" sz="2800" dirty="0"/>
           </a:p>
         </p:txBody>
       </p:sp>
@@ -40252,7 +40681,7 @@
           <a:bodyPr/>
           <a:lstStyle/>
           <a:p>
-            <a:endParaRPr lang="en-US"/>
+            <a:endParaRPr lang="en-US" sz="2000"/>
           </a:p>
         </p:txBody>
       </p:sp>
@@ -40275,7 +40704,7 @@
         </p:spPr>
         <p:txBody>
           <a:bodyPr wrap="square" lIns="25400" tIns="25400" rIns="25400" bIns="25400" rtlCol="0" anchor="t">
-            <a:normAutofit fontScale="92500" lnSpcReduction="20000"/>
+            <a:noAutofit/>
           </a:bodyPr>
           <a:lstStyle/>
           <a:p>
@@ -40286,7 +40715,7 @@
               <a:buNone/>
             </a:pPr>
             <a:r>
-              <a:rPr lang="en-US" sz="1800" kern="0" spc="108" dirty="0">
+              <a:rPr lang="en-US" kern="0" spc="108" dirty="0">
                 <a:solidFill>
                   <a:srgbClr val="4ADE80"/>
                 </a:solidFill>
@@ -40296,7 +40725,7 @@
               </a:rPr>
               <a:t>FULL PACKET CAPTURE</a:t>
             </a:r>
-            <a:endParaRPr lang="en-US" sz="1800" dirty="0"/>
+            <a:endParaRPr lang="en-US" dirty="0"/>
           </a:p>
         </p:txBody>
       </p:sp>
@@ -40319,7 +40748,7 @@
         </p:spPr>
         <p:txBody>
           <a:bodyPr wrap="square" lIns="0" tIns="0" rIns="0" bIns="0" rtlCol="0" anchor="t">
-            <a:normAutofit fontScale="85000" lnSpcReduction="10000"/>
+            <a:noAutofit/>
           </a:bodyPr>
           <a:lstStyle/>
           <a:p>
@@ -40330,7 +40759,7 @@
               <a:buNone/>
             </a:pPr>
             <a:r>
-              <a:rPr lang="en-US" sz="1800" dirty="0">
+              <a:rPr lang="en-US" sz="1600" dirty="0">
                 <a:solidFill>
                   <a:srgbClr val="CBD5E1"/>
                 </a:solidFill>
@@ -40340,7 +40769,7 @@
               </a:rPr>
               <a:t>Every byte, every packet, every header.</a:t>
             </a:r>
-            <a:endParaRPr lang="en-US" sz="1800" dirty="0"/>
+            <a:endParaRPr lang="en-US" sz="1600" dirty="0"/>
           </a:p>
         </p:txBody>
       </p:sp>
@@ -40363,7 +40792,7 @@
         </p:spPr>
         <p:txBody>
           <a:bodyPr wrap="square" lIns="25400" tIns="25400" rIns="25400" bIns="25400" rtlCol="0" anchor="t">
-            <a:normAutofit fontScale="70000" lnSpcReduction="20000"/>
+            <a:noAutofit/>
           </a:bodyPr>
           <a:lstStyle/>
           <a:p>
@@ -40374,7 +40803,7 @@
               <a:buNone/>
             </a:pPr>
             <a:r>
-              <a:rPr lang="en-US" sz="1800" dirty="0">
+              <a:rPr lang="en-US" sz="1400" dirty="0">
                 <a:solidFill>
                   <a:srgbClr val="F87171"/>
                 </a:solidFill>
@@ -40384,7 +40813,7 @@
               </a:rPr>
               <a:t>Storage cost: catastrophic.</a:t>
             </a:r>
-            <a:endParaRPr lang="en-US" sz="1800" dirty="0"/>
+            <a:endParaRPr lang="en-US" sz="1400" dirty="0"/>
           </a:p>
         </p:txBody>
       </p:sp>
@@ -40418,7 +40847,7 @@
           <a:bodyPr/>
           <a:lstStyle/>
           <a:p>
-            <a:endParaRPr lang="en-US"/>
+            <a:endParaRPr lang="en-US" sz="2000"/>
           </a:p>
         </p:txBody>
       </p:sp>
@@ -40441,7 +40870,7 @@
         </p:spPr>
         <p:txBody>
           <a:bodyPr wrap="square" lIns="25400" tIns="25400" rIns="25400" bIns="25400" rtlCol="0" anchor="t">
-            <a:normAutofit fontScale="92500" lnSpcReduction="20000"/>
+            <a:noAutofit/>
           </a:bodyPr>
           <a:lstStyle/>
           <a:p>
@@ -40452,7 +40881,7 @@
               <a:buNone/>
             </a:pPr>
             <a:r>
-              <a:rPr lang="en-US" sz="1800" kern="0" spc="108" dirty="0">
+              <a:rPr lang="en-US" kern="0" spc="108" dirty="0">
                 <a:solidFill>
                   <a:srgbClr val="4ADE80"/>
                 </a:solidFill>
@@ -40462,7 +40891,7 @@
               </a:rPr>
               <a:t>FLOW RECORDS</a:t>
             </a:r>
-            <a:endParaRPr lang="en-US" sz="1800" dirty="0"/>
+            <a:endParaRPr lang="en-US" dirty="0"/>
           </a:p>
         </p:txBody>
       </p:sp>
@@ -40485,7 +40914,7 @@
         </p:spPr>
         <p:txBody>
           <a:bodyPr wrap="square" lIns="0" tIns="0" rIns="0" bIns="0" rtlCol="0" anchor="t">
-            <a:normAutofit fontScale="85000" lnSpcReduction="10000"/>
+            <a:noAutofit/>
           </a:bodyPr>
           <a:lstStyle/>
           <a:p>
@@ -40496,7 +40925,7 @@
               <a:buNone/>
             </a:pPr>
             <a:r>
-              <a:rPr lang="en-US" sz="1800" dirty="0">
+              <a:rPr lang="en-US" sz="1600" dirty="0">
                 <a:solidFill>
                   <a:srgbClr val="CBD5E1"/>
                 </a:solidFill>
@@ -40506,7 +40935,7 @@
               </a:rPr>
               <a:t>Per-conversation summaries, exported on a timer.</a:t>
             </a:r>
-            <a:endParaRPr lang="en-US" sz="1800" dirty="0"/>
+            <a:endParaRPr lang="en-US" sz="1600" dirty="0"/>
           </a:p>
         </p:txBody>
       </p:sp>
@@ -40529,7 +40958,7 @@
         </p:spPr>
         <p:txBody>
           <a:bodyPr wrap="square" lIns="25400" tIns="25400" rIns="25400" bIns="25400" rtlCol="0" anchor="t">
-            <a:normAutofit fontScale="70000" lnSpcReduction="20000"/>
+            <a:noAutofit/>
           </a:bodyPr>
           <a:lstStyle/>
           <a:p>
@@ -40540,7 +40969,7 @@
               <a:buNone/>
             </a:pPr>
             <a:r>
-              <a:rPr lang="en-US" sz="1800" dirty="0">
+              <a:rPr lang="en-US" sz="1400" dirty="0">
                 <a:solidFill>
                   <a:srgbClr val="4ADE80"/>
                 </a:solidFill>
@@ -40550,7 +40979,7 @@
               </a:rPr>
               <a:t>Storage cost: tractable.</a:t>
             </a:r>
-            <a:endParaRPr lang="en-US" sz="1800" dirty="0"/>
+            <a:endParaRPr lang="en-US" sz="1400" dirty="0"/>
           </a:p>
         </p:txBody>
       </p:sp>
@@ -40573,7 +41002,7 @@
         </p:spPr>
         <p:txBody>
           <a:bodyPr wrap="square" lIns="25400" tIns="25400" rIns="25400" bIns="25400" rtlCol="0" anchor="t">
-            <a:normAutofit fontScale="92500" lnSpcReduction="20000"/>
+            <a:noAutofit/>
           </a:bodyPr>
           <a:lstStyle/>
           <a:p>
@@ -40584,7 +41013,7 @@
               <a:buNone/>
             </a:pPr>
             <a:r>
-              <a:rPr lang="en-US" sz="1800" kern="0" spc="72" dirty="0">
+              <a:rPr lang="en-US" kern="0" spc="72" dirty="0">
                 <a:solidFill>
                   <a:srgbClr val="56688A"/>
                 </a:solidFill>
@@ -40594,7 +41023,7 @@
               </a:rPr>
               <a:t>akvorado-lab · don jolley</a:t>
             </a:r>
-            <a:endParaRPr lang="en-US" sz="1800" dirty="0"/>
+            <a:endParaRPr lang="en-US" dirty="0"/>
           </a:p>
         </p:txBody>
       </p:sp>
@@ -40628,7 +41057,7 @@
               <a:buNone/>
             </a:pPr>
             <a:r>
-              <a:rPr lang="en-US" sz="1800" kern="0" spc="72" dirty="0">
+              <a:rPr lang="en-US" kern="0" spc="72" dirty="0">
                 <a:solidFill>
                   <a:srgbClr val="56688A"/>
                 </a:solidFill>
@@ -40638,7 +41067,7 @@
               </a:rPr>
               <a:t>slide 05</a:t>
             </a:r>
-            <a:endParaRPr lang="en-US" sz="1800" dirty="0"/>
+            <a:endParaRPr lang="en-US" dirty="0"/>
           </a:p>
         </p:txBody>
       </p:sp>
@@ -40651,6 +41080,618 @@
 </file>
 
 <file path=ppt/slides/slide50.xml><?xml version="1.0" encoding="utf-8"?>
+<p:sld xmlns:a="http://schemas.openxmlformats.org/drawingml/2006/main" xmlns:r="http://schemas.openxmlformats.org/officeDocument/2006/relationships" xmlns:p="http://schemas.openxmlformats.org/presentationml/2006/main">
+  <p:cSld name="Slide 52">
+    <p:bg>
+      <p:bgPr>
+        <a:solidFill>
+          <a:srgbClr val="08111F"/>
+        </a:solidFill>
+        <a:effectLst/>
+      </p:bgPr>
+    </p:bg>
+    <p:spTree>
+      <p:nvGrpSpPr>
+        <p:cNvPr id="1" name=""/>
+        <p:cNvGrpSpPr/>
+        <p:nvPr/>
+      </p:nvGrpSpPr>
+      <p:grpSpPr>
+        <a:xfrm>
+          <a:off x="0" y="0"/>
+          <a:ext cx="0" cy="0"/>
+          <a:chOff x="0" y="0"/>
+          <a:chExt cx="0" cy="0"/>
+        </a:xfrm>
+      </p:grpSpPr>
+      <p:sp>
+        <p:nvSpPr>
+          <p:cNvPr id="2" name="Text 0"/>
+          <p:cNvSpPr/>
+          <p:nvPr/>
+        </p:nvSpPr>
+        <p:spPr>
+          <a:xfrm>
+            <a:off x="914330" y="342830"/>
+            <a:ext cx="1978574" cy="363071"/>
+          </a:xfrm>
+          <a:prstGeom prst="rect">
+            <a:avLst/>
+          </a:prstGeom>
+          <a:noFill/>
+          <a:ln/>
+        </p:spPr>
+        <p:txBody>
+          <a:bodyPr wrap="square" lIns="25400" tIns="25400" rIns="25400" bIns="25400" rtlCol="0" anchor="t">
+            <a:normAutofit fontScale="92500" lnSpcReduction="20000"/>
+          </a:bodyPr>
+          <a:lstStyle/>
+          <a:p>
+            <a:pPr marL="0" indent="0" algn="l">
+              <a:lnSpc>
+                <a:spcPct val="145000"/>
+              </a:lnSpc>
+              <a:buNone/>
+            </a:pPr>
+            <a:r>
+              <a:rPr lang="en-US" sz="1800" kern="0" spc="72" dirty="0">
+                <a:solidFill>
+                  <a:srgbClr val="4ADE80"/>
+                </a:solidFill>
+                <a:latin typeface="Courier New" pitchFamily="34" charset="0"/>
+                <a:ea typeface="Courier New" pitchFamily="34" charset="-122"/>
+                <a:cs typeface="Courier New" pitchFamily="34" charset="-120"/>
+              </a:rPr>
+              <a:t>§ 07 harden</a:t>
+            </a:r>
+            <a:endParaRPr lang="en-US" sz="1800" dirty="0"/>
+          </a:p>
+        </p:txBody>
+      </p:sp>
+      <p:sp>
+        <p:nvSpPr>
+          <p:cNvPr id="3" name="Text 1"/>
+          <p:cNvSpPr/>
+          <p:nvPr/>
+        </p:nvSpPr>
+        <p:spPr>
+          <a:xfrm>
+            <a:off x="15178717" y="342830"/>
+            <a:ext cx="2271152" cy="363071"/>
+          </a:xfrm>
+          <a:prstGeom prst="rect">
+            <a:avLst/>
+          </a:prstGeom>
+          <a:noFill/>
+          <a:ln/>
+        </p:spPr>
+        <p:txBody>
+          <a:bodyPr wrap="square" lIns="25400" tIns="25400" rIns="25400" bIns="25400" rtlCol="0" anchor="t">
+            <a:normAutofit fontScale="92500" lnSpcReduction="20000"/>
+          </a:bodyPr>
+          <a:lstStyle/>
+          <a:p>
+            <a:pPr marL="0" indent="0" algn="l">
+              <a:lnSpc>
+                <a:spcPct val="145000"/>
+              </a:lnSpc>
+              <a:buNone/>
+            </a:pPr>
+            <a:r>
+              <a:rPr lang="en-US" sz="1800" kern="0" spc="72" dirty="0">
+                <a:solidFill>
+                  <a:srgbClr val="56688A"/>
+                </a:solidFill>
+                <a:latin typeface="Courier New" pitchFamily="34" charset="0"/>
+                <a:ea typeface="Courier New" pitchFamily="34" charset="-122"/>
+                <a:cs typeface="Courier New" pitchFamily="34" charset="-120"/>
+              </a:rPr>
+              <a:t>console · https</a:t>
+            </a:r>
+            <a:endParaRPr lang="en-US" sz="1800" dirty="0"/>
+          </a:p>
+        </p:txBody>
+      </p:sp>
+      <p:sp>
+        <p:nvSpPr>
+          <p:cNvPr id="4" name="Text 2"/>
+          <p:cNvSpPr/>
+          <p:nvPr/>
+        </p:nvSpPr>
+        <p:spPr>
+          <a:xfrm>
+            <a:off x="914330" y="838165"/>
+            <a:ext cx="16953120" cy="374276"/>
+          </a:xfrm>
+          <a:prstGeom prst="rect">
+            <a:avLst/>
+          </a:prstGeom>
+          <a:noFill/>
+          <a:ln/>
+        </p:spPr>
+        <p:txBody>
+          <a:bodyPr wrap="square" lIns="25400" tIns="25400" rIns="25400" bIns="25400" rtlCol="0" anchor="t">
+            <a:normAutofit fontScale="92500" lnSpcReduction="20000"/>
+          </a:bodyPr>
+          <a:lstStyle/>
+          <a:p>
+            <a:pPr marL="0" indent="0" algn="l">
+              <a:lnSpc>
+                <a:spcPct val="150000"/>
+              </a:lnSpc>
+              <a:buNone/>
+            </a:pPr>
+            <a:r>
+              <a:rPr lang="en-US" sz="1800" kern="0" spc="324" dirty="0">
+                <a:solidFill>
+                  <a:srgbClr val="4ADE80"/>
+                </a:solidFill>
+                <a:latin typeface="Courier New" pitchFamily="34" charset="0"/>
+                <a:ea typeface="Courier New" pitchFamily="34" charset="-122"/>
+                <a:cs typeface="Courier New" pitchFamily="34" charset="-120"/>
+              </a:rPr>
+              <a:t>AKVORADO-CONSOLE · LABELS</a:t>
+            </a:r>
+            <a:endParaRPr lang="en-US" sz="1800" dirty="0"/>
+          </a:p>
+        </p:txBody>
+      </p:sp>
+      <p:sp>
+        <p:nvSpPr>
+          <p:cNvPr id="5" name="Text 3"/>
+          <p:cNvSpPr/>
+          <p:nvPr/>
+        </p:nvSpPr>
+        <p:spPr>
+          <a:xfrm>
+            <a:off x="914330" y="1441006"/>
+            <a:ext cx="14716124" cy="676835"/>
+          </a:xfrm>
+          <a:prstGeom prst="rect">
+            <a:avLst/>
+          </a:prstGeom>
+          <a:noFill/>
+          <a:ln/>
+        </p:spPr>
+        <p:txBody>
+          <a:bodyPr wrap="square" lIns="25400" tIns="25400" rIns="25400" bIns="25400" rtlCol="0" anchor="t">
+            <a:normAutofit fontScale="92500" lnSpcReduction="20000"/>
+          </a:bodyPr>
+          <a:lstStyle/>
+          <a:p>
+            <a:pPr marL="0" indent="0" algn="l">
+              <a:lnSpc>
+                <a:spcPct val="105000"/>
+              </a:lnSpc>
+              <a:buNone/>
+            </a:pPr>
+            <a:r>
+              <a:rPr lang="en-US" sz="4800" b="1" kern="0" spc="-72" dirty="0">
+                <a:solidFill>
+                  <a:srgbClr val="E6EDF3"/>
+                </a:solidFill>
+                <a:latin typeface="Arial" pitchFamily="34" charset="0"/>
+                <a:ea typeface="Arial" pitchFamily="34" charset="-122"/>
+                <a:cs typeface="Arial" pitchFamily="34" charset="-120"/>
+              </a:rPr>
+              <a:t>Switch the console router to HTTPS.</a:t>
+            </a:r>
+            <a:endParaRPr lang="en-US" sz="4800" dirty="0"/>
+          </a:p>
+        </p:txBody>
+      </p:sp>
+      <p:sp>
+        <p:nvSpPr>
+          <p:cNvPr id="6" name="Shape 4"/>
+          <p:cNvSpPr/>
+          <p:nvPr/>
+        </p:nvSpPr>
+        <p:spPr>
+          <a:xfrm>
+            <a:off x="914330" y="2803572"/>
+            <a:ext cx="16459340" cy="4376947"/>
+          </a:xfrm>
+          <a:prstGeom prst="roundRect">
+            <a:avLst>
+              <a:gd name="adj" fmla="val 1306"/>
+            </a:avLst>
+          </a:prstGeom>
+          <a:solidFill>
+            <a:srgbClr val="0C1729"/>
+          </a:solidFill>
+          <a:ln w="11206">
+            <a:solidFill>
+              <a:srgbClr val="1E3354"/>
+            </a:solidFill>
+            <a:prstDash val="solid"/>
+          </a:ln>
+        </p:spPr>
+        <p:txBody>
+          <a:bodyPr/>
+          <a:lstStyle/>
+          <a:p>
+            <a:endParaRPr lang="en-US"/>
+          </a:p>
+        </p:txBody>
+      </p:sp>
+      <p:sp>
+        <p:nvSpPr>
+          <p:cNvPr id="7" name="Text 5"/>
+          <p:cNvSpPr/>
+          <p:nvPr/>
+        </p:nvSpPr>
+        <p:spPr>
+          <a:xfrm>
+            <a:off x="1268436" y="3081477"/>
+            <a:ext cx="16244908" cy="3859236"/>
+          </a:xfrm>
+          <a:prstGeom prst="rect">
+            <a:avLst/>
+          </a:prstGeom>
+          <a:noFill/>
+          <a:ln/>
+        </p:spPr>
+        <p:txBody>
+          <a:bodyPr wrap="square" lIns="25400" tIns="25400" rIns="25400" bIns="25400" rtlCol="0" anchor="t">
+            <a:normAutofit/>
+          </a:bodyPr>
+          <a:lstStyle/>
+          <a:p>
+            <a:pPr marL="0" indent="0" algn="l">
+              <a:lnSpc>
+                <a:spcPct val="155000"/>
+              </a:lnSpc>
+              <a:buNone/>
+            </a:pPr>
+            <a:r>
+              <a:rPr lang="en-US" sz="1800" dirty="0">
+                <a:solidFill>
+                  <a:srgbClr val="CBD5E1"/>
+                </a:solidFill>
+                <a:highlight>
+                  <a:srgbClr val="0C1729"/>
+                </a:highlight>
+                <a:latin typeface="Courier New" pitchFamily="34" charset="0"/>
+                <a:ea typeface="Courier New" pitchFamily="34" charset="-122"/>
+                <a:cs typeface="Courier New" pitchFamily="34" charset="-120"/>
+              </a:rPr>
+              <a:t>labels:</a:t>
+            </a:r>
+            <a:endParaRPr lang="en-US" sz="1800" dirty="0"/>
+          </a:p>
+          <a:p>
+            <a:pPr marL="0" indent="0" algn="l">
+              <a:lnSpc>
+                <a:spcPct val="155000"/>
+              </a:lnSpc>
+              <a:buNone/>
+            </a:pPr>
+            <a:r>
+              <a:rPr lang="en-US" sz="1800" dirty="0">
+                <a:solidFill>
+                  <a:srgbClr val="CBD5E1"/>
+                </a:solidFill>
+                <a:highlight>
+                  <a:srgbClr val="0C1729"/>
+                </a:highlight>
+                <a:latin typeface="Courier New" pitchFamily="34" charset="0"/>
+                <a:ea typeface="Courier New" pitchFamily="34" charset="-122"/>
+                <a:cs typeface="Courier New" pitchFamily="34" charset="-120"/>
+              </a:rPr>
+              <a:t>  - traefik.enable=</a:t>
+            </a:r>
+            <a:endParaRPr lang="en-US" sz="1800" dirty="0"/>
+          </a:p>
+          <a:p>
+            <a:pPr marL="0" indent="0" algn="l">
+              <a:lnSpc>
+                <a:spcPct val="155000"/>
+              </a:lnSpc>
+              <a:buNone/>
+            </a:pPr>
+            <a:r>
+              <a:rPr lang="en-US" sz="1800" dirty="0">
+                <a:solidFill>
+                  <a:srgbClr val="FCD34D"/>
+                </a:solidFill>
+                <a:latin typeface="Courier New" pitchFamily="34" charset="0"/>
+                <a:ea typeface="Courier New" pitchFamily="34" charset="-122"/>
+                <a:cs typeface="Courier New" pitchFamily="34" charset="-120"/>
+              </a:rPr>
+              <a:t>true </a:t>
+            </a:r>
+            <a:r>
+              <a:rPr lang="en-US" sz="1800" dirty="0">
+                <a:solidFill>
+                  <a:srgbClr val="56688A"/>
+                </a:solidFill>
+                <a:latin typeface="Courier New" pitchFamily="34" charset="0"/>
+                <a:ea typeface="Courier New" pitchFamily="34" charset="-122"/>
+                <a:cs typeface="Courier New" pitchFamily="34" charset="-120"/>
+              </a:rPr>
+              <a:t># enable TLS, attach the cert resolver, declare the domain </a:t>
+            </a:r>
+            <a:r>
+              <a:rPr lang="en-US" sz="1800" dirty="0">
+                <a:solidFill>
+                  <a:srgbClr val="CBD5E1"/>
+                </a:solidFill>
+                <a:highlight>
+                  <a:srgbClr val="0C1729"/>
+                </a:highlight>
+                <a:latin typeface="Courier New" pitchFamily="34" charset="0"/>
+                <a:ea typeface="Courier New" pitchFamily="34" charset="-122"/>
+                <a:cs typeface="Courier New" pitchFamily="34" charset="-120"/>
+              </a:rPr>
+              <a:t>  - traefik.http.routers.akvorado-console.tls= </a:t>
+            </a:r>
+            <a:r>
+              <a:rPr lang="en-US" sz="1800" dirty="0">
+                <a:solidFill>
+                  <a:srgbClr val="FCD34D"/>
+                </a:solidFill>
+                <a:latin typeface="Courier New" pitchFamily="34" charset="0"/>
+                <a:ea typeface="Courier New" pitchFamily="34" charset="-122"/>
+                <a:cs typeface="Courier New" pitchFamily="34" charset="-120"/>
+              </a:rPr>
+              <a:t>true </a:t>
+            </a:r>
+            <a:r>
+              <a:rPr lang="en-US" sz="1800" dirty="0">
+                <a:solidFill>
+                  <a:srgbClr val="CBD5E1"/>
+                </a:solidFill>
+                <a:highlight>
+                  <a:srgbClr val="0C1729"/>
+                </a:highlight>
+                <a:latin typeface="Courier New" pitchFamily="34" charset="0"/>
+                <a:ea typeface="Courier New" pitchFamily="34" charset="-122"/>
+                <a:cs typeface="Courier New" pitchFamily="34" charset="-120"/>
+              </a:rPr>
+              <a:t>  - traefik.http.routers.akvorado-console.tls.certresolver=</a:t>
+            </a:r>
+            <a:r>
+              <a:rPr lang="en-US" sz="1800" dirty="0">
+                <a:solidFill>
+                  <a:srgbClr val="FCD34D"/>
+                </a:solidFill>
+                <a:latin typeface="Courier New" pitchFamily="34" charset="0"/>
+                <a:ea typeface="Courier New" pitchFamily="34" charset="-122"/>
+                <a:cs typeface="Courier New" pitchFamily="34" charset="-120"/>
+              </a:rPr>
+              <a:t>letsencrypt </a:t>
+            </a:r>
+            <a:r>
+              <a:rPr lang="en-US" sz="1800" dirty="0">
+                <a:solidFill>
+                  <a:srgbClr val="CBD5E1"/>
+                </a:solidFill>
+                <a:highlight>
+                  <a:srgbClr val="0C1729"/>
+                </a:highlight>
+                <a:latin typeface="Courier New" pitchFamily="34" charset="0"/>
+                <a:ea typeface="Courier New" pitchFamily="34" charset="-122"/>
+                <a:cs typeface="Courier New" pitchFamily="34" charset="-120"/>
+              </a:rPr>
+              <a:t>  - traefik.http.routers.akvorado-console.tls.domains[ </a:t>
+            </a:r>
+            <a:r>
+              <a:rPr lang="en-US" sz="1800" dirty="0">
+                <a:solidFill>
+                  <a:srgbClr val="FDBA74"/>
+                </a:solidFill>
+                <a:latin typeface="Courier New" pitchFamily="34" charset="0"/>
+                <a:ea typeface="Courier New" pitchFamily="34" charset="-122"/>
+                <a:cs typeface="Courier New" pitchFamily="34" charset="-120"/>
+              </a:rPr>
+              <a:t>0</a:t>
+            </a:r>
+            <a:r>
+              <a:rPr lang="en-US" sz="1800" dirty="0">
+                <a:solidFill>
+                  <a:srgbClr val="CBD5E1"/>
+                </a:solidFill>
+                <a:highlight>
+                  <a:srgbClr val="0C1729"/>
+                </a:highlight>
+                <a:latin typeface="Courier New" pitchFamily="34" charset="0"/>
+                <a:ea typeface="Courier New" pitchFamily="34" charset="-122"/>
+                <a:cs typeface="Courier New" pitchFamily="34" charset="-120"/>
+              </a:rPr>
+              <a:t>].main=</a:t>
+            </a:r>
+            <a:r>
+              <a:rPr lang="en-US" sz="1800" dirty="0">
+                <a:solidFill>
+                  <a:srgbClr val="FCD34D"/>
+                </a:solidFill>
+                <a:latin typeface="Courier New" pitchFamily="34" charset="0"/>
+                <a:ea typeface="Courier New" pitchFamily="34" charset="-122"/>
+                <a:cs typeface="Courier New" pitchFamily="34" charset="-120"/>
+              </a:rPr>
+              <a:t>flows.example.com </a:t>
+            </a:r>
+            <a:r>
+              <a:rPr lang="en-US" sz="1800" dirty="0">
+                <a:solidFill>
+                  <a:srgbClr val="56688A"/>
+                </a:solidFill>
+                <a:latin typeface="Courier New" pitchFamily="34" charset="0"/>
+                <a:ea typeface="Courier New" pitchFamily="34" charset="-122"/>
+                <a:cs typeface="Courier New" pitchFamily="34" charset="-120"/>
+              </a:rPr>
+              <a:t># move the console off the public entrypoint onto websecure </a:t>
+            </a:r>
+            <a:r>
+              <a:rPr lang="en-US" sz="1800" dirty="0">
+                <a:solidFill>
+                  <a:srgbClr val="CBD5E1"/>
+                </a:solidFill>
+                <a:highlight>
+                  <a:srgbClr val="0C1729"/>
+                </a:highlight>
+                <a:latin typeface="Courier New" pitchFamily="34" charset="0"/>
+                <a:ea typeface="Courier New" pitchFamily="34" charset="-122"/>
+                <a:cs typeface="Courier New" pitchFamily="34" charset="-120"/>
+              </a:rPr>
+              <a:t>  - traefik.http.routers.akvorado-console.entrypoints= </a:t>
+            </a:r>
+            <a:r>
+              <a:rPr lang="en-US" sz="1800" dirty="0">
+                <a:solidFill>
+                  <a:srgbClr val="FCD34D"/>
+                </a:solidFill>
+                <a:latin typeface="Courier New" pitchFamily="34" charset="0"/>
+                <a:ea typeface="Courier New" pitchFamily="34" charset="-122"/>
+                <a:cs typeface="Courier New" pitchFamily="34" charset="-120"/>
+              </a:rPr>
+              <a:t>websecure</a:t>
+            </a:r>
+            <a:endParaRPr lang="en-US" sz="1800" dirty="0"/>
+          </a:p>
+        </p:txBody>
+      </p:sp>
+      <p:sp>
+        <p:nvSpPr>
+          <p:cNvPr id="8" name="Text 6"/>
+          <p:cNvSpPr/>
+          <p:nvPr/>
+        </p:nvSpPr>
+        <p:spPr>
+          <a:xfrm>
+            <a:off x="914330" y="7447184"/>
+            <a:ext cx="16953120" cy="710453"/>
+          </a:xfrm>
+          <a:prstGeom prst="rect">
+            <a:avLst/>
+          </a:prstGeom>
+          <a:noFill/>
+          <a:ln/>
+        </p:spPr>
+        <p:txBody>
+          <a:bodyPr wrap="square" lIns="25400" tIns="25400" rIns="25400" bIns="25400" rtlCol="0" anchor="t">
+            <a:normAutofit/>
+          </a:bodyPr>
+          <a:lstStyle/>
+          <a:p>
+            <a:pPr marL="0" indent="0" algn="l">
+              <a:lnSpc>
+                <a:spcPct val="150000"/>
+              </a:lnSpc>
+              <a:buNone/>
+            </a:pPr>
+            <a:r>
+              <a:rPr lang="en-US" sz="1800" dirty="0">
+                <a:solidFill>
+                  <a:srgbClr val="8A9BB4"/>
+                </a:solidFill>
+                <a:latin typeface="Courier New" pitchFamily="34" charset="0"/>
+                <a:ea typeface="Courier New" pitchFamily="34" charset="-122"/>
+                <a:cs typeface="Courier New" pitchFamily="34" charset="-120"/>
+              </a:rPr>
+              <a:t>The Remote-User / Remote-Name / Remote-Email headers are static under basic auth — set them to whoever owns the dashboard.</a:t>
+            </a:r>
+            <a:endParaRPr lang="en-US" sz="1800" dirty="0"/>
+          </a:p>
+        </p:txBody>
+      </p:sp>
+      <p:sp>
+        <p:nvSpPr>
+          <p:cNvPr id="9" name="Text 7"/>
+          <p:cNvSpPr/>
+          <p:nvPr/>
+        </p:nvSpPr>
+        <p:spPr>
+          <a:xfrm>
+            <a:off x="914330" y="9619199"/>
+            <a:ext cx="3767941" cy="363071"/>
+          </a:xfrm>
+          <a:prstGeom prst="rect">
+            <a:avLst/>
+          </a:prstGeom>
+          <a:noFill/>
+          <a:ln/>
+        </p:spPr>
+        <p:txBody>
+          <a:bodyPr wrap="square" lIns="25400" tIns="25400" rIns="25400" bIns="25400" rtlCol="0" anchor="t">
+            <a:normAutofit fontScale="92500" lnSpcReduction="20000"/>
+          </a:bodyPr>
+          <a:lstStyle/>
+          <a:p>
+            <a:pPr marL="0" indent="0" algn="l">
+              <a:lnSpc>
+                <a:spcPct val="145000"/>
+              </a:lnSpc>
+              <a:buNone/>
+            </a:pPr>
+            <a:r>
+              <a:rPr lang="en-US" sz="1800" kern="0" spc="72" dirty="0">
+                <a:solidFill>
+                  <a:srgbClr val="56688A"/>
+                </a:solidFill>
+                <a:latin typeface="Courier New" pitchFamily="34" charset="0"/>
+                <a:ea typeface="Courier New" pitchFamily="34" charset="-122"/>
+                <a:cs typeface="Courier New" pitchFamily="34" charset="-120"/>
+              </a:rPr>
+              <a:t>akvorado-lab · don jolley</a:t>
+            </a:r>
+            <a:endParaRPr lang="en-US" sz="1800" dirty="0"/>
+          </a:p>
+        </p:txBody>
+      </p:sp>
+      <p:sp>
+        <p:nvSpPr>
+          <p:cNvPr id="10" name="Text 8"/>
+          <p:cNvSpPr/>
+          <p:nvPr/>
+        </p:nvSpPr>
+        <p:spPr>
+          <a:xfrm>
+            <a:off x="15764049" y="9619199"/>
+            <a:ext cx="1685820" cy="363071"/>
+          </a:xfrm>
+          <a:prstGeom prst="rect">
+            <a:avLst/>
+          </a:prstGeom>
+          <a:noFill/>
+          <a:ln/>
+        </p:spPr>
+        <p:txBody>
+          <a:bodyPr wrap="square" lIns="25400" tIns="25400" rIns="25400" bIns="25400" rtlCol="0" anchor="t">
+            <a:normAutofit fontScale="92500" lnSpcReduction="20000"/>
+          </a:bodyPr>
+          <a:lstStyle/>
+          <a:p>
+            <a:pPr marL="0" indent="0" algn="l">
+              <a:lnSpc>
+                <a:spcPct val="145000"/>
+              </a:lnSpc>
+              <a:buNone/>
+            </a:pPr>
+            <a:r>
+              <a:rPr lang="en-US" sz="1800" kern="0" spc="72" dirty="0">
+                <a:solidFill>
+                  <a:srgbClr val="56688A"/>
+                </a:solidFill>
+                <a:latin typeface="Courier New" pitchFamily="34" charset="0"/>
+                <a:ea typeface="Courier New" pitchFamily="34" charset="-122"/>
+                <a:cs typeface="Courier New" pitchFamily="34" charset="-120"/>
+              </a:rPr>
+              <a:t>slide 52</a:t>
+            </a:r>
+            <a:endParaRPr lang="en-US" sz="1800" dirty="0"/>
+          </a:p>
+        </p:txBody>
+      </p:sp>
+    </p:spTree>
+  </p:cSld>
+  <p:clrMapOvr>
+    <a:masterClrMapping/>
+  </p:clrMapOvr>
+</p:sld>
+</file>
+
+<file path=ppt/slides/slide51.xml><?xml version="1.0" encoding="utf-8"?>
 <p:sld xmlns:a="http://schemas.openxmlformats.org/drawingml/2006/main" xmlns:r="http://schemas.openxmlformats.org/officeDocument/2006/relationships" xmlns:p="http://schemas.openxmlformats.org/presentationml/2006/main">
   <p:cSld name="Slide 53">
     <p:bg>
@@ -41338,7 +42379,7 @@
 </p:sld>
 </file>
 
-<file path=ppt/slides/slide51.xml><?xml version="1.0" encoding="utf-8"?>
+<file path=ppt/slides/slide52.xml><?xml version="1.0" encoding="utf-8"?>
 <p:sld xmlns:a="http://schemas.openxmlformats.org/drawingml/2006/main" xmlns:r="http://schemas.openxmlformats.org/officeDocument/2006/relationships" xmlns:p="http://schemas.openxmlformats.org/presentationml/2006/main">
   <p:cSld name="Slide 54">
     <p:bg>
@@ -42843,7 +43884,7 @@
 </p:sld>
 </file>
 
-<file path=ppt/slides/slide52.xml><?xml version="1.0" encoding="utf-8"?>
+<file path=ppt/slides/slide53.xml><?xml version="1.0" encoding="utf-8"?>
 <p:sld xmlns:a="http://schemas.openxmlformats.org/drawingml/2006/main" xmlns:r="http://schemas.openxmlformats.org/officeDocument/2006/relationships" xmlns:p="http://schemas.openxmlformats.org/presentationml/2006/main">
   <p:cSld>
     <p:bg>
@@ -43193,7 +44234,7 @@
 </p:sld>
 </file>
 
-<file path=ppt/slides/slide53.xml><?xml version="1.0" encoding="utf-8"?>
+<file path=ppt/slides/slide54.xml><?xml version="1.0" encoding="utf-8"?>
 <p:sld xmlns:a="http://schemas.openxmlformats.org/drawingml/2006/main" xmlns:r="http://schemas.openxmlformats.org/officeDocument/2006/relationships" xmlns:p="http://schemas.openxmlformats.org/presentationml/2006/main">
   <p:cSld name="Slide 55">
     <p:bg>
@@ -43385,7 +44426,7 @@
 </p:sld>
 </file>
 
-<file path=ppt/slides/slide54.xml><?xml version="1.0" encoding="utf-8"?>
+<file path=ppt/slides/slide55.xml><?xml version="1.0" encoding="utf-8"?>
 <p:sld xmlns:a="http://schemas.openxmlformats.org/drawingml/2006/main" xmlns:r="http://schemas.openxmlformats.org/officeDocument/2006/relationships" xmlns:p="http://schemas.openxmlformats.org/presentationml/2006/main">
   <p:cSld name="Slide 56">
     <p:bg>
@@ -44406,7 +45447,7 @@
 </p:sld>
 </file>
 
-<file path=ppt/slides/slide55.xml><?xml version="1.0" encoding="utf-8"?>
+<file path=ppt/slides/slide56.xml><?xml version="1.0" encoding="utf-8"?>
 <p:sld xmlns:a="http://schemas.openxmlformats.org/drawingml/2006/main" xmlns:r="http://schemas.openxmlformats.org/officeDocument/2006/relationships" xmlns:p="http://schemas.openxmlformats.org/presentationml/2006/main">
   <p:cSld name="Slide 57">
     <p:bg>
@@ -45466,7 +46507,7 @@
 </p:sld>
 </file>
 
-<file path=ppt/slides/slide56.xml><?xml version="1.0" encoding="utf-8"?>
+<file path=ppt/slides/slide57.xml><?xml version="1.0" encoding="utf-8"?>
 <p:sld xmlns:a="http://schemas.openxmlformats.org/drawingml/2006/main" xmlns:r="http://schemas.openxmlformats.org/officeDocument/2006/relationships" xmlns:p="http://schemas.openxmlformats.org/presentationml/2006/main">
   <p:cSld name="Slide 58">
     <p:bg>
@@ -45599,17 +46640,17 @@
         <p:spPr>
           <a:xfrm>
             <a:off x="914330" y="5254333"/>
-            <a:ext cx="13735049" cy="1293159"/>
-          </a:xfrm>
-          <a:prstGeom prst="rect">
-            <a:avLst/>
-          </a:prstGeom>
-          <a:noFill/>
-          <a:ln/>
-        </p:spPr>
-        <p:txBody>
-          <a:bodyPr wrap="square" lIns="25400" tIns="25400" rIns="25400" bIns="25400" rtlCol="0" anchor="t">
-            <a:normAutofit fontScale="92500"/>
+            <a:ext cx="13735049" cy="3377603"/>
+          </a:xfrm>
+          <a:prstGeom prst="rect">
+            <a:avLst/>
+          </a:prstGeom>
+          <a:noFill/>
+          <a:ln/>
+        </p:spPr>
+        <p:txBody>
+          <a:bodyPr wrap="square" lIns="25400" tIns="25400" rIns="25400" bIns="25400" rtlCol="0" anchor="t">
+            <a:normAutofit/>
           </a:bodyPr>
           <a:lstStyle/>
           <a:p>
@@ -45630,7 +46671,67 @@
               </a:rPr>
               <a:t>akvorado.net/docs · github.com/akvorado/akvorado · lab guide in your pack</a:t>
             </a:r>
-            <a:endParaRPr lang="en-US" sz="3300" dirty="0"/>
+            <a:endParaRPr lang="en-US" sz="3300" dirty="0">
+              <a:solidFill>
+                <a:srgbClr val="CBD5E1"/>
+              </a:solidFill>
+              <a:highlight>
+                <a:srgbClr val="C0C0C0"/>
+              </a:highlight>
+              <a:latin typeface="Arial" pitchFamily="34" charset="0"/>
+              <a:cs typeface="Arial" pitchFamily="34" charset="-120"/>
+            </a:endParaRPr>
+          </a:p>
+          <a:p>
+            <a:pPr>
+              <a:lnSpc>
+                <a:spcPct val="150000"/>
+              </a:lnSpc>
+            </a:pPr>
+            <a:r>
+              <a:rPr lang="en-US" sz="6000" dirty="0">
+                <a:solidFill>
+                  <a:schemeClr val="bg1"/>
+                </a:solidFill>
+              </a:rPr>
+              <a:t>https://</a:t>
+            </a:r>
+            <a:r>
+              <a:rPr lang="en-US" sz="6000" dirty="0" err="1">
+                <a:solidFill>
+                  <a:schemeClr val="bg1"/>
+                </a:solidFill>
+              </a:rPr>
+              <a:t>github.com</a:t>
+            </a:r>
+            <a:r>
+              <a:rPr lang="en-US" sz="6000" dirty="0">
+                <a:solidFill>
+                  <a:schemeClr val="bg1"/>
+                </a:solidFill>
+              </a:rPr>
+              <a:t>/</a:t>
+            </a:r>
+            <a:r>
+              <a:rPr lang="en-US" sz="6000" dirty="0" err="1">
+                <a:solidFill>
+                  <a:schemeClr val="bg1"/>
+                </a:solidFill>
+              </a:rPr>
+              <a:t>donaldwolcomm</a:t>
+            </a:r>
+            <a:r>
+              <a:rPr lang="en-US" sz="6000" dirty="0">
+                <a:solidFill>
+                  <a:schemeClr val="bg1"/>
+                </a:solidFill>
+              </a:rPr>
+              <a:t>/a-lab</a:t>
+            </a:r>
+            <a:r>
+              <a:rPr lang="en-US" sz="6000" dirty="0"/>
+              <a:t>/</a:t>
+            </a:r>
           </a:p>
         </p:txBody>
       </p:sp>
